--- a/pitch/CareSphere_Congressional_App_Challenge_Deck.pptx
+++ b/pitch/CareSphere_Congressional_App_Challenge_Deck.pptx
@@ -583,7 +583,7 @@
           <a:lstStyle/>
           <a:p>
             <a:r>
-              <a:t>[2:20–2:33] The hardest problem was keeping Bluetooth honest. Notifications arrive late and out of order, so I parse the standard profile, label every sample at the source, and drop stale sessions with a generation counter.</a:t>
+              <a:t>[2:20–2:33] The hardest problem was keeping Bluetooth honest. Notifications arrive late and out of order, so I parse the standard heart-rate profile, label every sample live or simulated at the source — the tag follows it into the CSV export — and drop stale sessions with a generation counter.</a:t>
             </a:r>
           </a:p>
         </p:txBody>
@@ -653,7 +653,7 @@
           <a:lstStyle/>
           <a:p>
             <a:r>
-              <a:t>[2:33–2:45] Version 2.0 starts with co-design sessions with autistic people, people living with dementia and caregivers, then a TestFlight beta and sensor history in the visit brief — still with no server.</a:t>
+              <a:t>[2:33–2:45] Version 2.2 is on GitHub with three public releases and seventeen tests. Version 2.0 of this entry starts with co-design sessions with autistic people, people living with dementia and caregivers, then a TestFlight beta and sensor history in the visit brief — still with no server. Deliberately not planned: cloud sync, a clinician portal or a drug-interaction checker — not without clinical review.</a:t>
             </a:r>
           </a:p>
         </p:txBody>
@@ -793,7 +793,7 @@
           <a:lstStyle/>
           <a:p>
             <a:r>
-              <a:t>[0:15–0:31] One in four older adults is socially isolated — a twenty-nine percent higher risk of early death. One in thirty-one children is autistic, and they become adults who still need support. Half of long-term medications aren't taken as prescribed.</a:t>
+              <a:t>[0:15–0:31] One in four older adults is socially isolated — a twenty-nine percent higher risk of early death. One in thirty-one children is autistic, and they become adults who still need support. Half of long-term medications aren't taken as prescribed. And sixty-three million family caregivers hold it all together.</a:t>
             </a:r>
           </a:p>
         </p:txBody>
@@ -933,7 +933,7 @@
           <a:lstStyle/>
           <a:p>
             <a:r>
-              <a:t>[0:43–0:53] CareSphere is one calm app with five tabs — Overview, Activities, Coffee Circles, Care Circle and Vitals — with no server behind any of it.</a:t>
+              <a:t>[0:43–0:53] CareSphere is one calm app with five tabs — Overview for routines, mood and medication check-ins; Activities with sensory and memory tools; Coffee Circles, live video rooms; Care Circle for notes and visit prep; and Vitals with real Bluetooth heart rate — on iPhone and on the web, with no server behind any of it.</a:t>
             </a:r>
           </a:p>
         </p:txBody>
@@ -1073,7 +1073,7 @@
           <a:lstStyle/>
           <a:p>
             <a:r>
-              <a:t>[1:40–1:51] What makes it different isn't a feature — it's four rules in the code: never fabricate a reading, never send anything automatically, calm by default, private by architecture.</a:t>
+              <a:t>[1:40–1:51] What makes it different isn't a feature — it's four rules in the code: never fabricate a reading (cancel a pairing and the card stays blank); never send anything automatically — briefs, texts and SOS messages end with a human tap; calm by default — reduce-motion and high-contrast built in; private by architecture — no account, no server, AI that runs on the phone.</a:t>
             </a:r>
           </a:p>
         </p:txBody>
@@ -1143,7 +1143,7 @@
           <a:lstStyle/>
           <a:p>
             <a:r>
-              <a:t>[1:51–1:58] Three people who rarely get the same app: older adults, autistic teens and adults, and their caregivers.</a:t>
+              <a:t>[1:51–1:58] Three people who rarely get the same app: older adults living independently, autistic teens and adults, and the family caregivers who support them — in large type, with no account.</a:t>
             </a:r>
           </a:p>
         </p:txBody>
@@ -1213,7 +1213,7 @@
           <a:lstStyle/>
           <a:p>
             <a:r>
-              <a:t>[1:58–2:09] Everything stays on the device: AES-256 encryption, Bluetooth and HealthKit read locally, and a 1.5-billion-parameter model that answers health questions offline. Zero accounts, zero servers, zero trackers.</a:t>
+              <a:t>[1:58–2:09] Everything stays on the device: AES-256 encryption with a key that cannot be exported, Bluetooth and HealthKit read locally, and a 1.5-billion-parameter model that answers health questions offline. Zero accounts, zero servers, zero trackers. Why now: phones can finally run a useful language model offline, so private AI help no longer needs a cloud.</a:t>
             </a:r>
           </a:p>
         </p:txBody>
@@ -1283,7 +1283,7 @@
           <a:lstStyle/>
           <a:p>
             <a:r>
-              <a:t>[2:09–2:20] It's React and JavaScript on the web, Swift and SwiftUI on iPhone — Web Bluetooth, HealthKit, CryptoKit and llama.cpp. Eleven thousand lines, seventeen tests, three public releases.</a:t>
+              <a:t>[2:09–2:20] It's React and JavaScript on the web, Swift and SwiftUI on iPhone — Web Bluetooth, HealthKit, CryptoKit and llama.cpp. Eleven thousand lines, seventeen tests, two CI pipelines, three public releases.</a:t>
             </a:r>
           </a:p>
         </p:txBody>
@@ -4337,7 +4337,7 @@
         </p:blipFill>
         <p:spPr>
           <a:xfrm>
-            <a:off x="640080" y="1234440"/>
+            <a:off x="640080" y="1188720"/>
             <a:ext cx="960120" cy="960120"/>
           </a:xfrm>
           <a:prstGeom prst="roundRect">
@@ -4355,8 +4355,8 @@
         </p:nvSpPr>
         <p:spPr>
           <a:xfrm>
-            <a:off x="640080" y="2423160"/>
-            <a:ext cx="6949440" cy="1097280"/>
+            <a:off x="640080" y="2377440"/>
+            <a:ext cx="7132320" cy="1188720"/>
           </a:xfrm>
           <a:prstGeom prst="rect">
             <a:avLst/>
@@ -4371,18 +4371,18 @@
           <a:p>
             <a:pPr algn="l">
               <a:lnSpc>
-                <a:spcPts val="7439"/>
-              </a:lnSpc>
-              <a:spcBef>
-                <a:spcPts val="0"/>
-              </a:spcBef>
-              <a:spcAft>
-                <a:spcPts val="0"/>
-              </a:spcAft>
-              <a:buNone/>
-            </a:pPr>
-            <a:r>
-              <a:rPr sz="6200" b="1" i="0">
+                <a:spcPts val="7680"/>
+              </a:lnSpc>
+              <a:spcBef>
+                <a:spcPts val="0"/>
+              </a:spcBef>
+              <a:spcAft>
+                <a:spcPts val="0"/>
+              </a:spcAft>
+              <a:buNone/>
+            </a:pPr>
+            <a:r>
+              <a:rPr sz="6400" b="1" i="0">
                 <a:solidFill>
                   <a:srgbClr val="FFFFFF"/>
                 </a:solidFill>
@@ -4401,8 +4401,8 @@
         </p:nvSpPr>
         <p:spPr>
           <a:xfrm>
-            <a:off x="640080" y="3520440"/>
-            <a:ext cx="6766560" cy="548640"/>
+            <a:off x="640080" y="3566160"/>
+            <a:ext cx="6949440" cy="548640"/>
           </a:xfrm>
           <a:prstGeom prst="rect">
             <a:avLst/>
@@ -4417,18 +4417,18 @@
           <a:p>
             <a:pPr algn="l">
               <a:lnSpc>
-                <a:spcPts val="3120"/>
-              </a:lnSpc>
-              <a:spcBef>
-                <a:spcPts val="0"/>
-              </a:spcBef>
-              <a:spcAft>
-                <a:spcPts val="0"/>
-              </a:spcAft>
-              <a:buNone/>
-            </a:pPr>
-            <a:r>
-              <a:rPr sz="2600" b="0" i="0">
+                <a:spcPts val="3360"/>
+              </a:lnSpc>
+              <a:spcBef>
+                <a:spcPts val="0"/>
+              </a:spcBef>
+              <a:spcAft>
+                <a:spcPts val="0"/>
+              </a:spcAft>
+              <a:buNone/>
+            </a:pPr>
+            <a:r>
+              <a:rPr sz="2800" b="0" i="0">
                 <a:solidFill>
                   <a:srgbClr val="4ADE80"/>
                 </a:solidFill>
@@ -4447,8 +4447,8 @@
         </p:nvSpPr>
         <p:spPr>
           <a:xfrm>
-            <a:off x="640080" y="4206240"/>
-            <a:ext cx="6583680" cy="914400"/>
+            <a:off x="640080" y="4251960"/>
+            <a:ext cx="6766560" cy="914400"/>
           </a:xfrm>
           <a:prstGeom prst="rect">
             <a:avLst/>
@@ -4463,24 +4463,24 @@
           <a:p>
             <a:pPr algn="l">
               <a:lnSpc>
-                <a:spcPts val="2470"/>
-              </a:lnSpc>
-              <a:spcBef>
-                <a:spcPts val="0"/>
-              </a:spcBef>
-              <a:spcAft>
-                <a:spcPts val="0"/>
-              </a:spcAft>
-              <a:buNone/>
-            </a:pPr>
-            <a:r>
-              <a:rPr sz="1900" b="0" i="0">
+                <a:spcPts val="2600"/>
+              </a:lnSpc>
+              <a:spcBef>
+                <a:spcPts val="0"/>
+              </a:spcBef>
+              <a:spcAft>
+                <a:spcPts val="0"/>
+              </a:spcAft>
+              <a:buNone/>
+            </a:pPr>
+            <a:r>
+              <a:rPr sz="2000" b="0" i="0">
                 <a:solidFill>
                   <a:srgbClr val="C7D7F2"/>
                 </a:solidFill>
                 <a:latin typeface="Arial"/>
               </a:rPr>
-              <a:t>A private companion for older adults, autistic people and the families who care for them.</a:t>
+              <a:t>A private care companion for older adults, autistic people and their families.</a:t>
             </a:r>
           </a:p>
         </p:txBody>
@@ -4494,7 +4494,7 @@
         <p:spPr>
           <a:xfrm>
             <a:off x="640080" y="5486400"/>
-            <a:ext cx="6766560" cy="365760"/>
+            <a:ext cx="6949440" cy="365760"/>
           </a:xfrm>
           <a:prstGeom prst="rect">
             <a:avLst/>
@@ -4509,18 +4509,18 @@
           <a:p>
             <a:pPr algn="l">
               <a:lnSpc>
-                <a:spcPts val="1800"/>
-              </a:lnSpc>
-              <a:spcBef>
-                <a:spcPts val="0"/>
-              </a:spcBef>
-              <a:spcAft>
-                <a:spcPts val="0"/>
-              </a:spcAft>
-              <a:buNone/>
-            </a:pPr>
-            <a:r>
-              <a:rPr sz="1500" b="1" i="0">
+                <a:spcPts val="1920"/>
+              </a:lnSpc>
+              <a:spcBef>
+                <a:spcPts val="0"/>
+              </a:spcBef>
+              <a:spcAft>
+                <a:spcPts val="0"/>
+              </a:spcAft>
+              <a:buNone/>
+            </a:pPr>
+            <a:r>
+              <a:rPr sz="1600" b="1" i="0">
                 <a:solidFill>
                   <a:srgbClr val="FFFFFF"/>
                 </a:solidFill>
@@ -4539,7 +4539,7 @@
         </p:nvSpPr>
         <p:spPr>
           <a:xfrm>
-            <a:off x="640080" y="5870448"/>
+            <a:off x="640080" y="5897880"/>
             <a:ext cx="6766560" cy="320040"/>
           </a:xfrm>
           <a:prstGeom prst="rect">
@@ -4697,18 +4697,18 @@
           <a:p>
             <a:pPr algn="l">
               <a:lnSpc>
-                <a:spcPts val="4032"/>
-              </a:lnSpc>
-              <a:spcBef>
-                <a:spcPts val="0"/>
-              </a:spcBef>
-              <a:spcAft>
-                <a:spcPts val="0"/>
-              </a:spcAft>
-              <a:buNone/>
-            </a:pPr>
-            <a:r>
-              <a:rPr sz="3600" b="1" i="0">
+                <a:spcPts val="4480"/>
+              </a:lnSpc>
+              <a:spcBef>
+                <a:spcPts val="0"/>
+              </a:spcBef>
+              <a:spcAft>
+                <a:spcPts val="0"/>
+              </a:spcAft>
+              <a:buNone/>
+            </a:pPr>
+            <a:r>
+              <a:rPr sz="4000" b="1" i="0">
                 <a:solidFill>
                   <a:srgbClr val="FFFFFF"/>
                 </a:solidFill>
@@ -4728,7 +4728,7 @@
         <p:spPr>
           <a:xfrm>
             <a:off x="640080" y="1783080"/>
-            <a:ext cx="6858000" cy="822960"/>
+            <a:ext cx="10911535" cy="548640"/>
           </a:xfrm>
           <a:prstGeom prst="rect">
             <a:avLst/>
@@ -4743,24 +4743,24 @@
           <a:p>
             <a:pPr algn="l">
               <a:lnSpc>
-                <a:spcPts val="2210"/>
-              </a:lnSpc>
-              <a:spcBef>
-                <a:spcPts val="0"/>
-              </a:spcBef>
-              <a:spcAft>
-                <a:spcPts val="0"/>
-              </a:spcAft>
-              <a:buNone/>
-            </a:pPr>
-            <a:r>
-              <a:rPr sz="1700" b="0" i="0">
+                <a:spcPts val="2280"/>
+              </a:lnSpc>
+              <a:spcBef>
+                <a:spcPts val="0"/>
+              </a:spcBef>
+              <a:spcAft>
+                <a:spcPts val="0"/>
+              </a:spcAft>
+              <a:buNone/>
+            </a:pPr>
+            <a:r>
+              <a:rPr sz="1900" b="0" i="0">
                 <a:solidFill>
                   <a:srgbClr val="C7D7F2"/>
                 </a:solidFill>
                 <a:latin typeface="Arial"/>
               </a:rPr>
-              <a:t>Heart-rate notifications arrive late and out of order — a stale sensor could repaint a new card with a wrong number.</a:t>
+              <a:t>Heart-rate notifications arrive late and out of order — a stale sensor could repaint a new card.</a:t>
             </a:r>
           </a:p>
         </p:txBody>
@@ -4773,12 +4773,12 @@
         </p:nvSpPr>
         <p:spPr>
           <a:xfrm>
-            <a:off x="640080" y="2880360"/>
-            <a:ext cx="3393338" cy="2286000"/>
+            <a:off x="640080" y="2697480"/>
+            <a:ext cx="3393338" cy="2331720"/>
           </a:xfrm>
           <a:prstGeom prst="roundRect">
             <a:avLst>
-              <a:gd name="adj" fmla="val 8000"/>
+              <a:gd name="adj" fmla="val 7843"/>
             </a:avLst>
           </a:prstGeom>
           <a:solidFill>
@@ -4817,8 +4817,8 @@
         </p:nvSpPr>
         <p:spPr>
           <a:xfrm>
-            <a:off x="960119" y="3063240"/>
-            <a:ext cx="548640" cy="548640"/>
+            <a:off x="1005840" y="2880360"/>
+            <a:ext cx="640080" cy="640080"/>
           </a:xfrm>
           <a:prstGeom prst="rect">
             <a:avLst/>
@@ -4833,18 +4833,18 @@
           <a:p>
             <a:pPr algn="l">
               <a:lnSpc>
-                <a:spcPts val="3600"/>
-              </a:lnSpc>
-              <a:spcBef>
-                <a:spcPts val="0"/>
-              </a:spcBef>
-              <a:spcAft>
-                <a:spcPts val="0"/>
-              </a:spcAft>
-              <a:buNone/>
-            </a:pPr>
-            <a:r>
-              <a:rPr sz="3000" b="1" i="0">
+                <a:spcPts val="4079"/>
+              </a:lnSpc>
+              <a:spcBef>
+                <a:spcPts val="0"/>
+              </a:spcBef>
+              <a:spcAft>
+                <a:spcPts val="0"/>
+              </a:spcAft>
+              <a:buNone/>
+            </a:pPr>
+            <a:r>
+              <a:rPr sz="3400" b="1" i="0">
                 <a:solidFill>
                   <a:srgbClr val="4ADE80"/>
                 </a:solidFill>
@@ -4863,8 +4863,8 @@
         </p:nvSpPr>
         <p:spPr>
           <a:xfrm>
-            <a:off x="960119" y="3657600"/>
-            <a:ext cx="2753258" cy="411480"/>
+            <a:off x="1005840" y="3566160"/>
+            <a:ext cx="2661818" cy="457200"/>
           </a:xfrm>
           <a:prstGeom prst="rect">
             <a:avLst/>
@@ -4879,24 +4879,24 @@
           <a:p>
             <a:pPr algn="l">
               <a:lnSpc>
-                <a:spcPts val="1987"/>
-              </a:lnSpc>
-              <a:spcBef>
-                <a:spcPts val="0"/>
-              </a:spcBef>
-              <a:spcAft>
-                <a:spcPts val="0"/>
-              </a:spcAft>
-              <a:buNone/>
-            </a:pPr>
-            <a:r>
-              <a:rPr sz="1650" b="1" i="0">
+                <a:spcPts val="2520"/>
+              </a:lnSpc>
+              <a:spcBef>
+                <a:spcPts val="0"/>
+              </a:spcBef>
+              <a:spcAft>
+                <a:spcPts val="0"/>
+              </a:spcAft>
+              <a:buNone/>
+            </a:pPr>
+            <a:r>
+              <a:rPr sz="2100" b="1" i="0">
                 <a:solidFill>
                   <a:srgbClr val="FFFFFF"/>
                 </a:solidFill>
                 <a:latin typeface="Arial"/>
               </a:rPr>
-              <a:t>Parse the standard profile</a:t>
+              <a:t>Parse the standard</a:t>
             </a:r>
           </a:p>
         </p:txBody>
@@ -4909,8 +4909,8 @@
         </p:nvSpPr>
         <p:spPr>
           <a:xfrm>
-            <a:off x="960119" y="4069080"/>
-            <a:ext cx="2753258" cy="1005840"/>
+            <a:off x="1005840" y="4023360"/>
+            <a:ext cx="2661818" cy="822960"/>
           </a:xfrm>
           <a:prstGeom prst="rect">
             <a:avLst/>
@@ -4925,24 +4925,24 @@
           <a:p>
             <a:pPr algn="l">
               <a:lnSpc>
-                <a:spcPts val="1820"/>
-              </a:lnSpc>
-              <a:spcBef>
-                <a:spcPts val="0"/>
-              </a:spcBef>
-              <a:spcAft>
-                <a:spcPts val="0"/>
-              </a:spcAft>
-              <a:buNone/>
-            </a:pPr>
-            <a:r>
-              <a:rPr sz="1400" b="0" i="0">
+                <a:spcPts val="2145"/>
+              </a:lnSpc>
+              <a:spcBef>
+                <a:spcPts val="0"/>
+              </a:spcBef>
+              <a:spcAft>
+                <a:spcPts val="0"/>
+              </a:spcAft>
+              <a:buNone/>
+            </a:pPr>
+            <a:r>
+              <a:rPr sz="1650" b="0" i="0">
                 <a:solidFill>
                   <a:srgbClr val="C7D7F2"/>
                 </a:solidFill>
                 <a:latin typeface="Arial"/>
               </a:rPr>
-              <a:t>Heart Rate service 0x180D; the flags byte picks 8- or 16-bit BPM</a:t>
+              <a:t>service 0x180D · flags byte → 8/16-bit BPM</a:t>
             </a:r>
           </a:p>
         </p:txBody>
@@ -4955,12 +4955,12 @@
         </p:nvSpPr>
         <p:spPr>
           <a:xfrm>
-            <a:off x="4399178" y="2880360"/>
-            <a:ext cx="3393338" cy="2286000"/>
+            <a:off x="4399178" y="2697480"/>
+            <a:ext cx="3393338" cy="2331720"/>
           </a:xfrm>
           <a:prstGeom prst="roundRect">
             <a:avLst>
-              <a:gd name="adj" fmla="val 8000"/>
+              <a:gd name="adj" fmla="val 7843"/>
             </a:avLst>
           </a:prstGeom>
           <a:solidFill>
@@ -4999,8 +4999,8 @@
         </p:nvSpPr>
         <p:spPr>
           <a:xfrm>
-            <a:off x="4719218" y="3063240"/>
-            <a:ext cx="548640" cy="548640"/>
+            <a:off x="4764938" y="2880360"/>
+            <a:ext cx="640080" cy="640080"/>
           </a:xfrm>
           <a:prstGeom prst="rect">
             <a:avLst/>
@@ -5015,18 +5015,18 @@
           <a:p>
             <a:pPr algn="l">
               <a:lnSpc>
-                <a:spcPts val="3600"/>
-              </a:lnSpc>
-              <a:spcBef>
-                <a:spcPts val="0"/>
-              </a:spcBef>
-              <a:spcAft>
-                <a:spcPts val="0"/>
-              </a:spcAft>
-              <a:buNone/>
-            </a:pPr>
-            <a:r>
-              <a:rPr sz="3000" b="1" i="0">
+                <a:spcPts val="4079"/>
+              </a:lnSpc>
+              <a:spcBef>
+                <a:spcPts val="0"/>
+              </a:spcBef>
+              <a:spcAft>
+                <a:spcPts val="0"/>
+              </a:spcAft>
+              <a:buNone/>
+            </a:pPr>
+            <a:r>
+              <a:rPr sz="3400" b="1" i="0">
                 <a:solidFill>
                   <a:srgbClr val="4ADE80"/>
                 </a:solidFill>
@@ -5045,8 +5045,8 @@
         </p:nvSpPr>
         <p:spPr>
           <a:xfrm>
-            <a:off x="4719218" y="3657600"/>
-            <a:ext cx="2753258" cy="411480"/>
+            <a:off x="4764938" y="3566160"/>
+            <a:ext cx="2661818" cy="457200"/>
           </a:xfrm>
           <a:prstGeom prst="rect">
             <a:avLst/>
@@ -5061,18 +5061,18 @@
           <a:p>
             <a:pPr algn="l">
               <a:lnSpc>
-                <a:spcPts val="2160"/>
-              </a:lnSpc>
-              <a:spcBef>
-                <a:spcPts val="0"/>
-              </a:spcBef>
-              <a:spcAft>
-                <a:spcPts val="0"/>
-              </a:spcAft>
-              <a:buNone/>
-            </a:pPr>
-            <a:r>
-              <a:rPr sz="1800" b="1" i="0">
+                <a:spcPts val="2520"/>
+              </a:lnSpc>
+              <a:spcBef>
+                <a:spcPts val="0"/>
+              </a:spcBef>
+              <a:spcAft>
+                <a:spcPts val="0"/>
+              </a:spcAft>
+              <a:buNone/>
+            </a:pPr>
+            <a:r>
+              <a:rPr sz="2100" b="1" i="0">
                 <a:solidFill>
                   <a:srgbClr val="FFFFFF"/>
                 </a:solidFill>
@@ -5091,8 +5091,8 @@
         </p:nvSpPr>
         <p:spPr>
           <a:xfrm>
-            <a:off x="4719218" y="4069080"/>
-            <a:ext cx="2753258" cy="1005840"/>
+            <a:off x="4764938" y="4023360"/>
+            <a:ext cx="2661818" cy="822960"/>
           </a:xfrm>
           <a:prstGeom prst="rect">
             <a:avLst/>
@@ -5107,24 +5107,24 @@
           <a:p>
             <a:pPr algn="l">
               <a:lnSpc>
-                <a:spcPts val="1820"/>
-              </a:lnSpc>
-              <a:spcBef>
-                <a:spcPts val="0"/>
-              </a:spcBef>
-              <a:spcAft>
-                <a:spcPts val="0"/>
-              </a:spcAft>
-              <a:buNone/>
-            </a:pPr>
-            <a:r>
-              <a:rPr sz="1400" b="0" i="0">
+                <a:spcPts val="2145"/>
+              </a:lnSpc>
+              <a:spcBef>
+                <a:spcPts val="0"/>
+              </a:spcBef>
+              <a:spcAft>
+                <a:spcPts val="0"/>
+              </a:spcAft>
+              <a:buNone/>
+            </a:pPr>
+            <a:r>
+              <a:rPr sz="1650" b="0" i="0">
                 <a:solidFill>
                   <a:srgbClr val="C7D7F2"/>
                 </a:solidFill>
                 <a:latin typeface="Arial"/>
               </a:rPr>
-              <a:t>Each sample is tagged LIVE or SIMULATED when it is produced — the tag follows it into the CSV</a:t>
+              <a:t>each sample born LIVE or SIMULATED</a:t>
             </a:r>
           </a:p>
         </p:txBody>
@@ -5137,12 +5137,12 @@
         </p:nvSpPr>
         <p:spPr>
           <a:xfrm>
-            <a:off x="8158276" y="2880360"/>
-            <a:ext cx="3393338" cy="2286000"/>
+            <a:off x="8158276" y="2697480"/>
+            <a:ext cx="3393338" cy="2331720"/>
           </a:xfrm>
           <a:prstGeom prst="roundRect">
             <a:avLst>
-              <a:gd name="adj" fmla="val 8000"/>
+              <a:gd name="adj" fmla="val 7843"/>
             </a:avLst>
           </a:prstGeom>
           <a:solidFill>
@@ -5181,8 +5181,8 @@
         </p:nvSpPr>
         <p:spPr>
           <a:xfrm>
-            <a:off x="8478316" y="3063240"/>
-            <a:ext cx="548640" cy="548640"/>
+            <a:off x="8524036" y="2880360"/>
+            <a:ext cx="640080" cy="640080"/>
           </a:xfrm>
           <a:prstGeom prst="rect">
             <a:avLst/>
@@ -5197,18 +5197,18 @@
           <a:p>
             <a:pPr algn="l">
               <a:lnSpc>
-                <a:spcPts val="3600"/>
-              </a:lnSpc>
-              <a:spcBef>
-                <a:spcPts val="0"/>
-              </a:spcBef>
-              <a:spcAft>
-                <a:spcPts val="0"/>
-              </a:spcAft>
-              <a:buNone/>
-            </a:pPr>
-            <a:r>
-              <a:rPr sz="3000" b="1" i="0">
+                <a:spcPts val="4079"/>
+              </a:lnSpc>
+              <a:spcBef>
+                <a:spcPts val="0"/>
+              </a:spcBef>
+              <a:spcAft>
+                <a:spcPts val="0"/>
+              </a:spcAft>
+              <a:buNone/>
+            </a:pPr>
+            <a:r>
+              <a:rPr sz="3400" b="1" i="0">
                 <a:solidFill>
                   <a:srgbClr val="4ADE80"/>
                 </a:solidFill>
@@ -5227,8 +5227,8 @@
         </p:nvSpPr>
         <p:spPr>
           <a:xfrm>
-            <a:off x="8478316" y="3657600"/>
-            <a:ext cx="2753258" cy="411480"/>
+            <a:off x="8524036" y="3566160"/>
+            <a:ext cx="2661818" cy="457200"/>
           </a:xfrm>
           <a:prstGeom prst="rect">
             <a:avLst/>
@@ -5243,18 +5243,18 @@
           <a:p>
             <a:pPr algn="l">
               <a:lnSpc>
-                <a:spcPts val="2160"/>
-              </a:lnSpc>
-              <a:spcBef>
-                <a:spcPts val="0"/>
-              </a:spcBef>
-              <a:spcAft>
-                <a:spcPts val="0"/>
-              </a:spcAft>
-              <a:buNone/>
-            </a:pPr>
-            <a:r>
-              <a:rPr sz="1800" b="1" i="0">
+                <a:spcPts val="2520"/>
+              </a:lnSpc>
+              <a:spcBef>
+                <a:spcPts val="0"/>
+              </a:spcBef>
+              <a:spcAft>
+                <a:spcPts val="0"/>
+              </a:spcAft>
+              <a:buNone/>
+            </a:pPr>
+            <a:r>
+              <a:rPr sz="2100" b="1" i="0">
                 <a:solidFill>
                   <a:srgbClr val="FFFFFF"/>
                 </a:solidFill>
@@ -5273,8 +5273,8 @@
         </p:nvSpPr>
         <p:spPr>
           <a:xfrm>
-            <a:off x="8478316" y="4069080"/>
-            <a:ext cx="2753258" cy="1005840"/>
+            <a:off x="8524036" y="4023360"/>
+            <a:ext cx="2661818" cy="822960"/>
           </a:xfrm>
           <a:prstGeom prst="rect">
             <a:avLst/>
@@ -5289,24 +5289,24 @@
           <a:p>
             <a:pPr algn="l">
               <a:lnSpc>
-                <a:spcPts val="1820"/>
-              </a:lnSpc>
-              <a:spcBef>
-                <a:spcPts val="0"/>
-              </a:spcBef>
-              <a:spcAft>
-                <a:spcPts val="0"/>
-              </a:spcAft>
-              <a:buNone/>
-            </a:pPr>
-            <a:r>
-              <a:rPr sz="1400" b="0" i="0">
+                <a:spcPts val="2145"/>
+              </a:lnSpc>
+              <a:spcBef>
+                <a:spcPts val="0"/>
+              </a:spcBef>
+              <a:spcAft>
+                <a:spcPts val="0"/>
+              </a:spcAft>
+              <a:buNone/>
+            </a:pPr>
+            <a:r>
+              <a:rPr sz="1650" b="0" i="0">
                 <a:solidFill>
                   <a:srgbClr val="C7D7F2"/>
                 </a:solidFill>
                 <a:latin typeface="Arial"/>
               </a:rPr>
-              <a:t>A generation counter discards callbacks from any earlier pairing</a:t>
+              <a:t>a generation counter ignores old pairings</a:t>
             </a:r>
           </a:p>
         </p:txBody>
@@ -5319,7 +5319,7 @@
         </p:nvSpPr>
         <p:spPr>
           <a:xfrm>
-            <a:off x="640080" y="5394960"/>
+            <a:off x="640080" y="5349240"/>
             <a:ext cx="10911535" cy="777240"/>
           </a:xfrm>
           <a:prstGeom prst="roundRect">
@@ -5363,7 +5363,7 @@
         </p:nvSpPr>
         <p:spPr>
           <a:xfrm>
-            <a:off x="914400" y="5394960"/>
+            <a:off x="914400" y="5349240"/>
             <a:ext cx="10362895" cy="777240"/>
           </a:xfrm>
           <a:prstGeom prst="rect">
@@ -5379,18 +5379,18 @@
           <a:p>
             <a:pPr algn="l">
               <a:lnSpc>
-                <a:spcPts val="1560"/>
-              </a:lnSpc>
-              <a:spcBef>
-                <a:spcPts val="0"/>
-              </a:spcBef>
-              <a:spcAft>
-                <a:spcPts val="0"/>
-              </a:spcAft>
-              <a:buNone/>
-            </a:pPr>
-            <a:r>
-              <a:rPr sz="1300" b="0" i="0">
+                <a:spcPts val="1620"/>
+              </a:lnSpc>
+              <a:spcBef>
+                <a:spcPts val="0"/>
+              </a:spcBef>
+              <a:spcAft>
+                <a:spcPts val="0"/>
+              </a:spcAft>
+              <a:buNone/>
+            </a:pPr>
+            <a:r>
+              <a:rPr sz="1350" b="0" i="0">
                 <a:solidFill>
                   <a:srgbClr val="4ADE80"/>
                 </a:solidFill>
@@ -5543,24 +5543,24 @@
           <a:p>
             <a:pPr algn="l">
               <a:lnSpc>
-                <a:spcPts val="4032"/>
-              </a:lnSpc>
-              <a:spcBef>
-                <a:spcPts val="0"/>
-              </a:spcBef>
-              <a:spcAft>
-                <a:spcPts val="0"/>
-              </a:spcAft>
-              <a:buNone/>
-            </a:pPr>
-            <a:r>
-              <a:rPr sz="3600" b="1" i="0">
+                <a:spcPts val="4300"/>
+              </a:lnSpc>
+              <a:spcBef>
+                <a:spcPts val="0"/>
+              </a:spcBef>
+              <a:spcAft>
+                <a:spcPts val="0"/>
+              </a:spcAft>
+              <a:buNone/>
+            </a:pPr>
+            <a:r>
+              <a:rPr sz="3850" b="1" i="0">
                 <a:solidFill>
                   <a:srgbClr val="FFFFFF"/>
                 </a:solidFill>
                 <a:latin typeface="Arial"/>
               </a:rPr>
-              <a:t>Shipped, tested — and next, built with the people it serves.</a:t>
+              <a:t>Shipped and tested. Next: built with the people it serves.</a:t>
             </a:r>
           </a:p>
         </p:txBody>
@@ -5573,7 +5573,7 @@
         </p:nvCxnSpPr>
         <p:spPr>
           <a:xfrm>
-            <a:off x="914400" y="2203704"/>
+            <a:off x="914400" y="2295144"/>
             <a:ext cx="10362895" cy="0"/>
           </a:xfrm>
           <a:prstGeom prst="line">
@@ -5608,7 +5608,7 @@
         </p:nvSpPr>
         <p:spPr>
           <a:xfrm>
-            <a:off x="804671" y="2057400"/>
+            <a:off x="804671" y="2148840"/>
             <a:ext cx="292608" cy="292608"/>
           </a:xfrm>
           <a:prstGeom prst="ellipse">
@@ -5650,7 +5650,7 @@
         </p:nvSpPr>
         <p:spPr>
           <a:xfrm>
-            <a:off x="1280160" y="2011680"/>
+            <a:off x="1280160" y="2103120"/>
             <a:ext cx="2753258" cy="365760"/>
           </a:xfrm>
           <a:prstGeom prst="rect">
@@ -5696,7 +5696,7 @@
         </p:nvSpPr>
         <p:spPr>
           <a:xfrm>
-            <a:off x="804671" y="2651760"/>
+            <a:off x="804671" y="2788920"/>
             <a:ext cx="3119018" cy="457200"/>
           </a:xfrm>
           <a:prstGeom prst="rect">
@@ -5712,18 +5712,18 @@
           <a:p>
             <a:pPr algn="l">
               <a:lnSpc>
-                <a:spcPts val="2640"/>
-              </a:lnSpc>
-              <a:spcBef>
-                <a:spcPts val="0"/>
-              </a:spcBef>
-              <a:spcAft>
-                <a:spcPts val="0"/>
-              </a:spcAft>
-              <a:buNone/>
-            </a:pPr>
-            <a:r>
-              <a:rPr sz="2200" b="1" i="0">
+                <a:spcPts val="2760"/>
+              </a:lnSpc>
+              <a:spcBef>
+                <a:spcPts val="0"/>
+              </a:spcBef>
+              <a:spcAft>
+                <a:spcPts val="0"/>
+              </a:spcAft>
+              <a:buNone/>
+            </a:pPr>
+            <a:r>
+              <a:rPr sz="2300" b="1" i="0">
                 <a:solidFill>
                   <a:srgbClr val="FFFFFF"/>
                 </a:solidFill>
@@ -5742,8 +5742,8 @@
         </p:nvSpPr>
         <p:spPr>
           <a:xfrm>
-            <a:off x="804671" y="3291840"/>
-            <a:ext cx="3119018" cy="1828800"/>
+            <a:off x="804671" y="3383280"/>
+            <a:ext cx="3027578" cy="1280160"/>
           </a:xfrm>
           <a:prstGeom prst="rect">
             <a:avLst/>
@@ -5756,57 +5756,26 @@
           </a:bodyPr>
           <a:lstStyle/>
           <a:p>
-            <a:pPr algn="l" marL="219456" indent="-219456">
-              <a:lnSpc>
-                <a:spcPts val="2013"/>
-              </a:lnSpc>
-              <a:spcBef>
-                <a:spcPts val="0"/>
-              </a:spcBef>
-              <a:spcAft>
-                <a:spcPts val="1000"/>
-              </a:spcAft>
-              <a:buClr>
-                <a:srgbClr val="4ADE80"/>
-              </a:buClr>
-              <a:buFont typeface="Arial"/>
-              <a:buChar char="•"/>
-            </a:pPr>
-            <a:r>
-              <a:rPr sz="1650" b="0" i="0">
+            <a:pPr algn="l">
+              <a:lnSpc>
+                <a:spcPts val="2340"/>
+              </a:lnSpc>
+              <a:spcBef>
+                <a:spcPts val="0"/>
+              </a:spcBef>
+              <a:spcAft>
+                <a:spcPts val="0"/>
+              </a:spcAft>
+              <a:buNone/>
+            </a:pPr>
+            <a:r>
+              <a:rPr sz="1800" b="0" i="0">
                 <a:solidFill>
                   <a:srgbClr val="C7D7F2"/>
                 </a:solidFill>
                 <a:latin typeface="Arial"/>
               </a:rPr>
-              <a:t>3 public releases since September</a:t>
-            </a:r>
-          </a:p>
-          <a:p>
-            <a:pPr algn="l" marL="219456" indent="-219456">
-              <a:lnSpc>
-                <a:spcPts val="2013"/>
-              </a:lnSpc>
-              <a:spcBef>
-                <a:spcPts val="0"/>
-              </a:spcBef>
-              <a:spcAft>
-                <a:spcPts val="1000"/>
-              </a:spcAft>
-              <a:buClr>
-                <a:srgbClr val="4ADE80"/>
-              </a:buClr>
-              <a:buFont typeface="Arial"/>
-              <a:buChar char="•"/>
-            </a:pPr>
-            <a:r>
-              <a:rPr sz="1650" b="0" i="0">
-                <a:solidFill>
-                  <a:srgbClr val="C7D7F2"/>
-                </a:solidFill>
-                <a:latin typeface="Arial"/>
-              </a:rPr>
-              <a:t>17 automated tests · CI for web and iOS</a:t>
+              <a:t>3 releases · 17 tests · CI for web and iOS</a:t>
             </a:r>
           </a:p>
         </p:txBody>
@@ -5819,7 +5788,7 @@
         </p:nvSpPr>
         <p:spPr>
           <a:xfrm>
-            <a:off x="4563770" y="2057400"/>
+            <a:off x="4563770" y="2148840"/>
             <a:ext cx="292608" cy="292608"/>
           </a:xfrm>
           <a:prstGeom prst="ellipse">
@@ -5861,7 +5830,7 @@
         </p:nvSpPr>
         <p:spPr>
           <a:xfrm>
-            <a:off x="5039258" y="2011680"/>
+            <a:off x="5039258" y="2103120"/>
             <a:ext cx="2753258" cy="365760"/>
           </a:xfrm>
           <a:prstGeom prst="rect">
@@ -5907,7 +5876,7 @@
         </p:nvSpPr>
         <p:spPr>
           <a:xfrm>
-            <a:off x="4563770" y="2651760"/>
+            <a:off x="4563770" y="2788920"/>
             <a:ext cx="3119018" cy="457200"/>
           </a:xfrm>
           <a:prstGeom prst="rect">
@@ -5923,7 +5892,7 @@
           <a:p>
             <a:pPr algn="l">
               <a:lnSpc>
-                <a:spcPts val="2534"/>
+                <a:spcPts val="2539"/>
               </a:lnSpc>
               <a:spcBef>
                 <a:spcPts val="0"/>
@@ -5953,8 +5922,8 @@
         </p:nvSpPr>
         <p:spPr>
           <a:xfrm>
-            <a:off x="4563770" y="3291840"/>
-            <a:ext cx="3119018" cy="1828800"/>
+            <a:off x="4563770" y="3383280"/>
+            <a:ext cx="3027578" cy="1280160"/>
           </a:xfrm>
           <a:prstGeom prst="rect">
             <a:avLst/>
@@ -5967,57 +5936,26 @@
           </a:bodyPr>
           <a:lstStyle/>
           <a:p>
-            <a:pPr algn="l" marL="219456" indent="-219456">
-              <a:lnSpc>
-                <a:spcPts val="2013"/>
-              </a:lnSpc>
-              <a:spcBef>
-                <a:spcPts val="0"/>
-              </a:spcBef>
-              <a:spcAft>
-                <a:spcPts val="1000"/>
-              </a:spcAft>
-              <a:buClr>
-                <a:srgbClr val="4ADE80"/>
-              </a:buClr>
-              <a:buFont typeface="Arial"/>
-              <a:buChar char="•"/>
-            </a:pPr>
-            <a:r>
-              <a:rPr sz="1650" b="0" i="0">
+            <a:pPr algn="l">
+              <a:lnSpc>
+                <a:spcPts val="2340"/>
+              </a:lnSpc>
+              <a:spcBef>
+                <a:spcPts val="0"/>
+              </a:spcBef>
+              <a:spcAft>
+                <a:spcPts val="0"/>
+              </a:spcAft>
+              <a:buNone/>
+            </a:pPr>
+            <a:r>
+              <a:rPr sz="1800" b="0" i="0">
                 <a:solidFill>
                   <a:srgbClr val="C7D7F2"/>
                 </a:solidFill>
                 <a:latin typeface="Arial"/>
               </a:rPr>
-              <a:t>Sessions with autistic people, people with dementia and caregivers</a:t>
-            </a:r>
-          </a:p>
-          <a:p>
-            <a:pPr algn="l" marL="219456" indent="-219456">
-              <a:lnSpc>
-                <a:spcPts val="2013"/>
-              </a:lnSpc>
-              <a:spcBef>
-                <a:spcPts val="0"/>
-              </a:spcBef>
-              <a:spcAft>
-                <a:spcPts val="1000"/>
-              </a:spcAft>
-              <a:buClr>
-                <a:srgbClr val="4ADE80"/>
-              </a:buClr>
-              <a:buFont typeface="Arial"/>
-              <a:buChar char="•"/>
-            </a:pPr>
-            <a:r>
-              <a:rPr sz="1650" b="0" i="0">
-                <a:solidFill>
-                  <a:srgbClr val="C7D7F2"/>
-                </a:solidFill>
-                <a:latin typeface="Arial"/>
-              </a:rPr>
-              <a:t>TestFlight beta · VoiceOver testing on devices</a:t>
+              <a:t>sessions with autistic people, people with dementia, caregivers</a:t>
             </a:r>
           </a:p>
         </p:txBody>
@@ -6030,7 +5968,7 @@
         </p:nvSpPr>
         <p:spPr>
           <a:xfrm>
-            <a:off x="8322868" y="2057400"/>
+            <a:off x="8322868" y="2148840"/>
             <a:ext cx="292608" cy="292608"/>
           </a:xfrm>
           <a:prstGeom prst="ellipse">
@@ -6072,7 +6010,7 @@
         </p:nvSpPr>
         <p:spPr>
           <a:xfrm>
-            <a:off x="8798356" y="2011680"/>
+            <a:off x="8798356" y="2103120"/>
             <a:ext cx="2753258" cy="365760"/>
           </a:xfrm>
           <a:prstGeom prst="rect">
@@ -6118,7 +6056,7 @@
         </p:nvSpPr>
         <p:spPr>
           <a:xfrm>
-            <a:off x="8322868" y="2651760"/>
+            <a:off x="8322868" y="2788920"/>
             <a:ext cx="3119018" cy="457200"/>
           </a:xfrm>
           <a:prstGeom prst="rect">
@@ -6134,18 +6072,18 @@
           <a:p>
             <a:pPr algn="l">
               <a:lnSpc>
-                <a:spcPts val="2640"/>
-              </a:lnSpc>
-              <a:spcBef>
-                <a:spcPts val="0"/>
-              </a:spcBef>
-              <a:spcAft>
-                <a:spcPts val="0"/>
-              </a:spcAft>
-              <a:buNone/>
-            </a:pPr>
-            <a:r>
-              <a:rPr sz="2200" b="1" i="0">
+                <a:spcPts val="2760"/>
+              </a:lnSpc>
+              <a:spcBef>
+                <a:spcPts val="0"/>
+              </a:spcBef>
+              <a:spcAft>
+                <a:spcPts val="0"/>
+              </a:spcAft>
+              <a:buNone/>
+            </a:pPr>
+            <a:r>
+              <a:rPr sz="2300" b="1" i="0">
                 <a:solidFill>
                   <a:srgbClr val="FFFFFF"/>
                 </a:solidFill>
@@ -6164,8 +6102,8 @@
         </p:nvSpPr>
         <p:spPr>
           <a:xfrm>
-            <a:off x="8322868" y="3291840"/>
-            <a:ext cx="3119018" cy="1828800"/>
+            <a:off x="8322868" y="3383280"/>
+            <a:ext cx="3027578" cy="1280160"/>
           </a:xfrm>
           <a:prstGeom prst="rect">
             <a:avLst/>
@@ -6178,57 +6116,26 @@
           </a:bodyPr>
           <a:lstStyle/>
           <a:p>
-            <a:pPr algn="l" marL="219456" indent="-219456">
-              <a:lnSpc>
-                <a:spcPts val="2013"/>
-              </a:lnSpc>
-              <a:spcBef>
-                <a:spcPts val="0"/>
-              </a:spcBef>
-              <a:spcAft>
-                <a:spcPts val="1000"/>
-              </a:spcAft>
-              <a:buClr>
-                <a:srgbClr val="4ADE80"/>
-              </a:buClr>
-              <a:buFont typeface="Arial"/>
-              <a:buChar char="•"/>
-            </a:pPr>
-            <a:r>
-              <a:rPr sz="1650" b="0" i="0">
+            <a:pPr algn="l">
+              <a:lnSpc>
+                <a:spcPts val="2340"/>
+              </a:lnSpc>
+              <a:spcBef>
+                <a:spcPts val="0"/>
+              </a:spcBef>
+              <a:spcAft>
+                <a:spcPts val="0"/>
+              </a:spcAft>
+              <a:buNone/>
+            </a:pPr>
+            <a:r>
+              <a:rPr sz="1800" b="0" i="0">
                 <a:solidFill>
                   <a:srgbClr val="C7D7F2"/>
                 </a:solidFill>
                 <a:latin typeface="Arial"/>
               </a:rPr>
-              <a:t>Sensor history inside the visit brief — real, labeled data only</a:t>
-            </a:r>
-          </a:p>
-          <a:p>
-            <a:pPr algn="l" marL="219456" indent="-219456">
-              <a:lnSpc>
-                <a:spcPts val="2013"/>
-              </a:lnSpc>
-              <a:spcBef>
-                <a:spcPts val="0"/>
-              </a:spcBef>
-              <a:spcAft>
-                <a:spcPts val="1000"/>
-              </a:spcAft>
-              <a:buClr>
-                <a:srgbClr val="4ADE80"/>
-              </a:buClr>
-              <a:buFont typeface="Arial"/>
-              <a:buChar char="•"/>
-            </a:pPr>
-            <a:r>
-              <a:rPr sz="1650" b="0" i="0">
-                <a:solidFill>
-                  <a:srgbClr val="C7D7F2"/>
-                </a:solidFill>
-                <a:latin typeface="Arial"/>
-              </a:rPr>
-              <a:t>Encrypted backup · Spanish</a:t>
+              <a:t>sensor history in the visit brief · encrypted backup · Spanish</a:t>
             </a:r>
           </a:p>
         </p:txBody>
@@ -6686,52 +6593,6 @@
       <p:sp>
         <p:nvSpPr>
           <p:cNvPr id="27" name="TextBox 26"/>
-          <p:cNvSpPr txBox="1"/>
-          <p:nvPr/>
-        </p:nvSpPr>
-        <p:spPr>
-          <a:xfrm>
-            <a:off x="640080" y="6035040"/>
-            <a:ext cx="10911535" cy="365760"/>
-          </a:xfrm>
-          <a:prstGeom prst="rect">
-            <a:avLst/>
-          </a:prstGeom>
-          <a:noFill/>
-        </p:spPr>
-        <p:txBody>
-          <a:bodyPr wrap="square" lIns="0" rIns="0" tIns="0" bIns="0" anchor="t">
-            <a:noAutofit/>
-          </a:bodyPr>
-          <a:lstStyle/>
-          <a:p>
-            <a:pPr algn="l">
-              <a:lnSpc>
-                <a:spcPts val="1620"/>
-              </a:lnSpc>
-              <a:spcBef>
-                <a:spcPts val="0"/>
-              </a:spcBef>
-              <a:spcAft>
-                <a:spcPts val="0"/>
-              </a:spcAft>
-              <a:buNone/>
-            </a:pPr>
-            <a:r>
-              <a:rPr sz="1350" b="0" i="0">
-                <a:solidFill>
-                  <a:srgbClr val="A6BBE0"/>
-                </a:solidFill>
-                <a:latin typeface="Arial"/>
-              </a:rPr>
-              <a:t>Deliberately not planned: cloud sync, a clinician portal or a drug-interaction checker — not without clinical review.</a:t>
-            </a:r>
-          </a:p>
-        </p:txBody>
-      </p:sp>
-      <p:sp>
-        <p:nvSpPr>
-          <p:cNvPr id="28" name="TextBox 27"/>
           <p:cNvSpPr txBox="1"/>
           <p:nvPr/>
         </p:nvSpPr>
@@ -6860,7 +6721,7 @@
         <p:spPr>
           <a:xfrm>
             <a:off x="640080" y="2286000"/>
-            <a:ext cx="7315200" cy="1097280"/>
+            <a:ext cx="7772400" cy="1097280"/>
           </a:xfrm>
           <a:prstGeom prst="rect">
             <a:avLst/>
@@ -6875,18 +6736,18 @@
           <a:p>
             <a:pPr algn="l">
               <a:lnSpc>
-                <a:spcPts val="6240"/>
-              </a:lnSpc>
-              <a:spcBef>
-                <a:spcPts val="0"/>
-              </a:spcBef>
-              <a:spcAft>
-                <a:spcPts val="0"/>
-              </a:spcAft>
-              <a:buNone/>
-            </a:pPr>
-            <a:r>
-              <a:rPr sz="5200" b="1" i="0">
+                <a:spcPts val="6720"/>
+              </a:lnSpc>
+              <a:spcBef>
+                <a:spcPts val="0"/>
+              </a:spcBef>
+              <a:spcAft>
+                <a:spcPts val="0"/>
+              </a:spcAft>
+              <a:buNone/>
+            </a:pPr>
+            <a:r>
+              <a:rPr sz="5600" b="1" i="0">
                 <a:solidFill>
                   <a:srgbClr val="FFFFFF"/>
                 </a:solidFill>
@@ -6905,8 +6766,8 @@
         </p:nvSpPr>
         <p:spPr>
           <a:xfrm>
-            <a:off x="640080" y="3429000"/>
-            <a:ext cx="6766560" cy="914400"/>
+            <a:off x="640080" y="3474720"/>
+            <a:ext cx="6766560" cy="822960"/>
           </a:xfrm>
           <a:prstGeom prst="rect">
             <a:avLst/>
@@ -6921,24 +6782,24 @@
           <a:p>
             <a:pPr algn="l">
               <a:lnSpc>
-                <a:spcPts val="2340"/>
-              </a:lnSpc>
-              <a:spcBef>
-                <a:spcPts val="0"/>
-              </a:spcBef>
-              <a:spcAft>
-                <a:spcPts val="0"/>
-              </a:spcAft>
-              <a:buNone/>
-            </a:pPr>
-            <a:r>
-              <a:rPr sz="1800" b="0" i="0">
+                <a:spcPts val="2600"/>
+              </a:lnSpc>
+              <a:spcBef>
+                <a:spcPts val="0"/>
+              </a:spcBef>
+              <a:spcAft>
+                <a:spcPts val="0"/>
+              </a:spcAft>
+              <a:buNone/>
+            </a:pPr>
+            <a:r>
+              <a:rPr sz="2000" b="0" i="0">
                 <a:solidFill>
                   <a:srgbClr val="C7D7F2"/>
                 </a:solidFill>
                 <a:latin typeface="Arial"/>
               </a:rPr>
-              <a:t>Keeping older adults connected, autistic users calm and caregivers informed — with no account, no server and no fabricated number.</a:t>
+              <a:t>Connected, calm and private — with no account, no server and no fabricated number.</a:t>
             </a:r>
           </a:p>
         </p:txBody>
@@ -6967,18 +6828,18 @@
           <a:p>
             <a:pPr algn="l">
               <a:lnSpc>
-                <a:spcPts val="1920"/>
-              </a:lnSpc>
-              <a:spcBef>
-                <a:spcPts val="0"/>
-              </a:spcBef>
-              <a:spcAft>
-                <a:spcPts val="0"/>
-              </a:spcAft>
-              <a:buNone/>
-            </a:pPr>
-            <a:r>
-              <a:rPr sz="1600" b="1" i="0">
+                <a:spcPts val="2039"/>
+              </a:lnSpc>
+              <a:spcBef>
+                <a:spcPts val="0"/>
+              </a:spcBef>
+              <a:spcAft>
+                <a:spcPts val="0"/>
+              </a:spcAft>
+              <a:buNone/>
+            </a:pPr>
+            <a:r>
+              <a:rPr sz="1700" b="1" i="0">
                 <a:solidFill>
                   <a:srgbClr val="4ADE80"/>
                 </a:solidFill>
@@ -7013,18 +6874,18 @@
           <a:p>
             <a:pPr algn="l">
               <a:lnSpc>
-                <a:spcPts val="1920"/>
-              </a:lnSpc>
-              <a:spcBef>
-                <a:spcPts val="0"/>
-              </a:spcBef>
-              <a:spcAft>
-                <a:spcPts val="0"/>
-              </a:spcAft>
-              <a:buNone/>
-            </a:pPr>
-            <a:r>
-              <a:rPr sz="1600" b="0" i="0">
+                <a:spcPts val="2039"/>
+              </a:lnSpc>
+              <a:spcBef>
+                <a:spcPts val="0"/>
+              </a:spcBef>
+              <a:spcAft>
+                <a:spcPts val="0"/>
+              </a:spcAft>
+              <a:buNone/>
+            </a:pPr>
+            <a:r>
+              <a:rPr sz="1700" b="0" i="0">
                 <a:solidFill>
                   <a:srgbClr val="FFFFFF"/>
                 </a:solidFill>
@@ -7339,24 +7200,24 @@
           <a:p>
             <a:pPr algn="l">
               <a:lnSpc>
-                <a:spcPts val="4032"/>
-              </a:lnSpc>
-              <a:spcBef>
-                <a:spcPts val="0"/>
-              </a:spcBef>
-              <a:spcAft>
-                <a:spcPts val="0"/>
-              </a:spcAft>
-              <a:buNone/>
-            </a:pPr>
-            <a:r>
-              <a:rPr sz="3600" b="1" i="0">
+                <a:spcPts val="4300"/>
+              </a:lnSpc>
+              <a:spcBef>
+                <a:spcPts val="0"/>
+              </a:spcBef>
+              <a:spcAft>
+                <a:spcPts val="0"/>
+              </a:spcAft>
+              <a:buNone/>
+            </a:pPr>
+            <a:r>
+              <a:rPr sz="3850" b="1" i="0">
                 <a:solidFill>
                   <a:srgbClr val="FFFFFF"/>
                 </a:solidFill>
                 <a:latin typeface="Arial"/>
               </a:rPr>
-              <a:t>Growing older — or growing up autistic — too often means facing care alone.</a:t>
+              <a:t>Growing older — or growing up autistic — often means facing care alone.</a:t>
             </a:r>
           </a:p>
         </p:txBody>
@@ -7369,8 +7230,8 @@
         </p:nvSpPr>
         <p:spPr>
           <a:xfrm>
-            <a:off x="640080" y="2331720"/>
-            <a:ext cx="3332378" cy="1188720"/>
+            <a:off x="640080" y="2377440"/>
+            <a:ext cx="3332378" cy="1280160"/>
           </a:xfrm>
           <a:prstGeom prst="rect">
             <a:avLst/>
@@ -7385,18 +7246,18 @@
           <a:p>
             <a:pPr algn="l">
               <a:lnSpc>
-                <a:spcPts val="9120"/>
-              </a:lnSpc>
-              <a:spcBef>
-                <a:spcPts val="0"/>
-              </a:spcBef>
-              <a:spcAft>
-                <a:spcPts val="0"/>
-              </a:spcAft>
-              <a:buNone/>
-            </a:pPr>
-            <a:r>
-              <a:rPr sz="7600" b="1" i="0">
+                <a:spcPts val="9600"/>
+              </a:lnSpc>
+              <a:spcBef>
+                <a:spcPts val="0"/>
+              </a:spcBef>
+              <a:spcAft>
+                <a:spcPts val="0"/>
+              </a:spcAft>
+              <a:buNone/>
+            </a:pPr>
+            <a:r>
+              <a:rPr sz="8000" b="1" i="0">
                 <a:solidFill>
                   <a:srgbClr val="4ADE80"/>
                 </a:solidFill>
@@ -7415,7 +7276,7 @@
         </p:nvSpPr>
         <p:spPr>
           <a:xfrm>
-            <a:off x="640080" y="3611879"/>
+            <a:off x="640080" y="3749039"/>
             <a:ext cx="3332378" cy="914400"/>
           </a:xfrm>
           <a:prstGeom prst="rect">
@@ -7431,24 +7292,24 @@
           <a:p>
             <a:pPr algn="l">
               <a:lnSpc>
-                <a:spcPts val="2400"/>
-              </a:lnSpc>
-              <a:spcBef>
-                <a:spcPts val="0"/>
-              </a:spcBef>
-              <a:spcAft>
-                <a:spcPts val="0"/>
-              </a:spcAft>
-              <a:buNone/>
-            </a:pPr>
-            <a:r>
-              <a:rPr sz="2000" b="0" i="0">
+                <a:spcPts val="2640"/>
+              </a:lnSpc>
+              <a:spcBef>
+                <a:spcPts val="0"/>
+              </a:spcBef>
+              <a:spcAft>
+                <a:spcPts val="0"/>
+              </a:spcAft>
+              <a:buNone/>
+            </a:pPr>
+            <a:r>
+              <a:rPr sz="2200" b="0" i="0">
                 <a:solidFill>
                   <a:srgbClr val="EAF0FB"/>
                 </a:solidFill>
                 <a:latin typeface="Arial"/>
               </a:rPr>
-              <a:t>older adults in the U.S. are socially isolated</a:t>
+              <a:t>older adults are socially isolated</a:t>
             </a:r>
           </a:p>
         </p:txBody>
@@ -7461,7 +7322,7 @@
         </p:nvSpPr>
         <p:spPr>
           <a:xfrm>
-            <a:off x="640080" y="4572000"/>
+            <a:off x="640080" y="4709160"/>
             <a:ext cx="3332378" cy="320040"/>
           </a:xfrm>
           <a:prstGeom prst="rect">
@@ -7507,8 +7368,8 @@
         </p:nvSpPr>
         <p:spPr>
           <a:xfrm>
-            <a:off x="4429658" y="2331720"/>
-            <a:ext cx="3332378" cy="1188720"/>
+            <a:off x="4429658" y="2377440"/>
+            <a:ext cx="3332378" cy="1280160"/>
           </a:xfrm>
           <a:prstGeom prst="rect">
             <a:avLst/>
@@ -7523,18 +7384,18 @@
           <a:p>
             <a:pPr algn="l">
               <a:lnSpc>
-                <a:spcPts val="9120"/>
-              </a:lnSpc>
-              <a:spcBef>
-                <a:spcPts val="0"/>
-              </a:spcBef>
-              <a:spcAft>
-                <a:spcPts val="0"/>
-              </a:spcAft>
-              <a:buNone/>
-            </a:pPr>
-            <a:r>
-              <a:rPr sz="7600" b="1" i="0">
+                <a:spcPts val="9600"/>
+              </a:lnSpc>
+              <a:spcBef>
+                <a:spcPts val="0"/>
+              </a:spcBef>
+              <a:spcAft>
+                <a:spcPts val="0"/>
+              </a:spcAft>
+              <a:buNone/>
+            </a:pPr>
+            <a:r>
+              <a:rPr sz="8000" b="1" i="0">
                 <a:solidFill>
                   <a:srgbClr val="B8A6FF"/>
                 </a:solidFill>
@@ -7553,7 +7414,7 @@
         </p:nvSpPr>
         <p:spPr>
           <a:xfrm>
-            <a:off x="4429658" y="3611879"/>
+            <a:off x="4429658" y="3749039"/>
             <a:ext cx="3332378" cy="914400"/>
           </a:xfrm>
           <a:prstGeom prst="rect">
@@ -7569,24 +7430,24 @@
           <a:p>
             <a:pPr algn="l">
               <a:lnSpc>
-                <a:spcPts val="2400"/>
-              </a:lnSpc>
-              <a:spcBef>
-                <a:spcPts val="0"/>
-              </a:spcBef>
-              <a:spcAft>
-                <a:spcPts val="0"/>
-              </a:spcAft>
-              <a:buNone/>
-            </a:pPr>
-            <a:r>
-              <a:rPr sz="2000" b="0" i="0">
+                <a:spcPts val="2640"/>
+              </a:lnSpc>
+              <a:spcBef>
+                <a:spcPts val="0"/>
+              </a:spcBef>
+              <a:spcAft>
+                <a:spcPts val="0"/>
+              </a:spcAft>
+              <a:buNone/>
+            </a:pPr>
+            <a:r>
+              <a:rPr sz="2200" b="0" i="0">
                 <a:solidFill>
                   <a:srgbClr val="EAF0FB"/>
                 </a:solidFill>
                 <a:latin typeface="Arial"/>
               </a:rPr>
-              <a:t>children are autistic — and become adults who still need support</a:t>
+              <a:t>children are autistic</a:t>
             </a:r>
           </a:p>
         </p:txBody>
@@ -7599,7 +7460,7 @@
         </p:nvSpPr>
         <p:spPr>
           <a:xfrm>
-            <a:off x="4429658" y="4572000"/>
+            <a:off x="4429658" y="4709160"/>
             <a:ext cx="3332378" cy="320040"/>
           </a:xfrm>
           <a:prstGeom prst="rect">
@@ -7645,8 +7506,8 @@
         </p:nvSpPr>
         <p:spPr>
           <a:xfrm>
-            <a:off x="8219236" y="2331720"/>
-            <a:ext cx="3332378" cy="1188720"/>
+            <a:off x="8219236" y="2377440"/>
+            <a:ext cx="3332378" cy="1280160"/>
           </a:xfrm>
           <a:prstGeom prst="rect">
             <a:avLst/>
@@ -7661,18 +7522,18 @@
           <a:p>
             <a:pPr algn="l">
               <a:lnSpc>
-                <a:spcPts val="9120"/>
-              </a:lnSpc>
-              <a:spcBef>
-                <a:spcPts val="0"/>
-              </a:spcBef>
-              <a:spcAft>
-                <a:spcPts val="0"/>
-              </a:spcAft>
-              <a:buNone/>
-            </a:pPr>
-            <a:r>
-              <a:rPr sz="7600" b="1" i="0">
+                <a:spcPts val="9600"/>
+              </a:lnSpc>
+              <a:spcBef>
+                <a:spcPts val="0"/>
+              </a:spcBef>
+              <a:spcAft>
+                <a:spcPts val="0"/>
+              </a:spcAft>
+              <a:buNone/>
+            </a:pPr>
+            <a:r>
+              <a:rPr sz="8000" b="1" i="0">
                 <a:solidFill>
                   <a:srgbClr val="FFC94D"/>
                 </a:solidFill>
@@ -7691,7 +7552,7 @@
         </p:nvSpPr>
         <p:spPr>
           <a:xfrm>
-            <a:off x="8219236" y="3611879"/>
+            <a:off x="8219236" y="3749039"/>
             <a:ext cx="3332378" cy="914400"/>
           </a:xfrm>
           <a:prstGeom prst="rect">
@@ -7707,7 +7568,7 @@
           <a:p>
             <a:pPr algn="l">
               <a:lnSpc>
-                <a:spcPts val="2400"/>
+                <a:spcPts val="2428"/>
               </a:lnSpc>
               <a:spcBef>
                 <a:spcPts val="0"/>
@@ -7724,7 +7585,7 @@
                 </a:solidFill>
                 <a:latin typeface="Arial"/>
               </a:rPr>
-              <a:t>of long-term medications are not taken as prescribed</a:t>
+              <a:t>of long-term medicines are not taken as prescribed</a:t>
             </a:r>
           </a:p>
         </p:txBody>
@@ -7737,7 +7598,7 @@
         </p:nvSpPr>
         <p:spPr>
           <a:xfrm>
-            <a:off x="8219236" y="4572000"/>
+            <a:off x="8219236" y="4709160"/>
             <a:ext cx="3332378" cy="320040"/>
           </a:xfrm>
           <a:prstGeom prst="rect">
@@ -7783,7 +7644,7 @@
         </p:nvSpPr>
         <p:spPr>
           <a:xfrm>
-            <a:off x="640080" y="5577840"/>
+            <a:off x="640080" y="5623560"/>
             <a:ext cx="10911535" cy="457200"/>
           </a:xfrm>
           <a:prstGeom prst="rect">
@@ -7799,24 +7660,24 @@
           <a:p>
             <a:pPr algn="l">
               <a:lnSpc>
-                <a:spcPts val="1920"/>
-              </a:lnSpc>
-              <a:spcBef>
-                <a:spcPts val="0"/>
-              </a:spcBef>
-              <a:spcAft>
-                <a:spcPts val="0"/>
-              </a:spcAft>
-              <a:buNone/>
-            </a:pPr>
-            <a:r>
-              <a:rPr sz="1600" b="0" i="0">
+                <a:spcPts val="2400"/>
+              </a:lnSpc>
+              <a:spcBef>
+                <a:spcPts val="0"/>
+              </a:spcBef>
+              <a:spcAft>
+                <a:spcPts val="0"/>
+              </a:spcAft>
+              <a:buNone/>
+            </a:pPr>
+            <a:r>
+              <a:rPr sz="2000" b="0" i="0">
                 <a:solidFill>
                   <a:srgbClr val="A6BBE0"/>
                 </a:solidFill>
                 <a:latin typeface="Arial"/>
               </a:rPr>
-              <a:t>Behind them: 63 million family caregivers, nearly one in four American adults.  (AARP &amp; NAC, 2025)</a:t>
+              <a:t>Behind them: 63 million family caregivers.</a:t>
             </a:r>
           </a:p>
         </p:txBody>
@@ -7824,6 +7685,52 @@
       <p:sp>
         <p:nvSpPr>
           <p:cNvPr id="14" name="TextBox 13"/>
+          <p:cNvSpPr txBox="1"/>
+          <p:nvPr/>
+        </p:nvSpPr>
+        <p:spPr>
+          <a:xfrm>
+            <a:off x="6309360" y="5678424"/>
+            <a:ext cx="3657600" cy="365760"/>
+          </a:xfrm>
+          <a:prstGeom prst="rect">
+            <a:avLst/>
+          </a:prstGeom>
+          <a:noFill/>
+        </p:spPr>
+        <p:txBody>
+          <a:bodyPr wrap="square" lIns="0" rIns="0" tIns="0" bIns="0" anchor="t">
+            <a:noAutofit/>
+          </a:bodyPr>
+          <a:lstStyle/>
+          <a:p>
+            <a:pPr algn="l">
+              <a:lnSpc>
+                <a:spcPts val="1439"/>
+              </a:lnSpc>
+              <a:spcBef>
+                <a:spcPts val="0"/>
+              </a:spcBef>
+              <a:spcAft>
+                <a:spcPts val="0"/>
+              </a:spcAft>
+              <a:buNone/>
+            </a:pPr>
+            <a:r>
+              <a:rPr sz="1200" b="0" i="0">
+                <a:solidFill>
+                  <a:srgbClr val="7F98C6"/>
+                </a:solidFill>
+                <a:latin typeface="Arial"/>
+              </a:rPr>
+              <a:t>AARP &amp; NAC, 2025</a:t>
+            </a:r>
+          </a:p>
+        </p:txBody>
+      </p:sp>
+      <p:sp>
+        <p:nvSpPr>
+          <p:cNvPr id="15" name="TextBox 14"/>
           <p:cNvSpPr txBox="1"/>
           <p:nvPr/>
         </p:nvSpPr>
@@ -7963,24 +7870,24 @@
           <a:p>
             <a:pPr algn="l">
               <a:lnSpc>
-                <a:spcPts val="4032"/>
-              </a:lnSpc>
-              <a:spcBef>
-                <a:spcPts val="0"/>
-              </a:spcBef>
-              <a:spcAft>
-                <a:spcPts val="0"/>
-              </a:spcAft>
-              <a:buNone/>
-            </a:pPr>
-            <a:r>
-              <a:rPr sz="3600" b="1" i="0">
+                <a:spcPts val="4480"/>
+              </a:lnSpc>
+              <a:spcBef>
+                <a:spcPts val="0"/>
+              </a:spcBef>
+              <a:spcAft>
+                <a:spcPts val="0"/>
+              </a:spcAft>
+              <a:buNone/>
+            </a:pPr>
+            <a:r>
+              <a:rPr sz="4000" b="1" i="0">
                 <a:solidFill>
                   <a:srgbClr val="FFFFFF"/>
                 </a:solidFill>
                 <a:latin typeface="Arial"/>
               </a:rPr>
-              <a:t>Families juggle four apps, four accounts — and hand their health data to the cloud.</a:t>
+              <a:t>Four apps. Four accounts. Four clouds.</a:t>
             </a:r>
           </a:p>
         </p:txBody>
@@ -7993,8 +7900,8 @@
         </p:nvSpPr>
         <p:spPr>
           <a:xfrm>
-            <a:off x="640080" y="2331720"/>
-            <a:ext cx="1737360" cy="1828800"/>
+            <a:off x="640080" y="2514600"/>
+            <a:ext cx="1737360" cy="1920240"/>
           </a:xfrm>
           <a:prstGeom prst="roundRect">
             <a:avLst>
@@ -8037,8 +7944,8 @@
         </p:nvSpPr>
         <p:spPr>
           <a:xfrm>
-            <a:off x="896112" y="2606039"/>
-            <a:ext cx="1280160" cy="731520"/>
+            <a:off x="914400" y="2788920"/>
+            <a:ext cx="1280160" cy="914400"/>
           </a:xfrm>
           <a:prstGeom prst="rect">
             <a:avLst/>
@@ -8053,24 +7960,47 @@
           <a:p>
             <a:pPr algn="l">
               <a:lnSpc>
-                <a:spcPts val="2090"/>
-              </a:lnSpc>
-              <a:spcBef>
-                <a:spcPts val="0"/>
-              </a:spcBef>
-              <a:spcAft>
-                <a:spcPts val="0"/>
-              </a:spcAft>
-              <a:buNone/>
-            </a:pPr>
-            <a:r>
-              <a:rPr sz="1900" b="1" i="0">
+                <a:spcPts val="2310"/>
+              </a:lnSpc>
+              <a:spcBef>
+                <a:spcPts val="0"/>
+              </a:spcBef>
+              <a:spcAft>
+                <a:spcPts val="0"/>
+              </a:spcAft>
+              <a:buNone/>
+            </a:pPr>
+            <a:r>
+              <a:rPr sz="2100" b="1" i="0">
                 <a:solidFill>
                   <a:srgbClr val="FFFFFF"/>
                 </a:solidFill>
                 <a:latin typeface="Arial"/>
               </a:rPr>
-              <a:t>Medication app</a:t>
+              <a:t>Medication</a:t>
+            </a:r>
+          </a:p>
+          <a:p>
+            <a:pPr algn="l">
+              <a:lnSpc>
+                <a:spcPts val="2310"/>
+              </a:lnSpc>
+              <a:spcBef>
+                <a:spcPts val="0"/>
+              </a:spcBef>
+              <a:spcAft>
+                <a:spcPts val="0"/>
+              </a:spcAft>
+              <a:buNone/>
+            </a:pPr>
+            <a:r>
+              <a:rPr sz="2100" b="1" i="0">
+                <a:solidFill>
+                  <a:srgbClr val="FFFFFF"/>
+                </a:solidFill>
+                <a:latin typeface="Arial"/>
+              </a:rPr>
+              <a:t>app</a:t>
             </a:r>
           </a:p>
         </p:txBody>
@@ -8083,7 +8013,7 @@
         </p:nvSpPr>
         <p:spPr>
           <a:xfrm>
-            <a:off x="896112" y="3246120"/>
+            <a:off x="914400" y="3886200"/>
             <a:ext cx="1280160" cy="365760"/>
           </a:xfrm>
           <a:prstGeom prst="rect">
@@ -8099,64 +8029,18 @@
           <a:p>
             <a:pPr algn="l">
               <a:lnSpc>
-                <a:spcPts val="1680"/>
-              </a:lnSpc>
-              <a:spcBef>
-                <a:spcPts val="0"/>
-              </a:spcBef>
-              <a:spcAft>
-                <a:spcPts val="0"/>
-              </a:spcAft>
-              <a:buNone/>
-            </a:pPr>
-            <a:r>
-              <a:rPr sz="1400" b="0" i="0">
-                <a:solidFill>
-                  <a:srgbClr val="A6BBE0"/>
-                </a:solidFill>
-                <a:latin typeface="Arial"/>
-              </a:rPr>
-              <a:t>reminders</a:t>
-            </a:r>
-          </a:p>
-        </p:txBody>
-      </p:sp>
-      <p:sp>
-        <p:nvSpPr>
-          <p:cNvPr id="7" name="TextBox 6"/>
-          <p:cNvSpPr txBox="1"/>
-          <p:nvPr/>
-        </p:nvSpPr>
-        <p:spPr>
-          <a:xfrm>
-            <a:off x="896112" y="3657600"/>
-            <a:ext cx="1280160" cy="365760"/>
-          </a:xfrm>
-          <a:prstGeom prst="rect">
-            <a:avLst/>
-          </a:prstGeom>
-          <a:noFill/>
-        </p:spPr>
-        <p:txBody>
-          <a:bodyPr wrap="square" lIns="0" rIns="0" tIns="0" bIns="0" anchor="t">
-            <a:noAutofit/>
-          </a:bodyPr>
-          <a:lstStyle/>
-          <a:p>
-            <a:pPr algn="l">
-              <a:lnSpc>
-                <a:spcPts val="1497"/>
-              </a:lnSpc>
-              <a:spcBef>
-                <a:spcPts val="0"/>
-              </a:spcBef>
-              <a:spcAft>
-                <a:spcPts val="0"/>
-              </a:spcAft>
-              <a:buNone/>
-            </a:pPr>
-            <a:r>
-              <a:rPr sz="1250" b="1" i="0">
+                <a:spcPts val="1545"/>
+              </a:lnSpc>
+              <a:spcBef>
+                <a:spcPts val="0"/>
+              </a:spcBef>
+              <a:spcAft>
+                <a:spcPts val="0"/>
+              </a:spcAft>
+              <a:buNone/>
+            </a:pPr>
+            <a:r>
+              <a:rPr sz="1300" b="1" i="0">
                 <a:solidFill>
                   <a:srgbClr val="FF7B7B"/>
                 </a:solidFill>
@@ -8169,14 +8053,14 @@
       </p:sp>
       <p:sp>
         <p:nvSpPr>
-          <p:cNvPr id="8" name="Rounded Rectangle 7"/>
+          <p:cNvPr id="7" name="Rounded Rectangle 6"/>
           <p:cNvSpPr/>
           <p:nvPr/>
         </p:nvSpPr>
         <p:spPr>
           <a:xfrm>
-            <a:off x="2578608" y="2331720"/>
-            <a:ext cx="1737360" cy="1828800"/>
+            <a:off x="2578608" y="2514600"/>
+            <a:ext cx="1737360" cy="1920240"/>
           </a:xfrm>
           <a:prstGeom prst="roundRect">
             <a:avLst>
@@ -8213,14 +8097,14 @@
       </p:sp>
       <p:sp>
         <p:nvSpPr>
-          <p:cNvPr id="9" name="TextBox 8"/>
+          <p:cNvPr id="8" name="TextBox 7"/>
           <p:cNvSpPr txBox="1"/>
           <p:nvPr/>
         </p:nvSpPr>
         <p:spPr>
           <a:xfrm>
-            <a:off x="2834640" y="2606039"/>
-            <a:ext cx="1280160" cy="731520"/>
+            <a:off x="2852928" y="2788920"/>
+            <a:ext cx="1280160" cy="914400"/>
           </a:xfrm>
           <a:prstGeom prst="rect">
             <a:avLst/>
@@ -8235,37 +8119,60 @@
           <a:p>
             <a:pPr algn="l">
               <a:lnSpc>
-                <a:spcPts val="2090"/>
-              </a:lnSpc>
-              <a:spcBef>
-                <a:spcPts val="0"/>
-              </a:spcBef>
-              <a:spcAft>
-                <a:spcPts val="0"/>
-              </a:spcAft>
-              <a:buNone/>
-            </a:pPr>
-            <a:r>
-              <a:rPr sz="1900" b="1" i="0">
+                <a:spcPts val="2310"/>
+              </a:lnSpc>
+              <a:spcBef>
+                <a:spcPts val="0"/>
+              </a:spcBef>
+              <a:spcAft>
+                <a:spcPts val="0"/>
+              </a:spcAft>
+              <a:buNone/>
+            </a:pPr>
+            <a:r>
+              <a:rPr sz="2100" b="1" i="0">
                 <a:solidFill>
                   <a:srgbClr val="FFFFFF"/>
                 </a:solidFill>
                 <a:latin typeface="Arial"/>
               </a:rPr>
-              <a:t>Video calls</a:t>
-            </a:r>
-          </a:p>
-        </p:txBody>
-      </p:sp>
-      <p:sp>
-        <p:nvSpPr>
-          <p:cNvPr id="10" name="TextBox 9"/>
+              <a:t>Video</a:t>
+            </a:r>
+          </a:p>
+          <a:p>
+            <a:pPr algn="l">
+              <a:lnSpc>
+                <a:spcPts val="2310"/>
+              </a:lnSpc>
+              <a:spcBef>
+                <a:spcPts val="0"/>
+              </a:spcBef>
+              <a:spcAft>
+                <a:spcPts val="0"/>
+              </a:spcAft>
+              <a:buNone/>
+            </a:pPr>
+            <a:r>
+              <a:rPr sz="2100" b="1" i="0">
+                <a:solidFill>
+                  <a:srgbClr val="FFFFFF"/>
+                </a:solidFill>
+                <a:latin typeface="Arial"/>
+              </a:rPr>
+              <a:t>calls</a:t>
+            </a:r>
+          </a:p>
+        </p:txBody>
+      </p:sp>
+      <p:sp>
+        <p:nvSpPr>
+          <p:cNvPr id="9" name="TextBox 8"/>
           <p:cNvSpPr txBox="1"/>
           <p:nvPr/>
         </p:nvSpPr>
         <p:spPr>
           <a:xfrm>
-            <a:off x="2834640" y="3246120"/>
+            <a:off x="2852928" y="3886200"/>
             <a:ext cx="1280160" cy="365760"/>
           </a:xfrm>
           <a:prstGeom prst="rect">
@@ -8281,64 +8188,18 @@
           <a:p>
             <a:pPr algn="l">
               <a:lnSpc>
-                <a:spcPts val="1612"/>
-              </a:lnSpc>
-              <a:spcBef>
-                <a:spcPts val="0"/>
-              </a:spcBef>
-              <a:spcAft>
-                <a:spcPts val="0"/>
-              </a:spcAft>
-              <a:buNone/>
-            </a:pPr>
-            <a:r>
-              <a:rPr sz="1350" b="0" i="0">
-                <a:solidFill>
-                  <a:srgbClr val="A6BBE0"/>
-                </a:solidFill>
-                <a:latin typeface="Arial"/>
-              </a:rPr>
-              <a:t>staying in touch</a:t>
-            </a:r>
-          </a:p>
-        </p:txBody>
-      </p:sp>
-      <p:sp>
-        <p:nvSpPr>
-          <p:cNvPr id="11" name="TextBox 10"/>
-          <p:cNvSpPr txBox="1"/>
-          <p:nvPr/>
-        </p:nvSpPr>
-        <p:spPr>
-          <a:xfrm>
-            <a:off x="2834640" y="3657600"/>
-            <a:ext cx="1280160" cy="365760"/>
-          </a:xfrm>
-          <a:prstGeom prst="rect">
-            <a:avLst/>
-          </a:prstGeom>
-          <a:noFill/>
-        </p:spPr>
-        <p:txBody>
-          <a:bodyPr wrap="square" lIns="0" rIns="0" tIns="0" bIns="0" anchor="t">
-            <a:noAutofit/>
-          </a:bodyPr>
-          <a:lstStyle/>
-          <a:p>
-            <a:pPr algn="l">
-              <a:lnSpc>
-                <a:spcPts val="1497"/>
-              </a:lnSpc>
-              <a:spcBef>
-                <a:spcPts val="0"/>
-              </a:spcBef>
-              <a:spcAft>
-                <a:spcPts val="0"/>
-              </a:spcAft>
-              <a:buNone/>
-            </a:pPr>
-            <a:r>
-              <a:rPr sz="1250" b="1" i="0">
+                <a:spcPts val="1545"/>
+              </a:lnSpc>
+              <a:spcBef>
+                <a:spcPts val="0"/>
+              </a:spcBef>
+              <a:spcAft>
+                <a:spcPts val="0"/>
+              </a:spcAft>
+              <a:buNone/>
+            </a:pPr>
+            <a:r>
+              <a:rPr sz="1300" b="1" i="0">
                 <a:solidFill>
                   <a:srgbClr val="FF7B7B"/>
                 </a:solidFill>
@@ -8351,14 +8212,14 @@
       </p:sp>
       <p:sp>
         <p:nvSpPr>
-          <p:cNvPr id="12" name="Rounded Rectangle 11"/>
+          <p:cNvPr id="10" name="Rounded Rectangle 9"/>
           <p:cNvSpPr/>
           <p:nvPr/>
         </p:nvSpPr>
         <p:spPr>
           <a:xfrm>
-            <a:off x="4517136" y="2331720"/>
-            <a:ext cx="1737360" cy="1828800"/>
+            <a:off x="4517136" y="2514600"/>
+            <a:ext cx="1737360" cy="1920240"/>
           </a:xfrm>
           <a:prstGeom prst="roundRect">
             <a:avLst>
@@ -8395,14 +8256,14 @@
       </p:sp>
       <p:sp>
         <p:nvSpPr>
-          <p:cNvPr id="13" name="TextBox 12"/>
+          <p:cNvPr id="11" name="TextBox 10"/>
           <p:cNvSpPr txBox="1"/>
           <p:nvPr/>
         </p:nvSpPr>
         <p:spPr>
           <a:xfrm>
-            <a:off x="4773168" y="2606039"/>
-            <a:ext cx="1280160" cy="731520"/>
+            <a:off x="4791456" y="2788920"/>
+            <a:ext cx="1280160" cy="914400"/>
           </a:xfrm>
           <a:prstGeom prst="rect">
             <a:avLst/>
@@ -8417,37 +8278,60 @@
           <a:p>
             <a:pPr algn="l">
               <a:lnSpc>
-                <a:spcPts val="2090"/>
-              </a:lnSpc>
-              <a:spcBef>
-                <a:spcPts val="0"/>
-              </a:spcBef>
-              <a:spcAft>
-                <a:spcPts val="0"/>
-              </a:spcAft>
-              <a:buNone/>
-            </a:pPr>
-            <a:r>
-              <a:rPr sz="1900" b="1" i="0">
+                <a:spcPts val="2310"/>
+              </a:lnSpc>
+              <a:spcBef>
+                <a:spcPts val="0"/>
+              </a:spcBef>
+              <a:spcAft>
+                <a:spcPts val="0"/>
+              </a:spcAft>
+              <a:buNone/>
+            </a:pPr>
+            <a:r>
+              <a:rPr sz="2100" b="1" i="0">
                 <a:solidFill>
                   <a:srgbClr val="FFFFFF"/>
                 </a:solidFill>
                 <a:latin typeface="Arial"/>
               </a:rPr>
-              <a:t>Health record</a:t>
-            </a:r>
-          </a:p>
-        </p:txBody>
-      </p:sp>
-      <p:sp>
-        <p:nvSpPr>
-          <p:cNvPr id="14" name="TextBox 13"/>
+              <a:t>Health</a:t>
+            </a:r>
+          </a:p>
+          <a:p>
+            <a:pPr algn="l">
+              <a:lnSpc>
+                <a:spcPts val="2310"/>
+              </a:lnSpc>
+              <a:spcBef>
+                <a:spcPts val="0"/>
+              </a:spcBef>
+              <a:spcAft>
+                <a:spcPts val="0"/>
+              </a:spcAft>
+              <a:buNone/>
+            </a:pPr>
+            <a:r>
+              <a:rPr sz="2100" b="1" i="0">
+                <a:solidFill>
+                  <a:srgbClr val="FFFFFF"/>
+                </a:solidFill>
+                <a:latin typeface="Arial"/>
+              </a:rPr>
+              <a:t>record</a:t>
+            </a:r>
+          </a:p>
+        </p:txBody>
+      </p:sp>
+      <p:sp>
+        <p:nvSpPr>
+          <p:cNvPr id="12" name="TextBox 11"/>
           <p:cNvSpPr txBox="1"/>
           <p:nvPr/>
         </p:nvSpPr>
         <p:spPr>
           <a:xfrm>
-            <a:off x="4773168" y="3246120"/>
+            <a:off x="4791456" y="3886200"/>
             <a:ext cx="1280160" cy="365760"/>
           </a:xfrm>
           <a:prstGeom prst="rect">
@@ -8463,64 +8347,18 @@
           <a:p>
             <a:pPr algn="l">
               <a:lnSpc>
-                <a:spcPts val="1680"/>
-              </a:lnSpc>
-              <a:spcBef>
-                <a:spcPts val="0"/>
-              </a:spcBef>
-              <a:spcAft>
-                <a:spcPts val="0"/>
-              </a:spcAft>
-              <a:buNone/>
-            </a:pPr>
-            <a:r>
-              <a:rPr sz="1400" b="0" i="0">
-                <a:solidFill>
-                  <a:srgbClr val="A6BBE0"/>
-                </a:solidFill>
-                <a:latin typeface="Arial"/>
-              </a:rPr>
-              <a:t>vitals &amp; visits</a:t>
-            </a:r>
-          </a:p>
-        </p:txBody>
-      </p:sp>
-      <p:sp>
-        <p:nvSpPr>
-          <p:cNvPr id="15" name="TextBox 14"/>
-          <p:cNvSpPr txBox="1"/>
-          <p:nvPr/>
-        </p:nvSpPr>
-        <p:spPr>
-          <a:xfrm>
-            <a:off x="4773168" y="3657600"/>
-            <a:ext cx="1280160" cy="365760"/>
-          </a:xfrm>
-          <a:prstGeom prst="rect">
-            <a:avLst/>
-          </a:prstGeom>
-          <a:noFill/>
-        </p:spPr>
-        <p:txBody>
-          <a:bodyPr wrap="square" lIns="0" rIns="0" tIns="0" bIns="0" anchor="t">
-            <a:noAutofit/>
-          </a:bodyPr>
-          <a:lstStyle/>
-          <a:p>
-            <a:pPr algn="l">
-              <a:lnSpc>
-                <a:spcPts val="1497"/>
-              </a:lnSpc>
-              <a:spcBef>
-                <a:spcPts val="0"/>
-              </a:spcBef>
-              <a:spcAft>
-                <a:spcPts val="0"/>
-              </a:spcAft>
-              <a:buNone/>
-            </a:pPr>
-            <a:r>
-              <a:rPr sz="1250" b="1" i="0">
+                <a:spcPts val="1545"/>
+              </a:lnSpc>
+              <a:spcBef>
+                <a:spcPts val="0"/>
+              </a:spcBef>
+              <a:spcAft>
+                <a:spcPts val="0"/>
+              </a:spcAft>
+              <a:buNone/>
+            </a:pPr>
+            <a:r>
+              <a:rPr sz="1300" b="1" i="0">
                 <a:solidFill>
                   <a:srgbClr val="FF7B7B"/>
                 </a:solidFill>
@@ -8533,14 +8371,14 @@
       </p:sp>
       <p:sp>
         <p:nvSpPr>
-          <p:cNvPr id="16" name="Rounded Rectangle 15"/>
+          <p:cNvPr id="13" name="Rounded Rectangle 12"/>
           <p:cNvSpPr/>
           <p:nvPr/>
         </p:nvSpPr>
         <p:spPr>
           <a:xfrm>
-            <a:off x="6455664" y="2331720"/>
-            <a:ext cx="1737360" cy="1828800"/>
+            <a:off x="6455664" y="2514600"/>
+            <a:ext cx="1737360" cy="1920240"/>
           </a:xfrm>
           <a:prstGeom prst="roundRect">
             <a:avLst>
@@ -8577,14 +8415,14 @@
       </p:sp>
       <p:sp>
         <p:nvSpPr>
-          <p:cNvPr id="17" name="TextBox 16"/>
+          <p:cNvPr id="14" name="TextBox 13"/>
           <p:cNvSpPr txBox="1"/>
           <p:nvPr/>
         </p:nvSpPr>
         <p:spPr>
           <a:xfrm>
-            <a:off x="6711696" y="2606039"/>
-            <a:ext cx="1280160" cy="731520"/>
+            <a:off x="6729984" y="2788920"/>
+            <a:ext cx="1280160" cy="914400"/>
           </a:xfrm>
           <a:prstGeom prst="rect">
             <a:avLst/>
@@ -8599,37 +8437,60 @@
           <a:p>
             <a:pPr algn="l">
               <a:lnSpc>
-                <a:spcPts val="2090"/>
-              </a:lnSpc>
-              <a:spcBef>
-                <a:spcPts val="0"/>
-              </a:spcBef>
-              <a:spcAft>
-                <a:spcPts val="0"/>
-              </a:spcAft>
-              <a:buNone/>
-            </a:pPr>
-            <a:r>
-              <a:rPr sz="1900" b="1" i="0">
+                <a:spcPts val="2310"/>
+              </a:lnSpc>
+              <a:spcBef>
+                <a:spcPts val="0"/>
+              </a:spcBef>
+              <a:spcAft>
+                <a:spcPts val="0"/>
+              </a:spcAft>
+              <a:buNone/>
+            </a:pPr>
+            <a:r>
+              <a:rPr sz="2100" b="1" i="0">
                 <a:solidFill>
                   <a:srgbClr val="FFFFFF"/>
                 </a:solidFill>
                 <a:latin typeface="Arial"/>
               </a:rPr>
-              <a:t>Family updates</a:t>
-            </a:r>
-          </a:p>
-        </p:txBody>
-      </p:sp>
-      <p:sp>
-        <p:nvSpPr>
-          <p:cNvPr id="18" name="TextBox 17"/>
+              <a:t>Family</a:t>
+            </a:r>
+          </a:p>
+          <a:p>
+            <a:pPr algn="l">
+              <a:lnSpc>
+                <a:spcPts val="2310"/>
+              </a:lnSpc>
+              <a:spcBef>
+                <a:spcPts val="0"/>
+              </a:spcBef>
+              <a:spcAft>
+                <a:spcPts val="0"/>
+              </a:spcAft>
+              <a:buNone/>
+            </a:pPr>
+            <a:r>
+              <a:rPr sz="2100" b="1" i="0">
+                <a:solidFill>
+                  <a:srgbClr val="FFFFFF"/>
+                </a:solidFill>
+                <a:latin typeface="Arial"/>
+              </a:rPr>
+              <a:t>updates</a:t>
+            </a:r>
+          </a:p>
+        </p:txBody>
+      </p:sp>
+      <p:sp>
+        <p:nvSpPr>
+          <p:cNvPr id="15" name="TextBox 14"/>
           <p:cNvSpPr txBox="1"/>
           <p:nvPr/>
         </p:nvSpPr>
         <p:spPr>
           <a:xfrm>
-            <a:off x="6711696" y="3246120"/>
+            <a:off x="6729984" y="3886200"/>
             <a:ext cx="1280160" cy="365760"/>
           </a:xfrm>
           <a:prstGeom prst="rect">
@@ -8645,64 +8506,18 @@
           <a:p>
             <a:pPr algn="l">
               <a:lnSpc>
-                <a:spcPts val="1680"/>
-              </a:lnSpc>
-              <a:spcBef>
-                <a:spcPts val="0"/>
-              </a:spcBef>
-              <a:spcAft>
-                <a:spcPts val="0"/>
-              </a:spcAft>
-              <a:buNone/>
-            </a:pPr>
-            <a:r>
-              <a:rPr sz="1400" b="0" i="0">
-                <a:solidFill>
-                  <a:srgbClr val="A6BBE0"/>
-                </a:solidFill>
-                <a:latin typeface="Arial"/>
-              </a:rPr>
-              <a:t>care notes</a:t>
-            </a:r>
-          </a:p>
-        </p:txBody>
-      </p:sp>
-      <p:sp>
-        <p:nvSpPr>
-          <p:cNvPr id="19" name="TextBox 18"/>
-          <p:cNvSpPr txBox="1"/>
-          <p:nvPr/>
-        </p:nvSpPr>
-        <p:spPr>
-          <a:xfrm>
-            <a:off x="6711696" y="3657600"/>
-            <a:ext cx="1280160" cy="365760"/>
-          </a:xfrm>
-          <a:prstGeom prst="rect">
-            <a:avLst/>
-          </a:prstGeom>
-          <a:noFill/>
-        </p:spPr>
-        <p:txBody>
-          <a:bodyPr wrap="square" lIns="0" rIns="0" tIns="0" bIns="0" anchor="t">
-            <a:noAutofit/>
-          </a:bodyPr>
-          <a:lstStyle/>
-          <a:p>
-            <a:pPr algn="l">
-              <a:lnSpc>
-                <a:spcPts val="1497"/>
-              </a:lnSpc>
-              <a:spcBef>
-                <a:spcPts val="0"/>
-              </a:spcBef>
-              <a:spcAft>
-                <a:spcPts val="0"/>
-              </a:spcAft>
-              <a:buNone/>
-            </a:pPr>
-            <a:r>
-              <a:rPr sz="1250" b="1" i="0">
+                <a:spcPts val="1545"/>
+              </a:lnSpc>
+              <a:spcBef>
+                <a:spcPts val="0"/>
+              </a:spcBef>
+              <a:spcAft>
+                <a:spcPts val="0"/>
+              </a:spcAft>
+              <a:buNone/>
+            </a:pPr>
+            <a:r>
+              <a:rPr sz="1300" b="1" i="0">
                 <a:solidFill>
                   <a:srgbClr val="FF7B7B"/>
                 </a:solidFill>
@@ -8715,13 +8530,13 @@
       </p:sp>
       <p:cxnSp>
         <p:nvCxnSpPr>
-          <p:cNvPr id="20" name="Connector 19"/>
+          <p:cNvPr id="16" name="Connector 15"/>
           <p:cNvCxnSpPr/>
           <p:nvPr/>
         </p:nvCxnSpPr>
         <p:spPr>
           <a:xfrm>
-            <a:off x="8302751" y="3246120"/>
+            <a:off x="8302751" y="3474720"/>
             <a:ext cx="548640" cy="0"/>
           </a:xfrm>
           <a:prstGeom prst="line">
@@ -8751,18 +8566,18 @@
       </p:cxnSp>
       <p:sp>
         <p:nvSpPr>
-          <p:cNvPr id="21" name="Rounded Rectangle 20"/>
+          <p:cNvPr id="17" name="Rounded Rectangle 16"/>
           <p:cNvSpPr/>
           <p:nvPr/>
         </p:nvSpPr>
         <p:spPr>
           <a:xfrm>
-            <a:off x="9034272" y="2148839"/>
-            <a:ext cx="2517343" cy="2194560"/>
+            <a:off x="9034272" y="2286000"/>
+            <a:ext cx="2517343" cy="2377440"/>
           </a:xfrm>
           <a:prstGeom prst="roundRect">
             <a:avLst>
-              <a:gd name="adj" fmla="val 8333"/>
+              <a:gd name="adj" fmla="val 7692"/>
             </a:avLst>
           </a:prstGeom>
           <a:solidFill>
@@ -8795,13 +8610,13 @@
       </p:sp>
       <p:sp>
         <p:nvSpPr>
-          <p:cNvPr id="22" name="TextBox 21"/>
+          <p:cNvPr id="18" name="TextBox 17"/>
           <p:cNvSpPr txBox="1"/>
           <p:nvPr/>
         </p:nvSpPr>
         <p:spPr>
           <a:xfrm>
-            <a:off x="9308592" y="2377439"/>
+            <a:off x="9308592" y="2468880"/>
             <a:ext cx="2060143" cy="457200"/>
           </a:xfrm>
           <a:prstGeom prst="rect">
@@ -8817,18 +8632,18 @@
           <a:p>
             <a:pPr algn="l">
               <a:lnSpc>
-                <a:spcPts val="2520"/>
-              </a:lnSpc>
-              <a:spcBef>
-                <a:spcPts val="0"/>
-              </a:spcBef>
-              <a:spcAft>
-                <a:spcPts val="0"/>
-              </a:spcAft>
-              <a:buNone/>
-            </a:pPr>
-            <a:r>
-              <a:rPr sz="2100" b="1" i="0">
+                <a:spcPts val="2640"/>
+              </a:lnSpc>
+              <a:spcBef>
+                <a:spcPts val="0"/>
+              </a:spcBef>
+              <a:spcAft>
+                <a:spcPts val="0"/>
+              </a:spcAft>
+              <a:buNone/>
+            </a:pPr>
+            <a:r>
+              <a:rPr sz="2200" b="1" i="0">
                 <a:solidFill>
                   <a:srgbClr val="FFFFFF"/>
                 </a:solidFill>
@@ -8841,14 +8656,14 @@
       </p:sp>
       <p:sp>
         <p:nvSpPr>
-          <p:cNvPr id="23" name="TextBox 22"/>
+          <p:cNvPr id="19" name="TextBox 18"/>
           <p:cNvSpPr txBox="1"/>
           <p:nvPr/>
         </p:nvSpPr>
         <p:spPr>
           <a:xfrm>
-            <a:off x="9308592" y="2926079"/>
-            <a:ext cx="2060143" cy="1463040"/>
+            <a:off x="9308592" y="3017520"/>
+            <a:ext cx="2060143" cy="1554480"/>
           </a:xfrm>
           <a:prstGeom prst="rect">
             <a:avLst/>
@@ -8863,84 +8678,111 @@
           <a:p>
             <a:pPr algn="l">
               <a:lnSpc>
-                <a:spcPts val="2080"/>
-              </a:lnSpc>
-              <a:spcBef>
-                <a:spcPts val="0"/>
-              </a:spcBef>
-              <a:spcAft>
-                <a:spcPts val="300"/>
-              </a:spcAft>
-              <a:buNone/>
-            </a:pPr>
-            <a:r>
-              <a:rPr sz="1600" b="0" i="0">
+                <a:spcPts val="2750"/>
+              </a:lnSpc>
+              <a:spcBef>
+                <a:spcPts val="0"/>
+              </a:spcBef>
+              <a:spcAft>
+                <a:spcPts val="200"/>
+              </a:spcAft>
+              <a:buNone/>
+            </a:pPr>
+            <a:r>
+              <a:rPr sz="2200" b="1" i="0">
                 <a:solidFill>
                   <a:srgbClr val="FFFFFF"/>
                 </a:solidFill>
                 <a:latin typeface="Arial"/>
               </a:rPr>
-              <a:t>one app</a:t>
+              <a:t>1</a:t>
+            </a:r>
+            <a:r>
+              <a:rPr sz="2200" b="0" i="0">
+                <a:solidFill>
+                  <a:srgbClr val="EAF0FB"/>
+                </a:solidFill>
+                <a:latin typeface="Arial"/>
+              </a:rPr>
+              <a:t> app</a:t>
             </a:r>
           </a:p>
           <a:p>
             <a:pPr algn="l">
               <a:lnSpc>
-                <a:spcPts val="2080"/>
-              </a:lnSpc>
-              <a:spcBef>
-                <a:spcPts val="0"/>
-              </a:spcBef>
-              <a:spcAft>
-                <a:spcPts val="300"/>
-              </a:spcAft>
-              <a:buNone/>
-            </a:pPr>
-            <a:r>
-              <a:rPr sz="1600" b="0" i="0">
+                <a:spcPts val="2750"/>
+              </a:lnSpc>
+              <a:spcBef>
+                <a:spcPts val="0"/>
+              </a:spcBef>
+              <a:spcAft>
+                <a:spcPts val="200"/>
+              </a:spcAft>
+              <a:buNone/>
+            </a:pPr>
+            <a:r>
+              <a:rPr sz="2200" b="1" i="0">
                 <a:solidFill>
                   <a:srgbClr val="FFFFFF"/>
                 </a:solidFill>
                 <a:latin typeface="Arial"/>
               </a:rPr>
-              <a:t>no account</a:t>
+              <a:t>0</a:t>
+            </a:r>
+            <a:r>
+              <a:rPr sz="2200" b="0" i="0">
+                <a:solidFill>
+                  <a:srgbClr val="EAF0FB"/>
+                </a:solidFill>
+                <a:latin typeface="Arial"/>
+              </a:rPr>
+              <a:t> accounts</a:t>
             </a:r>
           </a:p>
           <a:p>
             <a:pPr algn="l">
               <a:lnSpc>
-                <a:spcPts val="2080"/>
-              </a:lnSpc>
-              <a:spcBef>
-                <a:spcPts val="0"/>
-              </a:spcBef>
-              <a:spcAft>
-                <a:spcPts val="300"/>
-              </a:spcAft>
-              <a:buNone/>
-            </a:pPr>
-            <a:r>
-              <a:rPr sz="1600" b="0" i="0">
+                <a:spcPts val="2750"/>
+              </a:lnSpc>
+              <a:spcBef>
+                <a:spcPts val="0"/>
+              </a:spcBef>
+              <a:spcAft>
+                <a:spcPts val="200"/>
+              </a:spcAft>
+              <a:buNone/>
+            </a:pPr>
+            <a:r>
+              <a:rPr sz="2200" b="1" i="0">
                 <a:solidFill>
                   <a:srgbClr val="FFFFFF"/>
                 </a:solidFill>
                 <a:latin typeface="Arial"/>
               </a:rPr>
-              <a:t>nothing in the cloud</a:t>
-            </a:r>
-          </a:p>
-        </p:txBody>
-      </p:sp>
-      <p:sp>
-        <p:nvSpPr>
-          <p:cNvPr id="24" name="TextBox 23"/>
+              <a:t>0</a:t>
+            </a:r>
+            <a:r>
+              <a:rPr sz="2200" b="0" i="0">
+                <a:solidFill>
+                  <a:srgbClr val="EAF0FB"/>
+                </a:solidFill>
+                <a:latin typeface="Arial"/>
+              </a:rPr>
+              <a:t> clouds</a:t>
+            </a:r>
+          </a:p>
+        </p:txBody>
+      </p:sp>
+      <p:sp>
+        <p:nvSpPr>
+          <p:cNvPr id="20" name="TextBox 19"/>
           <p:cNvSpPr txBox="1"/>
           <p:nvPr/>
         </p:nvSpPr>
         <p:spPr>
           <a:xfrm>
-            <a:off x="640080" y="4937760"/>
-            <a:ext cx="10911535" cy="731520"/>
+            <a:off x="640080" y="5257800"/>
+            <a:ext cx="10911535" cy="365760"/>
           </a:xfrm>
           <a:prstGeom prst="rect">
             <a:avLst/>
@@ -8955,31 +8797,31 @@
           <a:p>
             <a:pPr algn="l">
               <a:lnSpc>
-                <a:spcPts val="1950"/>
-              </a:lnSpc>
-              <a:spcBef>
-                <a:spcPts val="0"/>
-              </a:spcBef>
-              <a:spcAft>
-                <a:spcPts val="0"/>
-              </a:spcAft>
-              <a:buNone/>
-            </a:pPr>
-            <a:r>
-              <a:rPr sz="1500" b="0" i="0">
+                <a:spcPts val="1920"/>
+              </a:lnSpc>
+              <a:spcBef>
+                <a:spcPts val="0"/>
+              </a:spcBef>
+              <a:spcAft>
+                <a:spcPts val="0"/>
+              </a:spcAft>
+              <a:buNone/>
+            </a:pPr>
+            <a:r>
+              <a:rPr sz="1600" b="0" i="0">
                 <a:solidFill>
                   <a:srgbClr val="A6BBE0"/>
                 </a:solidFill>
                 <a:latin typeface="Arial"/>
               </a:rPr>
-              <a:t>Medisafe · FaceTime · MyChart · CaringBridge — each solves one slice, each needs an account, none was designed for autistic users.</a:t>
-            </a:r>
-          </a:p>
-        </p:txBody>
-      </p:sp>
-      <p:sp>
-        <p:nvSpPr>
-          <p:cNvPr id="25" name="TextBox 24"/>
+              <a:t>Medisafe · FaceTime · MyChart · CaringBridge — none designed for autistic users.</a:t>
+            </a:r>
+          </a:p>
+        </p:txBody>
+      </p:sp>
+      <p:sp>
+        <p:nvSpPr>
+          <p:cNvPr id="21" name="TextBox 20"/>
           <p:cNvSpPr txBox="1"/>
           <p:nvPr/>
         </p:nvSpPr>
@@ -9119,18 +8961,18 @@
           <a:p>
             <a:pPr algn="l">
               <a:lnSpc>
-                <a:spcPts val="4032"/>
-              </a:lnSpc>
-              <a:spcBef>
-                <a:spcPts val="0"/>
-              </a:spcBef>
-              <a:spcAft>
-                <a:spcPts val="0"/>
-              </a:spcAft>
-              <a:buNone/>
-            </a:pPr>
-            <a:r>
-              <a:rPr sz="3600" b="1" i="0">
+                <a:spcPts val="4480"/>
+              </a:lnSpc>
+              <a:spcBef>
+                <a:spcPts val="0"/>
+              </a:spcBef>
+              <a:spcAft>
+                <a:spcPts val="0"/>
+              </a:spcAft>
+              <a:buNone/>
+            </a:pPr>
+            <a:r>
+              <a:rPr sz="4000" b="1" i="0">
                 <a:solidFill>
                   <a:srgbClr val="FFFFFF"/>
                 </a:solidFill>
@@ -9189,18 +9031,18 @@
           <a:p>
             <a:pPr algn="ctr">
               <a:lnSpc>
-                <a:spcPts val="1920"/>
-              </a:lnSpc>
-              <a:spcBef>
-                <a:spcPts val="0"/>
-              </a:spcBef>
-              <a:spcAft>
-                <a:spcPts val="0"/>
-              </a:spcAft>
-              <a:buNone/>
-            </a:pPr>
-            <a:r>
-              <a:rPr sz="1600" b="1" i="0">
+                <a:spcPts val="2039"/>
+              </a:lnSpc>
+              <a:spcBef>
+                <a:spcPts val="0"/>
+              </a:spcBef>
+              <a:spcAft>
+                <a:spcPts val="0"/>
+              </a:spcAft>
+              <a:buNone/>
+            </a:pPr>
+            <a:r>
+              <a:rPr sz="1700" b="1" i="0">
                 <a:solidFill>
                   <a:srgbClr val="FFFFFF"/>
                 </a:solidFill>
@@ -9259,18 +9101,18 @@
           <a:p>
             <a:pPr algn="ctr">
               <a:lnSpc>
-                <a:spcPts val="1920"/>
-              </a:lnSpc>
-              <a:spcBef>
-                <a:spcPts val="0"/>
-              </a:spcBef>
-              <a:spcAft>
-                <a:spcPts val="0"/>
-              </a:spcAft>
-              <a:buNone/>
-            </a:pPr>
-            <a:r>
-              <a:rPr sz="1600" b="1" i="0">
+                <a:spcPts val="2039"/>
+              </a:lnSpc>
+              <a:spcBef>
+                <a:spcPts val="0"/>
+              </a:spcBef>
+              <a:spcAft>
+                <a:spcPts val="0"/>
+              </a:spcAft>
+              <a:buNone/>
+            </a:pPr>
+            <a:r>
+              <a:rPr sz="1700" b="1" i="0">
                 <a:solidFill>
                   <a:srgbClr val="FFFFFF"/>
                 </a:solidFill>
@@ -9329,18 +9171,18 @@
           <a:p>
             <a:pPr algn="ctr">
               <a:lnSpc>
-                <a:spcPts val="1920"/>
-              </a:lnSpc>
-              <a:spcBef>
-                <a:spcPts val="0"/>
-              </a:spcBef>
-              <a:spcAft>
-                <a:spcPts val="0"/>
-              </a:spcAft>
-              <a:buNone/>
-            </a:pPr>
-            <a:r>
-              <a:rPr sz="1600" b="1" i="0">
+                <a:spcPts val="2039"/>
+              </a:lnSpc>
+              <a:spcBef>
+                <a:spcPts val="0"/>
+              </a:spcBef>
+              <a:spcAft>
+                <a:spcPts val="0"/>
+              </a:spcAft>
+              <a:buNone/>
+            </a:pPr>
+            <a:r>
+              <a:rPr sz="1700" b="1" i="0">
                 <a:solidFill>
                   <a:srgbClr val="FFFFFF"/>
                 </a:solidFill>
@@ -9399,18 +9241,18 @@
           <a:p>
             <a:pPr algn="ctr">
               <a:lnSpc>
-                <a:spcPts val="1920"/>
-              </a:lnSpc>
-              <a:spcBef>
-                <a:spcPts val="0"/>
-              </a:spcBef>
-              <a:spcAft>
-                <a:spcPts val="0"/>
-              </a:spcAft>
-              <a:buNone/>
-            </a:pPr>
-            <a:r>
-              <a:rPr sz="1600" b="1" i="0">
+                <a:spcPts val="2039"/>
+              </a:lnSpc>
+              <a:spcBef>
+                <a:spcPts val="0"/>
+              </a:spcBef>
+              <a:spcAft>
+                <a:spcPts val="0"/>
+              </a:spcAft>
+              <a:buNone/>
+            </a:pPr>
+            <a:r>
+              <a:rPr sz="1700" b="1" i="0">
                 <a:solidFill>
                   <a:srgbClr val="FFFFFF"/>
                 </a:solidFill>
@@ -9469,18 +9311,18 @@
           <a:p>
             <a:pPr algn="ctr">
               <a:lnSpc>
-                <a:spcPts val="1920"/>
-              </a:lnSpc>
-              <a:spcBef>
-                <a:spcPts val="0"/>
-              </a:spcBef>
-              <a:spcAft>
-                <a:spcPts val="0"/>
-              </a:spcAft>
-              <a:buNone/>
-            </a:pPr>
-            <a:r>
-              <a:rPr sz="1600" b="1" i="0">
+                <a:spcPts val="2039"/>
+              </a:lnSpc>
+              <a:spcBef>
+                <a:spcPts val="0"/>
+              </a:spcBef>
+              <a:spcAft>
+                <a:spcPts val="0"/>
+              </a:spcAft>
+              <a:buNone/>
+            </a:pPr>
+            <a:r>
+              <a:rPr sz="1700" b="1" i="0">
                 <a:solidFill>
                   <a:srgbClr val="FFFFFF"/>
                 </a:solidFill>
@@ -9633,18 +9475,18 @@
           <a:p>
             <a:pPr algn="l">
               <a:lnSpc>
-                <a:spcPts val="4032"/>
-              </a:lnSpc>
-              <a:spcBef>
-                <a:spcPts val="0"/>
-              </a:spcBef>
-              <a:spcAft>
-                <a:spcPts val="0"/>
-              </a:spcAft>
-              <a:buNone/>
-            </a:pPr>
-            <a:r>
-              <a:rPr sz="3600" b="1" i="0">
+                <a:spcPts val="4480"/>
+              </a:lnSpc>
+              <a:spcBef>
+                <a:spcPts val="0"/>
+              </a:spcBef>
+              <a:spcAft>
+                <a:spcPts val="0"/>
+              </a:spcAft>
+              <a:buNone/>
+            </a:pPr>
+            <a:r>
+              <a:rPr sz="4000" b="1" i="0">
                 <a:solidFill>
                   <a:srgbClr val="FFFFFF"/>
                 </a:solidFill>
@@ -9703,18 +9545,18 @@
           <a:p>
             <a:pPr algn="l">
               <a:lnSpc>
-                <a:spcPts val="2280"/>
-              </a:lnSpc>
-              <a:spcBef>
-                <a:spcPts val="0"/>
-              </a:spcBef>
-              <a:spcAft>
-                <a:spcPts val="0"/>
-              </a:spcAft>
-              <a:buNone/>
-            </a:pPr>
-            <a:r>
-              <a:rPr sz="1900" b="1" i="0">
+                <a:spcPts val="2520"/>
+              </a:lnSpc>
+              <a:spcBef>
+                <a:spcPts val="0"/>
+              </a:spcBef>
+              <a:spcAft>
+                <a:spcPts val="0"/>
+              </a:spcAft>
+              <a:buNone/>
+            </a:pPr>
+            <a:r>
+              <a:rPr sz="2100" b="1" i="0">
                 <a:solidFill>
                   <a:srgbClr val="FFFFFF"/>
                 </a:solidFill>
@@ -9733,8 +9575,8 @@
         </p:nvSpPr>
         <p:spPr>
           <a:xfrm>
-            <a:off x="8229600" y="2240280"/>
-            <a:ext cx="3322015" cy="731520"/>
+            <a:off x="8229600" y="2286000"/>
+            <a:ext cx="3322015" cy="640080"/>
           </a:xfrm>
           <a:prstGeom prst="rect">
             <a:avLst/>
@@ -9749,24 +9591,24 @@
           <a:p>
             <a:pPr algn="l">
               <a:lnSpc>
-                <a:spcPts val="1875"/>
-              </a:lnSpc>
-              <a:spcBef>
-                <a:spcPts val="0"/>
-              </a:spcBef>
-              <a:spcAft>
-                <a:spcPts val="0"/>
-              </a:spcAft>
-              <a:buNone/>
-            </a:pPr>
-            <a:r>
-              <a:rPr sz="1500" b="0" i="0">
+                <a:spcPts val="2125"/>
+              </a:lnSpc>
+              <a:spcBef>
+                <a:spcPts val="0"/>
+              </a:spcBef>
+              <a:spcAft>
+                <a:spcPts val="0"/>
+              </a:spcAft>
+              <a:buNone/>
+            </a:pPr>
+            <a:r>
+              <a:rPr sz="1700" b="0" i="0">
                 <a:solidFill>
                   <a:srgbClr val="C7D7F2"/>
                 </a:solidFill>
                 <a:latin typeface="Arial"/>
               </a:rPr>
-              <a:t>Coffee Circles open live Jitsi rooms — no account.</a:t>
+              <a:t>no account needed</a:t>
             </a:r>
           </a:p>
         </p:txBody>
@@ -9795,18 +9637,18 @@
           <a:p>
             <a:pPr algn="l">
               <a:lnSpc>
-                <a:spcPts val="2280"/>
-              </a:lnSpc>
-              <a:spcBef>
-                <a:spcPts val="0"/>
-              </a:spcBef>
-              <a:spcAft>
-                <a:spcPts val="0"/>
-              </a:spcAft>
-              <a:buNone/>
-            </a:pPr>
-            <a:r>
-              <a:rPr sz="1900" b="1" i="0">
+                <a:spcPts val="2520"/>
+              </a:lnSpc>
+              <a:spcBef>
+                <a:spcPts val="0"/>
+              </a:spcBef>
+              <a:spcAft>
+                <a:spcPts val="0"/>
+              </a:spcAft>
+              <a:buNone/>
+            </a:pPr>
+            <a:r>
+              <a:rPr sz="2100" b="1" i="0">
                 <a:solidFill>
                   <a:srgbClr val="FFFFFF"/>
                 </a:solidFill>
@@ -9825,8 +9667,8 @@
         </p:nvSpPr>
         <p:spPr>
           <a:xfrm>
-            <a:off x="8229600" y="3703320"/>
-            <a:ext cx="3322015" cy="731520"/>
+            <a:off x="8229600" y="3749039"/>
+            <a:ext cx="3322015" cy="640080"/>
           </a:xfrm>
           <a:prstGeom prst="rect">
             <a:avLst/>
@@ -9841,24 +9683,24 @@
           <a:p>
             <a:pPr algn="l">
               <a:lnSpc>
-                <a:spcPts val="1875"/>
-              </a:lnSpc>
-              <a:spcBef>
-                <a:spcPts val="0"/>
-              </a:spcBef>
-              <a:spcAft>
-                <a:spcPts val="0"/>
-              </a:spcAft>
-              <a:buNone/>
-            </a:pPr>
-            <a:r>
-              <a:rPr sz="1500" b="0" i="0">
+                <a:spcPts val="2125"/>
+              </a:lnSpc>
+              <a:spcBef>
+                <a:spcPts val="0"/>
+              </a:spcBef>
+              <a:spcAft>
+                <a:spcPts val="0"/>
+              </a:spcAft>
+              <a:buNone/>
+            </a:pPr>
+            <a:r>
+              <a:rPr sz="1700" b="0" i="0">
                 <a:solidFill>
                   <a:srgbClr val="C7D7F2"/>
                 </a:solidFill>
                 <a:latin typeface="Arial"/>
               </a:rPr>
-              <a:t>Bluetooth heart-rate, labeled LIVE or SIMULATED.</a:t>
+              <a:t>every card says LIVE or SIMULATED</a:t>
             </a:r>
           </a:p>
         </p:txBody>
@@ -9887,18 +9729,18 @@
           <a:p>
             <a:pPr algn="l">
               <a:lnSpc>
-                <a:spcPts val="2280"/>
-              </a:lnSpc>
-              <a:spcBef>
-                <a:spcPts val="0"/>
-              </a:spcBef>
-              <a:spcAft>
-                <a:spcPts val="0"/>
-              </a:spcAft>
-              <a:buNone/>
-            </a:pPr>
-            <a:r>
-              <a:rPr sz="1900" b="1" i="0">
+                <a:spcPts val="2520"/>
+              </a:lnSpc>
+              <a:spcBef>
+                <a:spcPts val="0"/>
+              </a:spcBef>
+              <a:spcAft>
+                <a:spcPts val="0"/>
+              </a:spcAft>
+              <a:buNone/>
+            </a:pPr>
+            <a:r>
+              <a:rPr sz="2100" b="1" i="0">
                 <a:solidFill>
                   <a:srgbClr val="FFFFFF"/>
                 </a:solidFill>
@@ -9917,8 +9759,8 @@
         </p:nvSpPr>
         <p:spPr>
           <a:xfrm>
-            <a:off x="8229600" y="5166360"/>
-            <a:ext cx="3322015" cy="731520"/>
+            <a:off x="8229600" y="5212080"/>
+            <a:ext cx="3322015" cy="640080"/>
           </a:xfrm>
           <a:prstGeom prst="rect">
             <a:avLst/>
@@ -9933,24 +9775,24 @@
           <a:p>
             <a:pPr algn="l">
               <a:lnSpc>
-                <a:spcPts val="1875"/>
-              </a:lnSpc>
-              <a:spcBef>
-                <a:spcPts val="0"/>
-              </a:spcBef>
-              <a:spcAft>
-                <a:spcPts val="0"/>
-              </a:spcAft>
-              <a:buNone/>
-            </a:pPr>
-            <a:r>
-              <a:rPr sz="1500" b="0" i="0">
+                <a:spcPts val="2125"/>
+              </a:lnSpc>
+              <a:spcBef>
+                <a:spcPts val="0"/>
+              </a:spcBef>
+              <a:spcAft>
+                <a:spcPts val="0"/>
+              </a:spcAft>
+              <a:buNone/>
+            </a:pPr>
+            <a:r>
+              <a:rPr sz="1700" b="0" i="0">
                 <a:solidFill>
                   <a:srgbClr val="C7D7F2"/>
                 </a:solidFill>
                 <a:latin typeface="Arial"/>
               </a:rPr>
-              <a:t>Pick the fields, see the text, download it.</a:t>
+              <a:t>pick · preview · download</a:t>
             </a:r>
           </a:p>
         </p:txBody>
@@ -10187,18 +10029,18 @@
           <a:p>
             <a:pPr algn="l">
               <a:lnSpc>
-                <a:spcPts val="4032"/>
-              </a:lnSpc>
-              <a:spcBef>
-                <a:spcPts val="0"/>
-              </a:spcBef>
-              <a:spcAft>
-                <a:spcPts val="0"/>
-              </a:spcAft>
-              <a:buNone/>
-            </a:pPr>
-            <a:r>
-              <a:rPr sz="3600" b="1" i="0">
+                <a:spcPts val="4480"/>
+              </a:lnSpc>
+              <a:spcBef>
+                <a:spcPts val="0"/>
+              </a:spcBef>
+              <a:spcAft>
+                <a:spcPts val="0"/>
+              </a:spcAft>
+              <a:buNone/>
+            </a:pPr>
+            <a:r>
+              <a:rPr sz="4000" b="1" i="0">
                 <a:solidFill>
                   <a:srgbClr val="FFFFFF"/>
                 </a:solidFill>
@@ -10217,12 +10059,12 @@
         </p:nvSpPr>
         <p:spPr>
           <a:xfrm>
-            <a:off x="640080" y="1920240"/>
-            <a:ext cx="5272887" cy="1874519"/>
+            <a:off x="640080" y="1965960"/>
+            <a:ext cx="5272887" cy="1783080"/>
           </a:xfrm>
           <a:prstGeom prst="roundRect">
             <a:avLst>
-              <a:gd name="adj" fmla="val 9756"/>
+              <a:gd name="adj" fmla="val 10256"/>
             </a:avLst>
           </a:prstGeom>
           <a:solidFill>
@@ -10261,8 +10103,8 @@
         </p:nvSpPr>
         <p:spPr>
           <a:xfrm>
-            <a:off x="640080" y="2240280"/>
-            <a:ext cx="73152" cy="1234439"/>
+            <a:off x="640080" y="2286000"/>
+            <a:ext cx="73152" cy="1143000"/>
           </a:xfrm>
           <a:prstGeom prst="roundRect">
             <a:avLst>
@@ -10305,8 +10147,8 @@
         </p:nvSpPr>
         <p:spPr>
           <a:xfrm>
-            <a:off x="1051560" y="2240280"/>
-            <a:ext cx="4632807" cy="457200"/>
+            <a:off x="1097280" y="2331720"/>
+            <a:ext cx="4541367" cy="502920"/>
           </a:xfrm>
           <a:prstGeom prst="rect">
             <a:avLst/>
@@ -10321,18 +10163,18 @@
           <a:p>
             <a:pPr algn="l">
               <a:lnSpc>
-                <a:spcPts val="2640"/>
-              </a:lnSpc>
-              <a:spcBef>
-                <a:spcPts val="0"/>
-              </a:spcBef>
-              <a:spcAft>
-                <a:spcPts val="0"/>
-              </a:spcAft>
-              <a:buNone/>
-            </a:pPr>
-            <a:r>
-              <a:rPr sz="2200" b="1" i="0">
+                <a:spcPts val="3000"/>
+              </a:lnSpc>
+              <a:spcBef>
+                <a:spcPts val="0"/>
+              </a:spcBef>
+              <a:spcAft>
+                <a:spcPts val="0"/>
+              </a:spcAft>
+              <a:buNone/>
+            </a:pPr>
+            <a:r>
+              <a:rPr sz="2500" b="1" i="0">
                 <a:solidFill>
                   <a:srgbClr val="FFFFFF"/>
                 </a:solidFill>
@@ -10351,8 +10193,8 @@
         </p:nvSpPr>
         <p:spPr>
           <a:xfrm>
-            <a:off x="1051560" y="2788920"/>
-            <a:ext cx="4632807" cy="914400"/>
+            <a:off x="1097280" y="2926080"/>
+            <a:ext cx="4541367" cy="548640"/>
           </a:xfrm>
           <a:prstGeom prst="rect">
             <a:avLst/>
@@ -10367,24 +10209,24 @@
           <a:p>
             <a:pPr algn="l">
               <a:lnSpc>
-                <a:spcPts val="2015"/>
-              </a:lnSpc>
-              <a:spcBef>
-                <a:spcPts val="0"/>
-              </a:spcBef>
-              <a:spcAft>
-                <a:spcPts val="0"/>
-              </a:spcAft>
-              <a:buNone/>
-            </a:pPr>
-            <a:r>
-              <a:rPr sz="1550" b="0" i="0">
+                <a:spcPts val="2160"/>
+              </a:lnSpc>
+              <a:spcBef>
+                <a:spcPts val="0"/>
+              </a:spcBef>
+              <a:spcAft>
+                <a:spcPts val="0"/>
+              </a:spcAft>
+              <a:buNone/>
+            </a:pPr>
+            <a:r>
+              <a:rPr sz="1800" b="0" i="0">
                 <a:solidFill>
                   <a:srgbClr val="C7D7F2"/>
                 </a:solidFill>
                 <a:latin typeface="Arial"/>
               </a:rPr>
-              <a:t>Every reading is tagged LIVE or SIMULATED. Cancel a pairing and the card stays blank.</a:t>
+              <a:t>every reading says LIVE or SIMULATED</a:t>
             </a:r>
           </a:p>
         </p:txBody>
@@ -10397,12 +10239,12 @@
         </p:nvSpPr>
         <p:spPr>
           <a:xfrm>
-            <a:off x="6278727" y="1920240"/>
-            <a:ext cx="5272887" cy="1874519"/>
+            <a:off x="6278727" y="1965960"/>
+            <a:ext cx="5272887" cy="1783080"/>
           </a:xfrm>
           <a:prstGeom prst="roundRect">
             <a:avLst>
-              <a:gd name="adj" fmla="val 9756"/>
+              <a:gd name="adj" fmla="val 10256"/>
             </a:avLst>
           </a:prstGeom>
           <a:solidFill>
@@ -10441,8 +10283,8 @@
         </p:nvSpPr>
         <p:spPr>
           <a:xfrm>
-            <a:off x="6278727" y="2240280"/>
-            <a:ext cx="73152" cy="1234439"/>
+            <a:off x="6278727" y="2286000"/>
+            <a:ext cx="73152" cy="1143000"/>
           </a:xfrm>
           <a:prstGeom prst="roundRect">
             <a:avLst>
@@ -10485,8 +10327,8 @@
         </p:nvSpPr>
         <p:spPr>
           <a:xfrm>
-            <a:off x="6690207" y="2240280"/>
-            <a:ext cx="4632807" cy="457200"/>
+            <a:off x="6735927" y="2331720"/>
+            <a:ext cx="4541367" cy="502920"/>
           </a:xfrm>
           <a:prstGeom prst="rect">
             <a:avLst/>
@@ -10501,18 +10343,18 @@
           <a:p>
             <a:pPr algn="l">
               <a:lnSpc>
-                <a:spcPts val="2640"/>
-              </a:lnSpc>
-              <a:spcBef>
-                <a:spcPts val="0"/>
-              </a:spcBef>
-              <a:spcAft>
-                <a:spcPts val="0"/>
-              </a:spcAft>
-              <a:buNone/>
-            </a:pPr>
-            <a:r>
-              <a:rPr sz="2200" b="1" i="0">
+                <a:spcPts val="3000"/>
+              </a:lnSpc>
+              <a:spcBef>
+                <a:spcPts val="0"/>
+              </a:spcBef>
+              <a:spcAft>
+                <a:spcPts val="0"/>
+              </a:spcAft>
+              <a:buNone/>
+            </a:pPr>
+            <a:r>
+              <a:rPr sz="2500" b="1" i="0">
                 <a:solidFill>
                   <a:srgbClr val="FFFFFF"/>
                 </a:solidFill>
@@ -10531,8 +10373,8 @@
         </p:nvSpPr>
         <p:spPr>
           <a:xfrm>
-            <a:off x="6690207" y="2788920"/>
-            <a:ext cx="4632807" cy="914400"/>
+            <a:off x="6735927" y="2926080"/>
+            <a:ext cx="4541367" cy="548640"/>
           </a:xfrm>
           <a:prstGeom prst="rect">
             <a:avLst/>
@@ -10547,24 +10389,24 @@
           <a:p>
             <a:pPr algn="l">
               <a:lnSpc>
-                <a:spcPts val="2015"/>
-              </a:lnSpc>
-              <a:spcBef>
-                <a:spcPts val="0"/>
-              </a:spcBef>
-              <a:spcAft>
-                <a:spcPts val="0"/>
-              </a:spcAft>
-              <a:buNone/>
-            </a:pPr>
-            <a:r>
-              <a:rPr sz="1550" b="0" i="0">
+                <a:spcPts val="2160"/>
+              </a:lnSpc>
+              <a:spcBef>
+                <a:spcPts val="0"/>
+              </a:spcBef>
+              <a:spcAft>
+                <a:spcPts val="0"/>
+              </a:spcAft>
+              <a:buNone/>
+            </a:pPr>
+            <a:r>
+              <a:rPr sz="1800" b="0" i="0">
                 <a:solidFill>
                   <a:srgbClr val="C7D7F2"/>
                 </a:solidFill>
                 <a:latin typeface="Arial"/>
               </a:rPr>
-              <a:t>Briefs, texts and SOS messages always end with a human tap.</a:t>
+              <a:t>a person always taps Send</a:t>
             </a:r>
           </a:p>
         </p:txBody>
@@ -10577,12 +10419,12 @@
         </p:nvSpPr>
         <p:spPr>
           <a:xfrm>
-            <a:off x="640080" y="4114800"/>
-            <a:ext cx="5272887" cy="1874519"/>
+            <a:off x="640080" y="4069079"/>
+            <a:ext cx="5272887" cy="1783080"/>
           </a:xfrm>
           <a:prstGeom prst="roundRect">
             <a:avLst>
-              <a:gd name="adj" fmla="val 9756"/>
+              <a:gd name="adj" fmla="val 10256"/>
             </a:avLst>
           </a:prstGeom>
           <a:solidFill>
@@ -10621,8 +10463,8 @@
         </p:nvSpPr>
         <p:spPr>
           <a:xfrm>
-            <a:off x="640080" y="4434840"/>
-            <a:ext cx="73152" cy="1234439"/>
+            <a:off x="640080" y="4389119"/>
+            <a:ext cx="73152" cy="1143000"/>
           </a:xfrm>
           <a:prstGeom prst="roundRect">
             <a:avLst>
@@ -10665,8 +10507,8 @@
         </p:nvSpPr>
         <p:spPr>
           <a:xfrm>
-            <a:off x="1051560" y="4434840"/>
-            <a:ext cx="4632807" cy="457200"/>
+            <a:off x="1097280" y="4434840"/>
+            <a:ext cx="4541367" cy="502920"/>
           </a:xfrm>
           <a:prstGeom prst="rect">
             <a:avLst/>
@@ -10681,18 +10523,18 @@
           <a:p>
             <a:pPr algn="l">
               <a:lnSpc>
-                <a:spcPts val="2640"/>
-              </a:lnSpc>
-              <a:spcBef>
-                <a:spcPts val="0"/>
-              </a:spcBef>
-              <a:spcAft>
-                <a:spcPts val="0"/>
-              </a:spcAft>
-              <a:buNone/>
-            </a:pPr>
-            <a:r>
-              <a:rPr sz="2200" b="1" i="0">
+                <a:spcPts val="3000"/>
+              </a:lnSpc>
+              <a:spcBef>
+                <a:spcPts val="0"/>
+              </a:spcBef>
+              <a:spcAft>
+                <a:spcPts val="0"/>
+              </a:spcAft>
+              <a:buNone/>
+            </a:pPr>
+            <a:r>
+              <a:rPr sz="2500" b="1" i="0">
                 <a:solidFill>
                   <a:srgbClr val="FFFFFF"/>
                 </a:solidFill>
@@ -10711,8 +10553,8 @@
         </p:nvSpPr>
         <p:spPr>
           <a:xfrm>
-            <a:off x="1051560" y="4983480"/>
-            <a:ext cx="4632807" cy="914400"/>
+            <a:off x="1097280" y="5029199"/>
+            <a:ext cx="4541367" cy="548640"/>
           </a:xfrm>
           <a:prstGeom prst="rect">
             <a:avLst/>
@@ -10727,24 +10569,24 @@
           <a:p>
             <a:pPr algn="l">
               <a:lnSpc>
-                <a:spcPts val="2015"/>
-              </a:lnSpc>
-              <a:spcBef>
-                <a:spcPts val="0"/>
-              </a:spcBef>
-              <a:spcAft>
-                <a:spcPts val="0"/>
-              </a:spcAft>
-              <a:buNone/>
-            </a:pPr>
-            <a:r>
-              <a:rPr sz="1550" b="0" i="0">
+                <a:spcPts val="2160"/>
+              </a:lnSpc>
+              <a:spcBef>
+                <a:spcPts val="0"/>
+              </a:spcBef>
+              <a:spcAft>
+                <a:spcPts val="0"/>
+              </a:spcAft>
+              <a:buNone/>
+            </a:pPr>
+            <a:r>
+              <a:rPr sz="1800" b="0" i="0">
                 <a:solidFill>
                   <a:srgbClr val="C7D7F2"/>
                 </a:solidFill>
                 <a:latin typeface="Arial"/>
               </a:rPr>
-              <a:t>No timers, no scores, no auto-advance. Reduce-motion and high-contrast built in.</a:t>
+              <a:t>no timers, scores or auto-advance</a:t>
             </a:r>
           </a:p>
         </p:txBody>
@@ -10757,12 +10599,12 @@
         </p:nvSpPr>
         <p:spPr>
           <a:xfrm>
-            <a:off x="6278727" y="4114800"/>
-            <a:ext cx="5272887" cy="1874519"/>
+            <a:off x="6278727" y="4069079"/>
+            <a:ext cx="5272887" cy="1783080"/>
           </a:xfrm>
           <a:prstGeom prst="roundRect">
             <a:avLst>
-              <a:gd name="adj" fmla="val 9756"/>
+              <a:gd name="adj" fmla="val 10256"/>
             </a:avLst>
           </a:prstGeom>
           <a:solidFill>
@@ -10801,8 +10643,8 @@
         </p:nvSpPr>
         <p:spPr>
           <a:xfrm>
-            <a:off x="6278727" y="4434840"/>
-            <a:ext cx="73152" cy="1234439"/>
+            <a:off x="6278727" y="4389119"/>
+            <a:ext cx="73152" cy="1143000"/>
           </a:xfrm>
           <a:prstGeom prst="roundRect">
             <a:avLst>
@@ -10845,8 +10687,8 @@
         </p:nvSpPr>
         <p:spPr>
           <a:xfrm>
-            <a:off x="6690207" y="4434840"/>
-            <a:ext cx="4632807" cy="457200"/>
+            <a:off x="6735927" y="4434840"/>
+            <a:ext cx="4541367" cy="502920"/>
           </a:xfrm>
           <a:prstGeom prst="rect">
             <a:avLst/>
@@ -10861,18 +10703,18 @@
           <a:p>
             <a:pPr algn="l">
               <a:lnSpc>
-                <a:spcPts val="2640"/>
-              </a:lnSpc>
-              <a:spcBef>
-                <a:spcPts val="0"/>
-              </a:spcBef>
-              <a:spcAft>
-                <a:spcPts val="0"/>
-              </a:spcAft>
-              <a:buNone/>
-            </a:pPr>
-            <a:r>
-              <a:rPr sz="2200" b="1" i="0">
+                <a:spcPts val="3000"/>
+              </a:lnSpc>
+              <a:spcBef>
+                <a:spcPts val="0"/>
+              </a:spcBef>
+              <a:spcAft>
+                <a:spcPts val="0"/>
+              </a:spcAft>
+              <a:buNone/>
+            </a:pPr>
+            <a:r>
+              <a:rPr sz="2500" b="1" i="0">
                 <a:solidFill>
                   <a:srgbClr val="FFFFFF"/>
                 </a:solidFill>
@@ -10891,8 +10733,8 @@
         </p:nvSpPr>
         <p:spPr>
           <a:xfrm>
-            <a:off x="6690207" y="4983480"/>
-            <a:ext cx="4632807" cy="914400"/>
+            <a:off x="6735927" y="5029199"/>
+            <a:ext cx="4541367" cy="548640"/>
           </a:xfrm>
           <a:prstGeom prst="rect">
             <a:avLst/>
@@ -10907,24 +10749,24 @@
           <a:p>
             <a:pPr algn="l">
               <a:lnSpc>
-                <a:spcPts val="2015"/>
-              </a:lnSpc>
-              <a:spcBef>
-                <a:spcPts val="0"/>
-              </a:spcBef>
-              <a:spcAft>
-                <a:spcPts val="0"/>
-              </a:spcAft>
-              <a:buNone/>
-            </a:pPr>
-            <a:r>
-              <a:rPr sz="1550" b="0" i="0">
+                <a:spcPts val="2160"/>
+              </a:lnSpc>
+              <a:spcBef>
+                <a:spcPts val="0"/>
+              </a:spcBef>
+              <a:spcAft>
+                <a:spcPts val="0"/>
+              </a:spcAft>
+              <a:buNone/>
+            </a:pPr>
+            <a:r>
+              <a:rPr sz="1800" b="0" i="0">
                 <a:solidFill>
                   <a:srgbClr val="C7D7F2"/>
                 </a:solidFill>
                 <a:latin typeface="Arial"/>
               </a:rPr>
-              <a:t>No account, no server, encrypted on the device, AI that runs on the phone.</a:t>
+              <a:t>no account, no server, encrypted</a:t>
             </a:r>
           </a:p>
         </p:txBody>
@@ -11071,18 +10913,18 @@
           <a:p>
             <a:pPr algn="l">
               <a:lnSpc>
-                <a:spcPts val="4032"/>
-              </a:lnSpc>
-              <a:spcBef>
-                <a:spcPts val="0"/>
-              </a:spcBef>
-              <a:spcAft>
-                <a:spcPts val="0"/>
-              </a:spcAft>
-              <a:buNone/>
-            </a:pPr>
-            <a:r>
-              <a:rPr sz="3600" b="1" i="0">
+                <a:spcPts val="4480"/>
+              </a:lnSpc>
+              <a:spcBef>
+                <a:spcPts val="0"/>
+              </a:spcBef>
+              <a:spcAft>
+                <a:spcPts val="0"/>
+              </a:spcAft>
+              <a:buNone/>
+            </a:pPr>
+            <a:r>
+              <a:rPr sz="4000" b="1" i="0">
                 <a:solidFill>
                   <a:srgbClr val="FFFFFF"/>
                 </a:solidFill>
@@ -11101,7 +10943,7 @@
         </p:nvSpPr>
         <p:spPr>
           <a:xfrm>
-            <a:off x="640080" y="1920240"/>
+            <a:off x="640080" y="1965960"/>
             <a:ext cx="3393338" cy="4114800"/>
           </a:xfrm>
           <a:prstGeom prst="roundRect">
@@ -11145,7 +10987,7 @@
         </p:nvSpPr>
         <p:spPr>
           <a:xfrm>
-            <a:off x="960119" y="2194560"/>
+            <a:off x="960119" y="2240280"/>
             <a:ext cx="2753258" cy="457200"/>
           </a:xfrm>
           <a:prstGeom prst="rect">
@@ -11161,18 +11003,18 @@
           <a:p>
             <a:pPr algn="l">
               <a:lnSpc>
-                <a:spcPts val="2520"/>
-              </a:lnSpc>
-              <a:spcBef>
-                <a:spcPts val="0"/>
-              </a:spcBef>
-              <a:spcAft>
-                <a:spcPts val="0"/>
-              </a:spcAft>
-              <a:buNone/>
-            </a:pPr>
-            <a:r>
-              <a:rPr sz="2100" b="1" i="0">
+                <a:spcPts val="2640"/>
+              </a:lnSpc>
+              <a:spcBef>
+                <a:spcPts val="0"/>
+              </a:spcBef>
+              <a:spcAft>
+                <a:spcPts val="0"/>
+              </a:spcAft>
+              <a:buNone/>
+            </a:pPr>
+            <a:r>
+              <a:rPr sz="2200" b="1" i="0">
                 <a:solidFill>
                   <a:srgbClr val="FFFFFF"/>
                 </a:solidFill>
@@ -11191,8 +11033,8 @@
         </p:nvSpPr>
         <p:spPr>
           <a:xfrm>
-            <a:off x="960119" y="2697480"/>
-            <a:ext cx="2753258" cy="1005840"/>
+            <a:off x="960119" y="2743200"/>
+            <a:ext cx="2753258" cy="731520"/>
           </a:xfrm>
           <a:prstGeom prst="rect">
             <a:avLst/>
@@ -11207,24 +11049,24 @@
           <a:p>
             <a:pPr algn="l">
               <a:lnSpc>
-                <a:spcPts val="2015"/>
-              </a:lnSpc>
-              <a:spcBef>
-                <a:spcPts val="0"/>
-              </a:spcBef>
-              <a:spcAft>
-                <a:spcPts val="0"/>
-              </a:spcAft>
-              <a:buNone/>
-            </a:pPr>
-            <a:r>
-              <a:rPr sz="1550" b="0" i="0">
+                <a:spcPts val="2125"/>
+              </a:lnSpc>
+              <a:spcBef>
+                <a:spcPts val="0"/>
+              </a:spcBef>
+              <a:spcAft>
+                <a:spcPts val="0"/>
+              </a:spcAft>
+              <a:buNone/>
+            </a:pPr>
+            <a:r>
+              <a:rPr sz="1700" b="0" i="0">
                 <a:solidFill>
                   <a:srgbClr val="C7D7F2"/>
                 </a:solidFill>
                 <a:latin typeface="Arial"/>
               </a:rPr>
-              <a:t>Routines, reminders and real company — in large type.</a:t>
+              <a:t>routines, reminders, real company</a:t>
             </a:r>
           </a:p>
         </p:txBody>
@@ -11245,7 +11087,7 @@
         </p:blipFill>
         <p:spPr>
           <a:xfrm>
-            <a:off x="960119" y="3737075"/>
+            <a:off x="960119" y="3782795"/>
             <a:ext cx="2753258" cy="2023644"/>
           </a:xfrm>
           <a:prstGeom prst="roundRect">
@@ -11263,7 +11105,7 @@
         </p:nvSpPr>
         <p:spPr>
           <a:xfrm>
-            <a:off x="4399178" y="1920240"/>
+            <a:off x="4399178" y="1965960"/>
             <a:ext cx="3393338" cy="4114800"/>
           </a:xfrm>
           <a:prstGeom prst="roundRect">
@@ -11307,7 +11149,7 @@
         </p:nvSpPr>
         <p:spPr>
           <a:xfrm>
-            <a:off x="4719218" y="2194560"/>
+            <a:off x="4719218" y="2240280"/>
             <a:ext cx="2753258" cy="457200"/>
           </a:xfrm>
           <a:prstGeom prst="rect">
@@ -11353,8 +11195,8 @@
         </p:nvSpPr>
         <p:spPr>
           <a:xfrm>
-            <a:off x="4719218" y="2697480"/>
-            <a:ext cx="2753258" cy="1005840"/>
+            <a:off x="4719218" y="2743200"/>
+            <a:ext cx="2753258" cy="731520"/>
           </a:xfrm>
           <a:prstGeom prst="rect">
             <a:avLst/>
@@ -11369,24 +11211,24 @@
           <a:p>
             <a:pPr algn="l">
               <a:lnSpc>
-                <a:spcPts val="2015"/>
-              </a:lnSpc>
-              <a:spcBef>
-                <a:spcPts val="0"/>
-              </a:spcBef>
-              <a:spcAft>
-                <a:spcPts val="0"/>
-              </a:spcAft>
-              <a:buNone/>
-            </a:pPr>
-            <a:r>
-              <a:rPr sz="1550" b="0" i="0">
+                <a:spcPts val="2125"/>
+              </a:lnSpc>
+              <a:spcBef>
+                <a:spcPts val="0"/>
+              </a:spcBef>
+              <a:spcAft>
+                <a:spcPts val="0"/>
+              </a:spcAft>
+              <a:buNone/>
+            </a:pPr>
+            <a:r>
+              <a:rPr sz="1700" b="0" i="0">
                 <a:solidFill>
                   <a:srgbClr val="C7D7F2"/>
                 </a:solidFill>
                 <a:latin typeface="Arial"/>
               </a:rPr>
-              <a:t>Predictable screens, untimed activities, soundscapes, breathing.</a:t>
+              <a:t>predictable, untimed, sensory-calm</a:t>
             </a:r>
           </a:p>
         </p:txBody>
@@ -11407,7 +11249,7 @@
         </p:blipFill>
         <p:spPr>
           <a:xfrm>
-            <a:off x="4719218" y="3847205"/>
+            <a:off x="4719218" y="3892925"/>
             <a:ext cx="2753258" cy="1913514"/>
           </a:xfrm>
           <a:prstGeom prst="roundRect">
@@ -11425,7 +11267,7 @@
         </p:nvSpPr>
         <p:spPr>
           <a:xfrm>
-            <a:off x="8158276" y="1920240"/>
+            <a:off x="8158276" y="1965960"/>
             <a:ext cx="3393338" cy="4114800"/>
           </a:xfrm>
           <a:prstGeom prst="roundRect">
@@ -11469,7 +11311,7 @@
         </p:nvSpPr>
         <p:spPr>
           <a:xfrm>
-            <a:off x="8478316" y="2194560"/>
+            <a:off x="8478316" y="2240280"/>
             <a:ext cx="2753258" cy="457200"/>
           </a:xfrm>
           <a:prstGeom prst="rect">
@@ -11485,18 +11327,18 @@
           <a:p>
             <a:pPr algn="l">
               <a:lnSpc>
-                <a:spcPts val="2520"/>
-              </a:lnSpc>
-              <a:spcBef>
-                <a:spcPts val="0"/>
-              </a:spcBef>
-              <a:spcAft>
-                <a:spcPts val="0"/>
-              </a:spcAft>
-              <a:buNone/>
-            </a:pPr>
-            <a:r>
-              <a:rPr sz="2100" b="1" i="0">
+                <a:spcPts val="2640"/>
+              </a:lnSpc>
+              <a:spcBef>
+                <a:spcPts val="0"/>
+              </a:spcBef>
+              <a:spcAft>
+                <a:spcPts val="0"/>
+              </a:spcAft>
+              <a:buNone/>
+            </a:pPr>
+            <a:r>
+              <a:rPr sz="2200" b="1" i="0">
                 <a:solidFill>
                   <a:srgbClr val="FFFFFF"/>
                 </a:solidFill>
@@ -11515,8 +11357,8 @@
         </p:nvSpPr>
         <p:spPr>
           <a:xfrm>
-            <a:off x="8478316" y="2697480"/>
-            <a:ext cx="2753258" cy="1005840"/>
+            <a:off x="8478316" y="2743200"/>
+            <a:ext cx="2753258" cy="731520"/>
           </a:xfrm>
           <a:prstGeom prst="rect">
             <a:avLst/>
@@ -11531,24 +11373,24 @@
           <a:p>
             <a:pPr algn="l">
               <a:lnSpc>
-                <a:spcPts val="2015"/>
-              </a:lnSpc>
-              <a:spcBef>
-                <a:spcPts val="0"/>
-              </a:spcBef>
-              <a:spcAft>
-                <a:spcPts val="0"/>
-              </a:spcAft>
-              <a:buNone/>
-            </a:pPr>
-            <a:r>
-              <a:rPr sz="1550" b="0" i="0">
+                <a:spcPts val="2125"/>
+              </a:lnSpc>
+              <a:spcBef>
+                <a:spcPts val="0"/>
+              </a:spcBef>
+              <a:spcAft>
+                <a:spcPts val="0"/>
+              </a:spcAft>
+              <a:buNone/>
+            </a:pPr>
+            <a:r>
+              <a:rPr sz="1700" b="0" i="0">
                 <a:solidFill>
                   <a:srgbClr val="C7D7F2"/>
                 </a:solidFill>
                 <a:latin typeface="Arial"/>
               </a:rPr>
-              <a:t>Care notes, a visit brief they can trust, honest vitals.</a:t>
+              <a:t>notes and a brief they can trust</a:t>
             </a:r>
           </a:p>
         </p:txBody>
@@ -11569,7 +11411,7 @@
         </p:blipFill>
         <p:spPr>
           <a:xfrm>
-            <a:off x="8536493" y="3611880"/>
+            <a:off x="8536493" y="3657600"/>
             <a:ext cx="2636904" cy="2148840"/>
           </a:xfrm>
           <a:prstGeom prst="roundRect">
@@ -11721,18 +11563,18 @@
           <a:p>
             <a:pPr algn="l">
               <a:lnSpc>
-                <a:spcPts val="4032"/>
-              </a:lnSpc>
-              <a:spcBef>
-                <a:spcPts val="0"/>
-              </a:spcBef>
-              <a:spcAft>
-                <a:spcPts val="0"/>
-              </a:spcAft>
-              <a:buNone/>
-            </a:pPr>
-            <a:r>
-              <a:rPr sz="3600" b="1" i="0">
+                <a:spcPts val="4480"/>
+              </a:lnSpc>
+              <a:spcBef>
+                <a:spcPts val="0"/>
+              </a:spcBef>
+              <a:spcAft>
+                <a:spcPts val="0"/>
+              </a:spcAft>
+              <a:buNone/>
+            </a:pPr>
+            <a:r>
+              <a:rPr sz="4000" b="1" i="0">
                 <a:solidFill>
                   <a:srgbClr val="FFFFFF"/>
                 </a:solidFill>
@@ -11745,26 +11587,299 @@
       </p:sp>
       <p:sp>
         <p:nvSpPr>
-          <p:cNvPr id="4" name="Rounded Rectangle 3"/>
+          <p:cNvPr id="4" name="TextBox 3"/>
+          <p:cNvSpPr txBox="1"/>
+          <p:nvPr/>
+        </p:nvSpPr>
+        <p:spPr>
+          <a:xfrm>
+            <a:off x="640080" y="1920240"/>
+            <a:ext cx="2103120" cy="1371600"/>
+          </a:xfrm>
+          <a:prstGeom prst="rect">
+            <a:avLst/>
+          </a:prstGeom>
+          <a:noFill/>
+        </p:spPr>
+        <p:txBody>
+          <a:bodyPr wrap="square" lIns="0" rIns="0" tIns="0" bIns="0" anchor="ctr">
+            <a:noAutofit/>
+          </a:bodyPr>
+          <a:lstStyle/>
+          <a:p>
+            <a:pPr algn="l">
+              <a:lnSpc>
+                <a:spcPts val="10080"/>
+              </a:lnSpc>
+              <a:spcBef>
+                <a:spcPts val="0"/>
+              </a:spcBef>
+              <a:spcAft>
+                <a:spcPts val="0"/>
+              </a:spcAft>
+              <a:buNone/>
+            </a:pPr>
+            <a:r>
+              <a:rPr sz="8400" b="1" i="0">
+                <a:solidFill>
+                  <a:srgbClr val="4ADE80"/>
+                </a:solidFill>
+                <a:latin typeface="Arial"/>
+              </a:rPr>
+              <a:t>0</a:t>
+            </a:r>
+          </a:p>
+        </p:txBody>
+      </p:sp>
+      <p:sp>
+        <p:nvSpPr>
+          <p:cNvPr id="5" name="TextBox 4"/>
+          <p:cNvSpPr txBox="1"/>
+          <p:nvPr/>
+        </p:nvSpPr>
+        <p:spPr>
+          <a:xfrm>
+            <a:off x="640080" y="3291840"/>
+            <a:ext cx="2103120" cy="457200"/>
+          </a:xfrm>
+          <a:prstGeom prst="rect">
+            <a:avLst/>
+          </a:prstGeom>
+          <a:noFill/>
+        </p:spPr>
+        <p:txBody>
+          <a:bodyPr wrap="square" lIns="0" rIns="0" tIns="0" bIns="0" anchor="t">
+            <a:noAutofit/>
+          </a:bodyPr>
+          <a:lstStyle/>
+          <a:p>
+            <a:pPr algn="l">
+              <a:lnSpc>
+                <a:spcPts val="2640"/>
+              </a:lnSpc>
+              <a:spcBef>
+                <a:spcPts val="0"/>
+              </a:spcBef>
+              <a:spcAft>
+                <a:spcPts val="0"/>
+              </a:spcAft>
+              <a:buNone/>
+            </a:pPr>
+            <a:r>
+              <a:rPr sz="2200" b="0" i="0">
+                <a:solidFill>
+                  <a:srgbClr val="EAF0FB"/>
+                </a:solidFill>
+                <a:latin typeface="Arial"/>
+              </a:rPr>
+              <a:t>accounts</a:t>
+            </a:r>
+          </a:p>
+        </p:txBody>
+      </p:sp>
+      <p:sp>
+        <p:nvSpPr>
+          <p:cNvPr id="6" name="TextBox 5"/>
+          <p:cNvSpPr txBox="1"/>
+          <p:nvPr/>
+        </p:nvSpPr>
+        <p:spPr>
+          <a:xfrm>
+            <a:off x="2926080" y="1920240"/>
+            <a:ext cx="2103120" cy="1371600"/>
+          </a:xfrm>
+          <a:prstGeom prst="rect">
+            <a:avLst/>
+          </a:prstGeom>
+          <a:noFill/>
+        </p:spPr>
+        <p:txBody>
+          <a:bodyPr wrap="square" lIns="0" rIns="0" tIns="0" bIns="0" anchor="ctr">
+            <a:noAutofit/>
+          </a:bodyPr>
+          <a:lstStyle/>
+          <a:p>
+            <a:pPr algn="l">
+              <a:lnSpc>
+                <a:spcPts val="10080"/>
+              </a:lnSpc>
+              <a:spcBef>
+                <a:spcPts val="0"/>
+              </a:spcBef>
+              <a:spcAft>
+                <a:spcPts val="0"/>
+              </a:spcAft>
+              <a:buNone/>
+            </a:pPr>
+            <a:r>
+              <a:rPr sz="8400" b="1" i="0">
+                <a:solidFill>
+                  <a:srgbClr val="4ADE80"/>
+                </a:solidFill>
+                <a:latin typeface="Arial"/>
+              </a:rPr>
+              <a:t>0</a:t>
+            </a:r>
+          </a:p>
+        </p:txBody>
+      </p:sp>
+      <p:sp>
+        <p:nvSpPr>
+          <p:cNvPr id="7" name="TextBox 6"/>
+          <p:cNvSpPr txBox="1"/>
+          <p:nvPr/>
+        </p:nvSpPr>
+        <p:spPr>
+          <a:xfrm>
+            <a:off x="2926080" y="3291840"/>
+            <a:ext cx="2103120" cy="457200"/>
+          </a:xfrm>
+          <a:prstGeom prst="rect">
+            <a:avLst/>
+          </a:prstGeom>
+          <a:noFill/>
+        </p:spPr>
+        <p:txBody>
+          <a:bodyPr wrap="square" lIns="0" rIns="0" tIns="0" bIns="0" anchor="t">
+            <a:noAutofit/>
+          </a:bodyPr>
+          <a:lstStyle/>
+          <a:p>
+            <a:pPr algn="l">
+              <a:lnSpc>
+                <a:spcPts val="2640"/>
+              </a:lnSpc>
+              <a:spcBef>
+                <a:spcPts val="0"/>
+              </a:spcBef>
+              <a:spcAft>
+                <a:spcPts val="0"/>
+              </a:spcAft>
+              <a:buNone/>
+            </a:pPr>
+            <a:r>
+              <a:rPr sz="2200" b="0" i="0">
+                <a:solidFill>
+                  <a:srgbClr val="EAF0FB"/>
+                </a:solidFill>
+                <a:latin typeface="Arial"/>
+              </a:rPr>
+              <a:t>servers</a:t>
+            </a:r>
+          </a:p>
+        </p:txBody>
+      </p:sp>
+      <p:sp>
+        <p:nvSpPr>
+          <p:cNvPr id="8" name="TextBox 7"/>
+          <p:cNvSpPr txBox="1"/>
+          <p:nvPr/>
+        </p:nvSpPr>
+        <p:spPr>
+          <a:xfrm>
+            <a:off x="5212080" y="1920240"/>
+            <a:ext cx="2103120" cy="1371600"/>
+          </a:xfrm>
+          <a:prstGeom prst="rect">
+            <a:avLst/>
+          </a:prstGeom>
+          <a:noFill/>
+        </p:spPr>
+        <p:txBody>
+          <a:bodyPr wrap="square" lIns="0" rIns="0" tIns="0" bIns="0" anchor="ctr">
+            <a:noAutofit/>
+          </a:bodyPr>
+          <a:lstStyle/>
+          <a:p>
+            <a:pPr algn="l">
+              <a:lnSpc>
+                <a:spcPts val="10080"/>
+              </a:lnSpc>
+              <a:spcBef>
+                <a:spcPts val="0"/>
+              </a:spcBef>
+              <a:spcAft>
+                <a:spcPts val="0"/>
+              </a:spcAft>
+              <a:buNone/>
+            </a:pPr>
+            <a:r>
+              <a:rPr sz="8400" b="1" i="0">
+                <a:solidFill>
+                  <a:srgbClr val="4ADE80"/>
+                </a:solidFill>
+                <a:latin typeface="Arial"/>
+              </a:rPr>
+              <a:t>0</a:t>
+            </a:r>
+          </a:p>
+        </p:txBody>
+      </p:sp>
+      <p:sp>
+        <p:nvSpPr>
+          <p:cNvPr id="9" name="TextBox 8"/>
+          <p:cNvSpPr txBox="1"/>
+          <p:nvPr/>
+        </p:nvSpPr>
+        <p:spPr>
+          <a:xfrm>
+            <a:off x="5212080" y="3291840"/>
+            <a:ext cx="2103120" cy="457200"/>
+          </a:xfrm>
+          <a:prstGeom prst="rect">
+            <a:avLst/>
+          </a:prstGeom>
+          <a:noFill/>
+        </p:spPr>
+        <p:txBody>
+          <a:bodyPr wrap="square" lIns="0" rIns="0" tIns="0" bIns="0" anchor="t">
+            <a:noAutofit/>
+          </a:bodyPr>
+          <a:lstStyle/>
+          <a:p>
+            <a:pPr algn="l">
+              <a:lnSpc>
+                <a:spcPts val="2640"/>
+              </a:lnSpc>
+              <a:spcBef>
+                <a:spcPts val="0"/>
+              </a:spcBef>
+              <a:spcAft>
+                <a:spcPts val="0"/>
+              </a:spcAft>
+              <a:buNone/>
+            </a:pPr>
+            <a:r>
+              <a:rPr sz="2200" b="0" i="0">
+                <a:solidFill>
+                  <a:srgbClr val="EAF0FB"/>
+                </a:solidFill>
+                <a:latin typeface="Arial"/>
+              </a:rPr>
+              <a:t>trackers</a:t>
+            </a:r>
+          </a:p>
+        </p:txBody>
+      </p:sp>
+      <p:sp>
+        <p:nvSpPr>
+          <p:cNvPr id="10" name="Rectangle 9"/>
           <p:cNvSpPr/>
           <p:nvPr/>
         </p:nvSpPr>
         <p:spPr>
           <a:xfrm>
-            <a:off x="640080" y="1920240"/>
-            <a:ext cx="7223760" cy="3977639"/>
-          </a:xfrm>
-          <a:prstGeom prst="roundRect">
-            <a:avLst>
-              <a:gd name="adj" fmla="val 6896"/>
-            </a:avLst>
-          </a:prstGeom>
-          <a:noFill/>
-          <a:ln w="25400">
-            <a:solidFill>
-              <a:srgbClr val="4ADE80"/>
-            </a:solidFill>
-            <a:prstDash val="dash"/>
+            <a:off x="7498079" y="2103120"/>
+            <a:ext cx="36576" cy="2377440"/>
+          </a:xfrm>
+          <a:prstGeom prst="rect">
+            <a:avLst/>
+          </a:prstGeom>
+          <a:solidFill>
+            <a:srgbClr val="2E5CA6"/>
+          </a:solidFill>
+          <a:ln>
+            <a:noFill/>
           </a:ln>
           <a:effectLst/>
         </p:spPr>
@@ -11790,14 +11905,14 @@
       </p:sp>
       <p:sp>
         <p:nvSpPr>
-          <p:cNvPr id="5" name="TextBox 4"/>
+          <p:cNvPr id="11" name="TextBox 10"/>
           <p:cNvSpPr txBox="1"/>
           <p:nvPr/>
         </p:nvSpPr>
         <p:spPr>
           <a:xfrm>
-            <a:off x="960119" y="2148840"/>
-            <a:ext cx="6583680" cy="365760"/>
+            <a:off x="7955279" y="2057400"/>
+            <a:ext cx="3596335" cy="2560320"/>
           </a:xfrm>
           <a:prstGeom prst="rect">
             <a:avLst/>
@@ -11812,82 +11927,107 @@
           <a:p>
             <a:pPr algn="l">
               <a:lnSpc>
-                <a:spcPts val="1439"/>
-              </a:lnSpc>
-              <a:spcBef>
-                <a:spcPts val="0"/>
-              </a:spcBef>
-              <a:spcAft>
-                <a:spcPts val="0"/>
-              </a:spcAft>
-              <a:buNone/>
-            </a:pPr>
-            <a:r>
-              <a:rPr sz="1200" b="1" i="0">
-                <a:solidFill>
-                  <a:srgbClr val="4ADE80"/>
-                </a:solidFill>
-                <a:latin typeface="Arial"/>
-              </a:rPr>
-              <a:t>YOUR PHONE OR BROWSER</a:t>
-            </a:r>
-          </a:p>
-        </p:txBody>
-      </p:sp>
-      <p:sp>
-        <p:nvSpPr>
-          <p:cNvPr id="6" name="Rounded Rectangle 5"/>
-          <p:cNvSpPr/>
-          <p:nvPr/>
-        </p:nvSpPr>
-        <p:spPr>
-          <a:xfrm>
-            <a:off x="960119" y="2651760"/>
-            <a:ext cx="3154680" cy="1280160"/>
-          </a:xfrm>
-          <a:prstGeom prst="roundRect">
-            <a:avLst>
-              <a:gd name="adj" fmla="val 14285"/>
-            </a:avLst>
-          </a:prstGeom>
-          <a:solidFill>
-            <a:srgbClr val="15407F"/>
-          </a:solidFill>
-          <a:ln>
-            <a:noFill/>
-          </a:ln>
-          <a:effectLst/>
-        </p:spPr>
-        <p:style>
-          <a:lnRef idx="1">
-            <a:schemeClr val="accent1"/>
-          </a:lnRef>
-          <a:fillRef idx="3">
-            <a:schemeClr val="accent1"/>
-          </a:fillRef>
-          <a:effectRef idx="2">
-            <a:schemeClr val="accent1"/>
-          </a:effectRef>
-          <a:fontRef idx="minor">
-            <a:schemeClr val="lt1"/>
-          </a:fontRef>
-        </p:style>
-        <p:txBody>
-          <a:bodyPr rtlCol="0" anchor="ctr"/>
-          <a:lstStyle/>
-          <a:p/>
-        </p:txBody>
-      </p:sp>
-      <p:sp>
-        <p:nvSpPr>
-          <p:cNvPr id="7" name="TextBox 6"/>
+                <a:spcPts val="2500"/>
+              </a:lnSpc>
+              <a:spcBef>
+                <a:spcPts val="0"/>
+              </a:spcBef>
+              <a:spcAft>
+                <a:spcPts val="1200"/>
+              </a:spcAft>
+              <a:buNone/>
+            </a:pPr>
+            <a:r>
+              <a:rPr sz="2000" b="0" i="0">
+                <a:solidFill>
+                  <a:srgbClr val="C7D7F2"/>
+                </a:solidFill>
+                <a:latin typeface="Arial"/>
+              </a:rPr>
+              <a:t>AES-256 encrypted store</a:t>
+            </a:r>
+          </a:p>
+          <a:p>
+            <a:pPr algn="l">
+              <a:lnSpc>
+                <a:spcPts val="2500"/>
+              </a:lnSpc>
+              <a:spcBef>
+                <a:spcPts val="0"/>
+              </a:spcBef>
+              <a:spcAft>
+                <a:spcPts val="1200"/>
+              </a:spcAft>
+              <a:buNone/>
+            </a:pPr>
+            <a:r>
+              <a:rPr sz="2000" b="0" i="0">
+                <a:solidFill>
+                  <a:srgbClr val="C7D7F2"/>
+                </a:solidFill>
+                <a:latin typeface="Arial"/>
+              </a:rPr>
+              <a:t>AI runs on the phone</a:t>
+            </a:r>
+          </a:p>
+          <a:p>
+            <a:pPr algn="l">
+              <a:lnSpc>
+                <a:spcPts val="2500"/>
+              </a:lnSpc>
+              <a:spcBef>
+                <a:spcPts val="0"/>
+              </a:spcBef>
+              <a:spcAft>
+                <a:spcPts val="1200"/>
+              </a:spcAft>
+              <a:buNone/>
+            </a:pPr>
+            <a:r>
+              <a:rPr sz="2000" b="0" i="0">
+                <a:solidFill>
+                  <a:srgbClr val="C7D7F2"/>
+                </a:solidFill>
+                <a:latin typeface="Arial"/>
+              </a:rPr>
+              <a:t>Bluetooth &amp; HealthKit read locally</a:t>
+            </a:r>
+          </a:p>
+          <a:p>
+            <a:pPr algn="l">
+              <a:lnSpc>
+                <a:spcPts val="2500"/>
+              </a:lnSpc>
+              <a:spcBef>
+                <a:spcPts val="0"/>
+              </a:spcBef>
+              <a:spcAft>
+                <a:spcPts val="1200"/>
+              </a:spcAft>
+              <a:buNone/>
+            </a:pPr>
+            <a:r>
+              <a:rPr sz="2000" b="0" i="0">
+                <a:solidFill>
+                  <a:srgbClr val="C7D7F2"/>
+                </a:solidFill>
+                <a:latin typeface="Arial"/>
+              </a:rPr>
+              <a:t>Face ID lock · export · erase</a:t>
+            </a:r>
+          </a:p>
+        </p:txBody>
+      </p:sp>
+      <p:sp>
+        <p:nvSpPr>
+          <p:cNvPr id="12" name="TextBox 11"/>
           <p:cNvSpPr txBox="1"/>
           <p:nvPr/>
         </p:nvSpPr>
         <p:spPr>
           <a:xfrm>
-            <a:off x="1188719" y="2880360"/>
-            <a:ext cx="2697480" cy="365760"/>
+            <a:off x="640080" y="5120640"/>
+            <a:ext cx="10911535" cy="457200"/>
           </a:xfrm>
           <a:prstGeom prst="rect">
             <a:avLst/>
@@ -11902,788 +12042,31 @@
           <a:p>
             <a:pPr algn="l">
               <a:lnSpc>
-                <a:spcPts val="2039"/>
-              </a:lnSpc>
-              <a:spcBef>
-                <a:spcPts val="0"/>
-              </a:spcBef>
-              <a:spcAft>
-                <a:spcPts val="0"/>
-              </a:spcAft>
-              <a:buNone/>
-            </a:pPr>
-            <a:r>
-              <a:rPr sz="1700" b="1" i="0">
-                <a:solidFill>
-                  <a:srgbClr val="FFFFFF"/>
-                </a:solidFill>
-                <a:latin typeface="Arial"/>
-              </a:rPr>
-              <a:t>Encrypted store</a:t>
-            </a:r>
-          </a:p>
-        </p:txBody>
-      </p:sp>
-      <p:sp>
-        <p:nvSpPr>
-          <p:cNvPr id="8" name="TextBox 7"/>
-          <p:cNvSpPr txBox="1"/>
-          <p:nvPr/>
-        </p:nvSpPr>
-        <p:spPr>
-          <a:xfrm>
-            <a:off x="1188719" y="3273552"/>
-            <a:ext cx="2697480" cy="548640"/>
-          </a:xfrm>
-          <a:prstGeom prst="rect">
-            <a:avLst/>
-          </a:prstGeom>
-          <a:noFill/>
-        </p:spPr>
-        <p:txBody>
-          <a:bodyPr wrap="square" lIns="0" rIns="0" tIns="0" bIns="0" anchor="t">
-            <a:noAutofit/>
-          </a:bodyPr>
-          <a:lstStyle/>
-          <a:p>
-            <a:pPr algn="l">
-              <a:lnSpc>
-                <a:spcPts val="1687"/>
-              </a:lnSpc>
-              <a:spcBef>
-                <a:spcPts val="0"/>
-              </a:spcBef>
-              <a:spcAft>
-                <a:spcPts val="0"/>
-              </a:spcAft>
-              <a:buNone/>
-            </a:pPr>
-            <a:r>
-              <a:rPr sz="1350" b="0" i="0">
-                <a:solidFill>
-                  <a:srgbClr val="C7D7F2"/>
-                </a:solidFill>
-                <a:latin typeface="Arial"/>
-              </a:rPr>
-              <a:t>AES-256-GCM · key never leaves the device</a:t>
-            </a:r>
-          </a:p>
-        </p:txBody>
-      </p:sp>
-      <p:sp>
-        <p:nvSpPr>
-          <p:cNvPr id="9" name="Rounded Rectangle 8"/>
-          <p:cNvSpPr/>
-          <p:nvPr/>
-        </p:nvSpPr>
-        <p:spPr>
-          <a:xfrm>
-            <a:off x="4389120" y="2651760"/>
-            <a:ext cx="3154680" cy="1280160"/>
-          </a:xfrm>
-          <a:prstGeom prst="roundRect">
-            <a:avLst>
-              <a:gd name="adj" fmla="val 14285"/>
-            </a:avLst>
-          </a:prstGeom>
-          <a:solidFill>
-            <a:srgbClr val="15407F"/>
-          </a:solidFill>
-          <a:ln>
-            <a:noFill/>
-          </a:ln>
-          <a:effectLst/>
-        </p:spPr>
-        <p:style>
-          <a:lnRef idx="1">
-            <a:schemeClr val="accent1"/>
-          </a:lnRef>
-          <a:fillRef idx="3">
-            <a:schemeClr val="accent1"/>
-          </a:fillRef>
-          <a:effectRef idx="2">
-            <a:schemeClr val="accent1"/>
-          </a:effectRef>
-          <a:fontRef idx="minor">
-            <a:schemeClr val="lt1"/>
-          </a:fontRef>
-        </p:style>
-        <p:txBody>
-          <a:bodyPr rtlCol="0" anchor="ctr"/>
-          <a:lstStyle/>
-          <a:p/>
-        </p:txBody>
-      </p:sp>
-      <p:sp>
-        <p:nvSpPr>
-          <p:cNvPr id="10" name="TextBox 9"/>
-          <p:cNvSpPr txBox="1"/>
-          <p:nvPr/>
-        </p:nvSpPr>
-        <p:spPr>
-          <a:xfrm>
-            <a:off x="4617720" y="2880360"/>
-            <a:ext cx="2697480" cy="365760"/>
-          </a:xfrm>
-          <a:prstGeom prst="rect">
-            <a:avLst/>
-          </a:prstGeom>
-          <a:noFill/>
-        </p:spPr>
-        <p:txBody>
-          <a:bodyPr wrap="square" lIns="0" rIns="0" tIns="0" bIns="0" anchor="t">
-            <a:noAutofit/>
-          </a:bodyPr>
-          <a:lstStyle/>
-          <a:p>
-            <a:pPr algn="l">
-              <a:lnSpc>
-                <a:spcPts val="2039"/>
-              </a:lnSpc>
-              <a:spcBef>
-                <a:spcPts val="0"/>
-              </a:spcBef>
-              <a:spcAft>
-                <a:spcPts val="0"/>
-              </a:spcAft>
-              <a:buNone/>
-            </a:pPr>
-            <a:r>
-              <a:rPr sz="1700" b="1" i="0">
-                <a:solidFill>
-                  <a:srgbClr val="FFFFFF"/>
-                </a:solidFill>
-                <a:latin typeface="Arial"/>
-              </a:rPr>
-              <a:t>On-device AI guide</a:t>
-            </a:r>
-          </a:p>
-        </p:txBody>
-      </p:sp>
-      <p:sp>
-        <p:nvSpPr>
-          <p:cNvPr id="11" name="TextBox 10"/>
-          <p:cNvSpPr txBox="1"/>
-          <p:nvPr/>
-        </p:nvSpPr>
-        <p:spPr>
-          <a:xfrm>
-            <a:off x="4617720" y="3273552"/>
-            <a:ext cx="2697480" cy="548640"/>
-          </a:xfrm>
-          <a:prstGeom prst="rect">
-            <a:avLst/>
-          </a:prstGeom>
-          <a:noFill/>
-        </p:spPr>
-        <p:txBody>
-          <a:bodyPr wrap="square" lIns="0" rIns="0" tIns="0" bIns="0" anchor="t">
-            <a:noAutofit/>
-          </a:bodyPr>
-          <a:lstStyle/>
-          <a:p>
-            <a:pPr algn="l">
-              <a:lnSpc>
-                <a:spcPts val="1687"/>
-              </a:lnSpc>
-              <a:spcBef>
-                <a:spcPts val="0"/>
-              </a:spcBef>
-              <a:spcAft>
-                <a:spcPts val="0"/>
-              </a:spcAft>
-              <a:buNone/>
-            </a:pPr>
-            <a:r>
-              <a:rPr sz="1350" b="0" i="0">
-                <a:solidFill>
-                  <a:srgbClr val="C7D7F2"/>
-                </a:solidFill>
-                <a:latin typeface="Arial"/>
-              </a:rPr>
-              <a:t>Qwen 1.5B via llama.cpp · MedlinePlus offline</a:t>
-            </a:r>
-          </a:p>
-        </p:txBody>
-      </p:sp>
-      <p:sp>
-        <p:nvSpPr>
-          <p:cNvPr id="12" name="Rounded Rectangle 11"/>
-          <p:cNvSpPr/>
-          <p:nvPr/>
-        </p:nvSpPr>
-        <p:spPr>
-          <a:xfrm>
-            <a:off x="960119" y="4160520"/>
-            <a:ext cx="3154680" cy="1280160"/>
-          </a:xfrm>
-          <a:prstGeom prst="roundRect">
-            <a:avLst>
-              <a:gd name="adj" fmla="val 14285"/>
-            </a:avLst>
-          </a:prstGeom>
-          <a:solidFill>
-            <a:srgbClr val="15407F"/>
-          </a:solidFill>
-          <a:ln>
-            <a:noFill/>
-          </a:ln>
-          <a:effectLst/>
-        </p:spPr>
-        <p:style>
-          <a:lnRef idx="1">
-            <a:schemeClr val="accent1"/>
-          </a:lnRef>
-          <a:fillRef idx="3">
-            <a:schemeClr val="accent1"/>
-          </a:fillRef>
-          <a:effectRef idx="2">
-            <a:schemeClr val="accent1"/>
-          </a:effectRef>
-          <a:fontRef idx="minor">
-            <a:schemeClr val="lt1"/>
-          </a:fontRef>
-        </p:style>
-        <p:txBody>
-          <a:bodyPr rtlCol="0" anchor="ctr"/>
-          <a:lstStyle/>
-          <a:p/>
+                <a:spcPts val="2160"/>
+              </a:lnSpc>
+              <a:spcBef>
+                <a:spcPts val="0"/>
+              </a:spcBef>
+              <a:spcAft>
+                <a:spcPts val="0"/>
+              </a:spcAft>
+              <a:buNone/>
+            </a:pPr>
+            <a:r>
+              <a:rPr sz="1800" b="0" i="0">
+                <a:solidFill>
+                  <a:srgbClr val="A6BBE0"/>
+                </a:solidFill>
+                <a:latin typeface="Arial"/>
+              </a:rPr>
+              <a:t>Only live video calls and a message you tap to send ever leave the phone.</a:t>
+            </a:r>
+          </a:p>
         </p:txBody>
       </p:sp>
       <p:sp>
         <p:nvSpPr>
           <p:cNvPr id="13" name="TextBox 12"/>
-          <p:cNvSpPr txBox="1"/>
-          <p:nvPr/>
-        </p:nvSpPr>
-        <p:spPr>
-          <a:xfrm>
-            <a:off x="1188719" y="4389120"/>
-            <a:ext cx="2697480" cy="365760"/>
-          </a:xfrm>
-          <a:prstGeom prst="rect">
-            <a:avLst/>
-          </a:prstGeom>
-          <a:noFill/>
-        </p:spPr>
-        <p:txBody>
-          <a:bodyPr wrap="square" lIns="0" rIns="0" tIns="0" bIns="0" anchor="t">
-            <a:noAutofit/>
-          </a:bodyPr>
-          <a:lstStyle/>
-          <a:p>
-            <a:pPr algn="l">
-              <a:lnSpc>
-                <a:spcPts val="2039"/>
-              </a:lnSpc>
-              <a:spcBef>
-                <a:spcPts val="0"/>
-              </a:spcBef>
-              <a:spcAft>
-                <a:spcPts val="0"/>
-              </a:spcAft>
-              <a:buNone/>
-            </a:pPr>
-            <a:r>
-              <a:rPr sz="1700" b="1" i="0">
-                <a:solidFill>
-                  <a:srgbClr val="FFFFFF"/>
-                </a:solidFill>
-                <a:latin typeface="Arial"/>
-              </a:rPr>
-              <a:t>Real sensors</a:t>
-            </a:r>
-          </a:p>
-        </p:txBody>
-      </p:sp>
-      <p:sp>
-        <p:nvSpPr>
-          <p:cNvPr id="14" name="TextBox 13"/>
-          <p:cNvSpPr txBox="1"/>
-          <p:nvPr/>
-        </p:nvSpPr>
-        <p:spPr>
-          <a:xfrm>
-            <a:off x="1188719" y="4782312"/>
-            <a:ext cx="2697480" cy="548640"/>
-          </a:xfrm>
-          <a:prstGeom prst="rect">
-            <a:avLst/>
-          </a:prstGeom>
-          <a:noFill/>
-        </p:spPr>
-        <p:txBody>
-          <a:bodyPr wrap="square" lIns="0" rIns="0" tIns="0" bIns="0" anchor="t">
-            <a:noAutofit/>
-          </a:bodyPr>
-          <a:lstStyle/>
-          <a:p>
-            <a:pPr algn="l">
-              <a:lnSpc>
-                <a:spcPts val="1687"/>
-              </a:lnSpc>
-              <a:spcBef>
-                <a:spcPts val="0"/>
-              </a:spcBef>
-              <a:spcAft>
-                <a:spcPts val="0"/>
-              </a:spcAft>
-              <a:buNone/>
-            </a:pPr>
-            <a:r>
-              <a:rPr sz="1350" b="0" i="0">
-                <a:solidFill>
-                  <a:srgbClr val="C7D7F2"/>
-                </a:solidFill>
-                <a:latin typeface="Arial"/>
-              </a:rPr>
-              <a:t>Bluetooth heart-rate · HealthKit (read-only)</a:t>
-            </a:r>
-          </a:p>
-        </p:txBody>
-      </p:sp>
-      <p:sp>
-        <p:nvSpPr>
-          <p:cNvPr id="15" name="Rounded Rectangle 14"/>
-          <p:cNvSpPr/>
-          <p:nvPr/>
-        </p:nvSpPr>
-        <p:spPr>
-          <a:xfrm>
-            <a:off x="4389120" y="4160520"/>
-            <a:ext cx="3154680" cy="1280160"/>
-          </a:xfrm>
-          <a:prstGeom prst="roundRect">
-            <a:avLst>
-              <a:gd name="adj" fmla="val 14285"/>
-            </a:avLst>
-          </a:prstGeom>
-          <a:solidFill>
-            <a:srgbClr val="15407F"/>
-          </a:solidFill>
-          <a:ln>
-            <a:noFill/>
-          </a:ln>
-          <a:effectLst/>
-        </p:spPr>
-        <p:style>
-          <a:lnRef idx="1">
-            <a:schemeClr val="accent1"/>
-          </a:lnRef>
-          <a:fillRef idx="3">
-            <a:schemeClr val="accent1"/>
-          </a:fillRef>
-          <a:effectRef idx="2">
-            <a:schemeClr val="accent1"/>
-          </a:effectRef>
-          <a:fontRef idx="minor">
-            <a:schemeClr val="lt1"/>
-          </a:fontRef>
-        </p:style>
-        <p:txBody>
-          <a:bodyPr rtlCol="0" anchor="ctr"/>
-          <a:lstStyle/>
-          <a:p/>
-        </p:txBody>
-      </p:sp>
-      <p:sp>
-        <p:nvSpPr>
-          <p:cNvPr id="16" name="TextBox 15"/>
-          <p:cNvSpPr txBox="1"/>
-          <p:nvPr/>
-        </p:nvSpPr>
-        <p:spPr>
-          <a:xfrm>
-            <a:off x="4617720" y="4389120"/>
-            <a:ext cx="2697480" cy="365760"/>
-          </a:xfrm>
-          <a:prstGeom prst="rect">
-            <a:avLst/>
-          </a:prstGeom>
-          <a:noFill/>
-        </p:spPr>
-        <p:txBody>
-          <a:bodyPr wrap="square" lIns="0" rIns="0" tIns="0" bIns="0" anchor="t">
-            <a:noAutofit/>
-          </a:bodyPr>
-          <a:lstStyle/>
-          <a:p>
-            <a:pPr algn="l">
-              <a:lnSpc>
-                <a:spcPts val="2039"/>
-              </a:lnSpc>
-              <a:spcBef>
-                <a:spcPts val="0"/>
-              </a:spcBef>
-              <a:spcAft>
-                <a:spcPts val="0"/>
-              </a:spcAft>
-              <a:buNone/>
-            </a:pPr>
-            <a:r>
-              <a:rPr sz="1700" b="1" i="0">
-                <a:solidFill>
-                  <a:srgbClr val="FFFFFF"/>
-                </a:solidFill>
-                <a:latin typeface="Arial"/>
-              </a:rPr>
-              <a:t>Face ID lock</a:t>
-            </a:r>
-          </a:p>
-        </p:txBody>
-      </p:sp>
-      <p:sp>
-        <p:nvSpPr>
-          <p:cNvPr id="17" name="TextBox 16"/>
-          <p:cNvSpPr txBox="1"/>
-          <p:nvPr/>
-        </p:nvSpPr>
-        <p:spPr>
-          <a:xfrm>
-            <a:off x="4617720" y="4782312"/>
-            <a:ext cx="2697480" cy="548640"/>
-          </a:xfrm>
-          <a:prstGeom prst="rect">
-            <a:avLst/>
-          </a:prstGeom>
-          <a:noFill/>
-        </p:spPr>
-        <p:txBody>
-          <a:bodyPr wrap="square" lIns="0" rIns="0" tIns="0" bIns="0" anchor="t">
-            <a:noAutofit/>
-          </a:bodyPr>
-          <a:lstStyle/>
-          <a:p>
-            <a:pPr algn="l">
-              <a:lnSpc>
-                <a:spcPts val="1687"/>
-              </a:lnSpc>
-              <a:spcBef>
-                <a:spcPts val="0"/>
-              </a:spcBef>
-              <a:spcAft>
-                <a:spcPts val="0"/>
-              </a:spcAft>
-              <a:buNone/>
-            </a:pPr>
-            <a:r>
-              <a:rPr sz="1350" b="0" i="0">
-                <a:solidFill>
-                  <a:srgbClr val="C7D7F2"/>
-                </a:solidFill>
-                <a:latin typeface="Arial"/>
-              </a:rPr>
-              <a:t>Export or erase everything in one tap</a:t>
-            </a:r>
-          </a:p>
-        </p:txBody>
-      </p:sp>
-      <p:sp>
-        <p:nvSpPr>
-          <p:cNvPr id="18" name="TextBox 17"/>
-          <p:cNvSpPr txBox="1"/>
-          <p:nvPr/>
-        </p:nvSpPr>
-        <p:spPr>
-          <a:xfrm>
-            <a:off x="8321040" y="2011680"/>
-            <a:ext cx="3230575" cy="365760"/>
-          </a:xfrm>
-          <a:prstGeom prst="rect">
-            <a:avLst/>
-          </a:prstGeom>
-          <a:noFill/>
-        </p:spPr>
-        <p:txBody>
-          <a:bodyPr wrap="square" lIns="0" rIns="0" tIns="0" bIns="0" anchor="t">
-            <a:noAutofit/>
-          </a:bodyPr>
-          <a:lstStyle/>
-          <a:p>
-            <a:pPr algn="l">
-              <a:lnSpc>
-                <a:spcPts val="1439"/>
-              </a:lnSpc>
-              <a:spcBef>
-                <a:spcPts val="0"/>
-              </a:spcBef>
-              <a:spcAft>
-                <a:spcPts val="0"/>
-              </a:spcAft>
-              <a:buNone/>
-            </a:pPr>
-            <a:r>
-              <a:rPr sz="1200" b="1" i="0">
-                <a:solidFill>
-                  <a:srgbClr val="7F98C6"/>
-                </a:solidFill>
-                <a:latin typeface="Arial"/>
-              </a:rPr>
-              <a:t>THE ONLY THINGS THAT LEAVE</a:t>
-            </a:r>
-          </a:p>
-        </p:txBody>
-      </p:sp>
-      <p:sp>
-        <p:nvSpPr>
-          <p:cNvPr id="19" name="TextBox 18"/>
-          <p:cNvSpPr txBox="1"/>
-          <p:nvPr/>
-        </p:nvSpPr>
-        <p:spPr>
-          <a:xfrm>
-            <a:off x="8321040" y="2423160"/>
-            <a:ext cx="3230575" cy="2011680"/>
-          </a:xfrm>
-          <a:prstGeom prst="rect">
-            <a:avLst/>
-          </a:prstGeom>
-          <a:noFill/>
-        </p:spPr>
-        <p:txBody>
-          <a:bodyPr wrap="square" lIns="0" rIns="0" tIns="0" bIns="0" anchor="t">
-            <a:noAutofit/>
-          </a:bodyPr>
-          <a:lstStyle/>
-          <a:p>
-            <a:pPr algn="l">
-              <a:lnSpc>
-                <a:spcPts val="1950"/>
-              </a:lnSpc>
-              <a:spcBef>
-                <a:spcPts val="0"/>
-              </a:spcBef>
-              <a:spcAft>
-                <a:spcPts val="800"/>
-              </a:spcAft>
-              <a:buNone/>
-            </a:pPr>
-            <a:r>
-              <a:rPr sz="1500" b="0" i="0">
-                <a:solidFill>
-                  <a:srgbClr val="C7D7F2"/>
-                </a:solidFill>
-                <a:latin typeface="Arial"/>
-              </a:rPr>
-              <a:t>Live video in rooms you choose to join</a:t>
-            </a:r>
-          </a:p>
-          <a:p>
-            <a:pPr algn="l">
-              <a:lnSpc>
-                <a:spcPts val="1950"/>
-              </a:lnSpc>
-              <a:spcBef>
-                <a:spcPts val="0"/>
-              </a:spcBef>
-              <a:spcAft>
-                <a:spcPts val="800"/>
-              </a:spcAft>
-              <a:buNone/>
-            </a:pPr>
-            <a:r>
-              <a:rPr sz="1500" b="0" i="0">
-                <a:solidFill>
-                  <a:srgbClr val="C7D7F2"/>
-                </a:solidFill>
-                <a:latin typeface="Arial"/>
-              </a:rPr>
-              <a:t>Optional one-time downloads: MedlinePlus, the AI model, the voice</a:t>
-            </a:r>
-          </a:p>
-          <a:p>
-            <a:pPr algn="l">
-              <a:lnSpc>
-                <a:spcPts val="1950"/>
-              </a:lnSpc>
-              <a:spcBef>
-                <a:spcPts val="0"/>
-              </a:spcBef>
-              <a:spcAft>
-                <a:spcPts val="800"/>
-              </a:spcAft>
-              <a:buNone/>
-            </a:pPr>
-            <a:r>
-              <a:rPr sz="1500" b="0" i="0">
-                <a:solidFill>
-                  <a:srgbClr val="C7D7F2"/>
-                </a:solidFill>
-                <a:latin typeface="Arial"/>
-              </a:rPr>
-              <a:t>A text or call — after you tap Send</a:t>
-            </a:r>
-          </a:p>
-        </p:txBody>
-      </p:sp>
-      <p:sp>
-        <p:nvSpPr>
-          <p:cNvPr id="20" name="TextBox 19"/>
-          <p:cNvSpPr txBox="1"/>
-          <p:nvPr/>
-        </p:nvSpPr>
-        <p:spPr>
-          <a:xfrm>
-            <a:off x="8321040" y="4343400"/>
-            <a:ext cx="3230575" cy="1371600"/>
-          </a:xfrm>
-          <a:prstGeom prst="rect">
-            <a:avLst/>
-          </a:prstGeom>
-          <a:noFill/>
-        </p:spPr>
-        <p:txBody>
-          <a:bodyPr wrap="square" lIns="0" rIns="0" tIns="0" bIns="0" anchor="t">
-            <a:noAutofit/>
-          </a:bodyPr>
-          <a:lstStyle/>
-          <a:p>
-            <a:pPr algn="l">
-              <a:lnSpc>
-                <a:spcPts val="3000"/>
-              </a:lnSpc>
-              <a:spcBef>
-                <a:spcPts val="0"/>
-              </a:spcBef>
-              <a:spcAft>
-                <a:spcPts val="0"/>
-              </a:spcAft>
-              <a:buNone/>
-            </a:pPr>
-            <a:r>
-              <a:rPr sz="2400" b="1" i="0">
-                <a:solidFill>
-                  <a:srgbClr val="FFFFFF"/>
-                </a:solidFill>
-                <a:latin typeface="Arial"/>
-              </a:rPr>
-              <a:t>0</a:t>
-            </a:r>
-            <a:r>
-              <a:rPr sz="2400" b="0" i="0">
-                <a:solidFill>
-                  <a:srgbClr val="4ADE80"/>
-                </a:solidFill>
-                <a:latin typeface="Arial"/>
-              </a:rPr>
-              <a:t> accounts</a:t>
-            </a:r>
-          </a:p>
-          <a:p>
-            <a:pPr algn="l">
-              <a:lnSpc>
-                <a:spcPts val="3000"/>
-              </a:lnSpc>
-              <a:spcBef>
-                <a:spcPts val="0"/>
-              </a:spcBef>
-              <a:spcAft>
-                <a:spcPts val="0"/>
-              </a:spcAft>
-              <a:buNone/>
-            </a:pPr>
-            <a:r>
-              <a:rPr sz="2400" b="1" i="0">
-                <a:solidFill>
-                  <a:srgbClr val="FFFFFF"/>
-                </a:solidFill>
-                <a:latin typeface="Arial"/>
-              </a:rPr>
-              <a:t>0</a:t>
-            </a:r>
-            <a:r>
-              <a:rPr sz="2400" b="0" i="0">
-                <a:solidFill>
-                  <a:srgbClr val="4ADE80"/>
-                </a:solidFill>
-                <a:latin typeface="Arial"/>
-              </a:rPr>
-              <a:t> servers</a:t>
-            </a:r>
-          </a:p>
-          <a:p>
-            <a:pPr algn="l">
-              <a:lnSpc>
-                <a:spcPts val="3000"/>
-              </a:lnSpc>
-              <a:spcBef>
-                <a:spcPts val="0"/>
-              </a:spcBef>
-              <a:spcAft>
-                <a:spcPts val="0"/>
-              </a:spcAft>
-              <a:buNone/>
-            </a:pPr>
-            <a:r>
-              <a:rPr sz="2400" b="1" i="0">
-                <a:solidFill>
-                  <a:srgbClr val="FFFFFF"/>
-                </a:solidFill>
-                <a:latin typeface="Arial"/>
-              </a:rPr>
-              <a:t>0</a:t>
-            </a:r>
-            <a:r>
-              <a:rPr sz="2400" b="0" i="0">
-                <a:solidFill>
-                  <a:srgbClr val="4ADE80"/>
-                </a:solidFill>
-                <a:latin typeface="Arial"/>
-              </a:rPr>
-              <a:t> trackers</a:t>
-            </a:r>
-          </a:p>
-        </p:txBody>
-      </p:sp>
-      <p:sp>
-        <p:nvSpPr>
-          <p:cNvPr id="21" name="TextBox 20"/>
-          <p:cNvSpPr txBox="1"/>
-          <p:nvPr/>
-        </p:nvSpPr>
-        <p:spPr>
-          <a:xfrm>
-            <a:off x="640080" y="6053328"/>
-            <a:ext cx="10911535" cy="365760"/>
-          </a:xfrm>
-          <a:prstGeom prst="rect">
-            <a:avLst/>
-          </a:prstGeom>
-          <a:noFill/>
-        </p:spPr>
-        <p:txBody>
-          <a:bodyPr wrap="square" lIns="0" rIns="0" tIns="0" bIns="0" anchor="t">
-            <a:noAutofit/>
-          </a:bodyPr>
-          <a:lstStyle/>
-          <a:p>
-            <a:pPr algn="l">
-              <a:lnSpc>
-                <a:spcPts val="1680"/>
-              </a:lnSpc>
-              <a:spcBef>
-                <a:spcPts val="0"/>
-              </a:spcBef>
-              <a:spcAft>
-                <a:spcPts val="0"/>
-              </a:spcAft>
-              <a:buNone/>
-            </a:pPr>
-            <a:r>
-              <a:rPr sz="1400" b="0" i="0">
-                <a:solidFill>
-                  <a:srgbClr val="A6BBE0"/>
-                </a:solidFill>
-                <a:latin typeface="Arial"/>
-              </a:rPr>
-              <a:t>Why now: phones can finally run a useful language model offline — private AI help no longer needs a cloud.</a:t>
-            </a:r>
-          </a:p>
-        </p:txBody>
-      </p:sp>
-      <p:sp>
-        <p:nvSpPr>
-          <p:cNvPr id="22" name="TextBox 21"/>
           <p:cNvSpPr txBox="1"/>
           <p:nvPr/>
         </p:nvSpPr>
@@ -12823,18 +12206,18 @@
           <a:p>
             <a:pPr algn="l">
               <a:lnSpc>
-                <a:spcPts val="4032"/>
-              </a:lnSpc>
-              <a:spcBef>
-                <a:spcPts val="0"/>
-              </a:spcBef>
-              <a:spcAft>
-                <a:spcPts val="0"/>
-              </a:spcAft>
-              <a:buNone/>
-            </a:pPr>
-            <a:r>
-              <a:rPr sz="3600" b="1" i="0">
+                <a:spcPts val="4480"/>
+              </a:lnSpc>
+              <a:spcBef>
+                <a:spcPts val="0"/>
+              </a:spcBef>
+              <a:spcAft>
+                <a:spcPts val="0"/>
+              </a:spcAft>
+              <a:buNone/>
+            </a:pPr>
+            <a:r>
+              <a:rPr sz="4000" b="1" i="0">
                 <a:solidFill>
                   <a:srgbClr val="FFFFFF"/>
                 </a:solidFill>
@@ -12853,12 +12236,12 @@
         </p:nvSpPr>
         <p:spPr>
           <a:xfrm>
-            <a:off x="640080" y="1874519"/>
-            <a:ext cx="5272887" cy="2651760"/>
+            <a:off x="640080" y="1920240"/>
+            <a:ext cx="5272887" cy="2377440"/>
           </a:xfrm>
           <a:prstGeom prst="roundRect">
             <a:avLst>
-              <a:gd name="adj" fmla="val 6896"/>
+              <a:gd name="adj" fmla="val 7692"/>
             </a:avLst>
           </a:prstGeom>
           <a:solidFill>
@@ -12897,8 +12280,8 @@
         </p:nvSpPr>
         <p:spPr>
           <a:xfrm>
-            <a:off x="1005840" y="2103120"/>
-            <a:ext cx="4541367" cy="457200"/>
+            <a:off x="1051560" y="2194560"/>
+            <a:ext cx="4449927" cy="457200"/>
           </a:xfrm>
           <a:prstGeom prst="rect">
             <a:avLst/>
@@ -12913,18 +12296,18 @@
           <a:p>
             <a:pPr algn="l">
               <a:lnSpc>
-                <a:spcPts val="2640"/>
-              </a:lnSpc>
-              <a:spcBef>
-                <a:spcPts val="0"/>
-              </a:spcBef>
-              <a:spcAft>
-                <a:spcPts val="0"/>
-              </a:spcAft>
-              <a:buNone/>
-            </a:pPr>
-            <a:r>
-              <a:rPr sz="2200" b="1" i="0">
+                <a:spcPts val="2879"/>
+              </a:lnSpc>
+              <a:spcBef>
+                <a:spcPts val="0"/>
+              </a:spcBef>
+              <a:spcAft>
+                <a:spcPts val="0"/>
+              </a:spcAft>
+              <a:buNone/>
+            </a:pPr>
+            <a:r>
+              <a:rPr sz="2400" b="1" i="0">
                 <a:solidFill>
                   <a:srgbClr val="FFFFFF"/>
                 </a:solidFill>
@@ -12943,8 +12326,8 @@
         </p:nvSpPr>
         <p:spPr>
           <a:xfrm>
-            <a:off x="4175607" y="2157984"/>
-            <a:ext cx="1371600" cy="310896"/>
+            <a:off x="4038447" y="2258568"/>
+            <a:ext cx="1463040" cy="329184"/>
           </a:xfrm>
           <a:prstGeom prst="roundRect">
             <a:avLst>
@@ -12987,8 +12370,8 @@
         </p:nvSpPr>
         <p:spPr>
           <a:xfrm>
-            <a:off x="4175607" y="2157984"/>
-            <a:ext cx="1371600" cy="310896"/>
+            <a:off x="4038447" y="2258568"/>
+            <a:ext cx="1463040" cy="329184"/>
           </a:xfrm>
           <a:prstGeom prst="rect">
             <a:avLst/>
@@ -13033,8 +12416,8 @@
         </p:nvSpPr>
         <p:spPr>
           <a:xfrm>
-            <a:off x="1005840" y="2697480"/>
-            <a:ext cx="4541367" cy="1737360"/>
+            <a:off x="1051560" y="2788920"/>
+            <a:ext cx="4449927" cy="1463040"/>
           </a:xfrm>
           <a:prstGeom prst="rect">
             <a:avLst/>
@@ -13049,13 +12432,13 @@
           <a:p>
             <a:pPr algn="l" marL="219456" indent="-219456">
               <a:lnSpc>
-                <a:spcPts val="1891"/>
-              </a:lnSpc>
-              <a:spcBef>
-                <a:spcPts val="0"/>
-              </a:spcBef>
-              <a:spcAft>
-                <a:spcPts val="400"/>
+                <a:spcPts val="2196"/>
+              </a:lnSpc>
+              <a:spcBef>
+                <a:spcPts val="0"/>
+              </a:spcBef>
+              <a:spcAft>
+                <a:spcPts val="600"/>
               </a:spcAft>
               <a:buClr>
                 <a:srgbClr val="4ADE80"/>
@@ -13064,25 +12447,25 @@
               <a:buChar char="•"/>
             </a:pPr>
             <a:r>
-              <a:rPr sz="1550" b="0" i="0">
+              <a:rPr sz="1800" b="0" i="0">
                 <a:solidFill>
                   <a:srgbClr val="C7D7F2"/>
                 </a:solidFill>
                 <a:latin typeface="Arial"/>
               </a:rPr>
-              <a:t>React 18 · Vite · Tailwind</a:t>
+              <a:t>React · Vite · Tailwind</a:t>
             </a:r>
           </a:p>
           <a:p>
             <a:pPr algn="l" marL="219456" indent="-219456">
               <a:lnSpc>
-                <a:spcPts val="1891"/>
-              </a:lnSpc>
-              <a:spcBef>
-                <a:spcPts val="0"/>
-              </a:spcBef>
-              <a:spcAft>
-                <a:spcPts val="400"/>
+                <a:spcPts val="2196"/>
+              </a:lnSpc>
+              <a:spcBef>
+                <a:spcPts val="0"/>
+              </a:spcBef>
+              <a:spcAft>
+                <a:spcPts val="600"/>
               </a:spcAft>
               <a:buClr>
                 <a:srgbClr val="4ADE80"/>
@@ -13091,7 +12474,7 @@
               <a:buChar char="•"/>
             </a:pPr>
             <a:r>
-              <a:rPr sz="1550" b="0" i="0">
+              <a:rPr sz="1800" b="0" i="0">
                 <a:solidFill>
                   <a:srgbClr val="C7D7F2"/>
                 </a:solidFill>
@@ -13103,13 +12486,13 @@
           <a:p>
             <a:pPr algn="l" marL="219456" indent="-219456">
               <a:lnSpc>
-                <a:spcPts val="1891"/>
-              </a:lnSpc>
-              <a:spcBef>
-                <a:spcPts val="0"/>
-              </a:spcBef>
-              <a:spcAft>
-                <a:spcPts val="400"/>
+                <a:spcPts val="2196"/>
+              </a:lnSpc>
+              <a:spcBef>
+                <a:spcPts val="0"/>
+              </a:spcBef>
+              <a:spcAft>
+                <a:spcPts val="600"/>
               </a:spcAft>
               <a:buClr>
                 <a:srgbClr val="4ADE80"/>
@@ -13118,40 +12501,13 @@
               <a:buChar char="•"/>
             </a:pPr>
             <a:r>
-              <a:rPr sz="1550" b="0" i="0">
+              <a:rPr sz="1800" b="0" i="0">
                 <a:solidFill>
                   <a:srgbClr val="C7D7F2"/>
                 </a:solidFill>
                 <a:latin typeface="Arial"/>
               </a:rPr>
-              <a:t>Web Crypto (AES-256-GCM)</a:t>
-            </a:r>
-          </a:p>
-          <a:p>
-            <a:pPr algn="l" marL="219456" indent="-219456">
-              <a:lnSpc>
-                <a:spcPts val="1891"/>
-              </a:lnSpc>
-              <a:spcBef>
-                <a:spcPts val="0"/>
-              </a:spcBef>
-              <a:spcAft>
-                <a:spcPts val="400"/>
-              </a:spcAft>
-              <a:buClr>
-                <a:srgbClr val="4ADE80"/>
-              </a:buClr>
-              <a:buFont typeface="Arial"/>
-              <a:buChar char="•"/>
-            </a:pPr>
-            <a:r>
-              <a:rPr sz="1550" b="0" i="0">
-                <a:solidFill>
-                  <a:srgbClr val="C7D7F2"/>
-                </a:solidFill>
-                <a:latin typeface="Arial"/>
-              </a:rPr>
-              <a:t>Installable PWA, works offline</a:t>
+              <a:t>Web Crypto · installable PWA</a:t>
             </a:r>
           </a:p>
         </p:txBody>
@@ -13164,12 +12520,12 @@
         </p:nvSpPr>
         <p:spPr>
           <a:xfrm>
-            <a:off x="6278727" y="1874519"/>
-            <a:ext cx="5272887" cy="2651760"/>
+            <a:off x="6278727" y="1920240"/>
+            <a:ext cx="5272887" cy="2377440"/>
           </a:xfrm>
           <a:prstGeom prst="roundRect">
             <a:avLst>
-              <a:gd name="adj" fmla="val 6896"/>
+              <a:gd name="adj" fmla="val 7692"/>
             </a:avLst>
           </a:prstGeom>
           <a:solidFill>
@@ -13208,8 +12564,8 @@
         </p:nvSpPr>
         <p:spPr>
           <a:xfrm>
-            <a:off x="6644487" y="2103120"/>
-            <a:ext cx="4541367" cy="457200"/>
+            <a:off x="6690207" y="2194560"/>
+            <a:ext cx="4449927" cy="457200"/>
           </a:xfrm>
           <a:prstGeom prst="rect">
             <a:avLst/>
@@ -13224,18 +12580,18 @@
           <a:p>
             <a:pPr algn="l">
               <a:lnSpc>
-                <a:spcPts val="2640"/>
-              </a:lnSpc>
-              <a:spcBef>
-                <a:spcPts val="0"/>
-              </a:spcBef>
-              <a:spcAft>
-                <a:spcPts val="0"/>
-              </a:spcAft>
-              <a:buNone/>
-            </a:pPr>
-            <a:r>
-              <a:rPr sz="2200" b="1" i="0">
+                <a:spcPts val="2879"/>
+              </a:lnSpc>
+              <a:spcBef>
+                <a:spcPts val="0"/>
+              </a:spcBef>
+              <a:spcAft>
+                <a:spcPts val="0"/>
+              </a:spcAft>
+              <a:buNone/>
+            </a:pPr>
+            <a:r>
+              <a:rPr sz="2400" b="1" i="0">
                 <a:solidFill>
                   <a:srgbClr val="FFFFFF"/>
                 </a:solidFill>
@@ -13254,8 +12610,8 @@
         </p:nvSpPr>
         <p:spPr>
           <a:xfrm>
-            <a:off x="9814255" y="2157984"/>
-            <a:ext cx="1371600" cy="310896"/>
+            <a:off x="9677095" y="2258568"/>
+            <a:ext cx="1463040" cy="329184"/>
           </a:xfrm>
           <a:prstGeom prst="roundRect">
             <a:avLst>
@@ -13298,8 +12654,8 @@
         </p:nvSpPr>
         <p:spPr>
           <a:xfrm>
-            <a:off x="9814255" y="2157984"/>
-            <a:ext cx="1371600" cy="310896"/>
+            <a:off x="9677095" y="2258568"/>
+            <a:ext cx="1463040" cy="329184"/>
           </a:xfrm>
           <a:prstGeom prst="rect">
             <a:avLst/>
@@ -13344,8 +12700,8 @@
         </p:nvSpPr>
         <p:spPr>
           <a:xfrm>
-            <a:off x="6644487" y="2697480"/>
-            <a:ext cx="4541367" cy="1737360"/>
+            <a:off x="6690207" y="2788920"/>
+            <a:ext cx="4449927" cy="1463040"/>
           </a:xfrm>
           <a:prstGeom prst="rect">
             <a:avLst/>
@@ -13360,13 +12716,13 @@
           <a:p>
             <a:pPr algn="l" marL="219456" indent="-219456">
               <a:lnSpc>
-                <a:spcPts val="1891"/>
-              </a:lnSpc>
-              <a:spcBef>
-                <a:spcPts val="0"/>
-              </a:spcBef>
-              <a:spcAft>
-                <a:spcPts val="400"/>
+                <a:spcPts val="2196"/>
+              </a:lnSpc>
+              <a:spcBef>
+                <a:spcPts val="0"/>
+              </a:spcBef>
+              <a:spcAft>
+                <a:spcPts val="600"/>
               </a:spcAft>
               <a:buClr>
                 <a:srgbClr val="4ADE80"/>
@@ -13375,7 +12731,7 @@
               <a:buChar char="•"/>
             </a:pPr>
             <a:r>
-              <a:rPr sz="1550" b="0" i="0">
+              <a:rPr sz="1800" b="0" i="0">
                 <a:solidFill>
                   <a:srgbClr val="C7D7F2"/>
                 </a:solidFill>
@@ -13387,13 +12743,13 @@
           <a:p>
             <a:pPr algn="l" marL="219456" indent="-219456">
               <a:lnSpc>
-                <a:spcPts val="1891"/>
-              </a:lnSpc>
-              <a:spcBef>
-                <a:spcPts val="0"/>
-              </a:spcBef>
-              <a:spcAft>
-                <a:spcPts val="400"/>
+                <a:spcPts val="2196"/>
+              </a:lnSpc>
+              <a:spcBef>
+                <a:spcPts val="0"/>
+              </a:spcBef>
+              <a:spcAft>
+                <a:spcPts val="600"/>
               </a:spcAft>
               <a:buClr>
                 <a:srgbClr val="4ADE80"/>
@@ -13402,7 +12758,7 @@
               <a:buChar char="•"/>
             </a:pPr>
             <a:r>
-              <a:rPr sz="1550" b="0" i="0">
+              <a:rPr sz="1800" b="0" i="0">
                 <a:solidFill>
                   <a:srgbClr val="C7D7F2"/>
                 </a:solidFill>
@@ -13414,13 +12770,13 @@
           <a:p>
             <a:pPr algn="l" marL="219456" indent="-219456">
               <a:lnSpc>
-                <a:spcPts val="1891"/>
-              </a:lnSpc>
-              <a:spcBef>
-                <a:spcPts val="0"/>
-              </a:spcBef>
-              <a:spcAft>
-                <a:spcPts val="400"/>
+                <a:spcPts val="2196"/>
+              </a:lnSpc>
+              <a:spcBef>
+                <a:spcPts val="0"/>
+              </a:spcBef>
+              <a:spcAft>
+                <a:spcPts val="600"/>
               </a:spcAft>
               <a:buClr>
                 <a:srgbClr val="4ADE80"/>
@@ -13429,40 +12785,13 @@
               <a:buChar char="•"/>
             </a:pPr>
             <a:r>
-              <a:rPr sz="1550" b="0" i="0">
+              <a:rPr sz="1800" b="0" i="0">
                 <a:solidFill>
                   <a:srgbClr val="C7D7F2"/>
                 </a:solidFill>
                 <a:latin typeface="Arial"/>
               </a:rPr>
-              <a:t>llama.cpp · Sherpa-ONNX</a:t>
-            </a:r>
-          </a:p>
-          <a:p>
-            <a:pPr algn="l" marL="219456" indent="-219456">
-              <a:lnSpc>
-                <a:spcPts val="1891"/>
-              </a:lnSpc>
-              <a:spcBef>
-                <a:spcPts val="0"/>
-              </a:spcBef>
-              <a:spcAft>
-                <a:spcPts val="400"/>
-              </a:spcAft>
-              <a:buClr>
-                <a:srgbClr val="4ADE80"/>
-              </a:buClr>
-              <a:buFont typeface="Arial"/>
-              <a:buChar char="•"/>
-            </a:pPr>
-            <a:r>
-              <a:rPr sz="1550" b="0" i="0">
-                <a:solidFill>
-                  <a:srgbClr val="C7D7F2"/>
-                </a:solidFill>
-                <a:latin typeface="Arial"/>
-              </a:rPr>
-              <a:t>Jitsi Meet SDK</a:t>
+              <a:t>llama.cpp · Sherpa-ONNX · Jitsi</a:t>
             </a:r>
           </a:p>
         </p:txBody>
@@ -13475,8 +12804,8 @@
         </p:nvSpPr>
         <p:spPr>
           <a:xfrm>
-            <a:off x="640080" y="4846320"/>
-            <a:ext cx="2453563" cy="731520"/>
+            <a:off x="640080" y="4617720"/>
+            <a:ext cx="2453563" cy="822960"/>
           </a:xfrm>
           <a:prstGeom prst="rect">
             <a:avLst/>
@@ -13491,18 +12820,18 @@
           <a:p>
             <a:pPr algn="ctr">
               <a:lnSpc>
-                <a:spcPts val="4800"/>
-              </a:lnSpc>
-              <a:spcBef>
-                <a:spcPts val="0"/>
-              </a:spcBef>
-              <a:spcAft>
-                <a:spcPts val="0"/>
-              </a:spcAft>
-              <a:buNone/>
-            </a:pPr>
-            <a:r>
-              <a:rPr sz="4000" b="1" i="0">
+                <a:spcPts val="5280"/>
+              </a:lnSpc>
+              <a:spcBef>
+                <a:spcPts val="0"/>
+              </a:spcBef>
+              <a:spcAft>
+                <a:spcPts val="0"/>
+              </a:spcAft>
+              <a:buNone/>
+            </a:pPr>
+            <a:r>
+              <a:rPr sz="4400" b="1" i="0">
                 <a:solidFill>
                   <a:srgbClr val="4ADE80"/>
                 </a:solidFill>
@@ -13521,7 +12850,7 @@
         </p:nvSpPr>
         <p:spPr>
           <a:xfrm>
-            <a:off x="640080" y="5577840"/>
+            <a:off x="640080" y="5440680"/>
             <a:ext cx="2453563" cy="365760"/>
           </a:xfrm>
           <a:prstGeom prst="rect">
@@ -13537,18 +12866,18 @@
           <a:p>
             <a:pPr algn="ctr">
               <a:lnSpc>
-                <a:spcPts val="1680"/>
-              </a:lnSpc>
-              <a:spcBef>
-                <a:spcPts val="0"/>
-              </a:spcBef>
-              <a:spcAft>
-                <a:spcPts val="0"/>
-              </a:spcAft>
-              <a:buNone/>
-            </a:pPr>
-            <a:r>
-              <a:rPr sz="1400" b="0" i="0">
+                <a:spcPts val="1920"/>
+              </a:lnSpc>
+              <a:spcBef>
+                <a:spcPts val="0"/>
+              </a:spcBef>
+              <a:spcAft>
+                <a:spcPts val="0"/>
+              </a:spcAft>
+              <a:buNone/>
+            </a:pPr>
+            <a:r>
+              <a:rPr sz="1600" b="0" i="0">
                 <a:solidFill>
                   <a:srgbClr val="A6BBE0"/>
                 </a:solidFill>
@@ -13567,8 +12896,8 @@
         </p:nvSpPr>
         <p:spPr>
           <a:xfrm>
-            <a:off x="3459403" y="4846320"/>
-            <a:ext cx="2453563" cy="731520"/>
+            <a:off x="3459403" y="4617720"/>
+            <a:ext cx="2453563" cy="822960"/>
           </a:xfrm>
           <a:prstGeom prst="rect">
             <a:avLst/>
@@ -13583,18 +12912,18 @@
           <a:p>
             <a:pPr algn="ctr">
               <a:lnSpc>
-                <a:spcPts val="4800"/>
-              </a:lnSpc>
-              <a:spcBef>
-                <a:spcPts val="0"/>
-              </a:spcBef>
-              <a:spcAft>
-                <a:spcPts val="0"/>
-              </a:spcAft>
-              <a:buNone/>
-            </a:pPr>
-            <a:r>
-              <a:rPr sz="4000" b="1" i="0">
+                <a:spcPts val="5280"/>
+              </a:lnSpc>
+              <a:spcBef>
+                <a:spcPts val="0"/>
+              </a:spcBef>
+              <a:spcAft>
+                <a:spcPts val="0"/>
+              </a:spcAft>
+              <a:buNone/>
+            </a:pPr>
+            <a:r>
+              <a:rPr sz="4400" b="1" i="0">
                 <a:solidFill>
                   <a:srgbClr val="4ADE80"/>
                 </a:solidFill>
@@ -13613,7 +12942,7 @@
         </p:nvSpPr>
         <p:spPr>
           <a:xfrm>
-            <a:off x="3459403" y="5577840"/>
+            <a:off x="3459403" y="5440680"/>
             <a:ext cx="2453563" cy="365760"/>
           </a:xfrm>
           <a:prstGeom prst="rect">
@@ -13629,24 +12958,24 @@
           <a:p>
             <a:pPr algn="ctr">
               <a:lnSpc>
-                <a:spcPts val="1680"/>
-              </a:lnSpc>
-              <a:spcBef>
-                <a:spcPts val="0"/>
-              </a:spcBef>
-              <a:spcAft>
-                <a:spcPts val="0"/>
-              </a:spcAft>
-              <a:buNone/>
-            </a:pPr>
-            <a:r>
-              <a:rPr sz="1400" b="0" i="0">
+                <a:spcPts val="1920"/>
+              </a:lnSpc>
+              <a:spcBef>
+                <a:spcPts val="0"/>
+              </a:spcBef>
+              <a:spcAft>
+                <a:spcPts val="0"/>
+              </a:spcAft>
+              <a:buNone/>
+            </a:pPr>
+            <a:r>
+              <a:rPr sz="1600" b="0" i="0">
                 <a:solidFill>
                   <a:srgbClr val="A6BBE0"/>
                 </a:solidFill>
                 <a:latin typeface="Arial"/>
               </a:rPr>
-              <a:t>automated tests</a:t>
+              <a:t>tests passing</a:t>
             </a:r>
           </a:p>
         </p:txBody>
@@ -13659,8 +12988,8 @@
         </p:nvSpPr>
         <p:spPr>
           <a:xfrm>
-            <a:off x="6278727" y="4846320"/>
-            <a:ext cx="2453563" cy="731520"/>
+            <a:off x="6278727" y="4617720"/>
+            <a:ext cx="2453563" cy="822960"/>
           </a:xfrm>
           <a:prstGeom prst="rect">
             <a:avLst/>
@@ -13675,18 +13004,18 @@
           <a:p>
             <a:pPr algn="ctr">
               <a:lnSpc>
-                <a:spcPts val="4800"/>
-              </a:lnSpc>
-              <a:spcBef>
-                <a:spcPts val="0"/>
-              </a:spcBef>
-              <a:spcAft>
-                <a:spcPts val="0"/>
-              </a:spcAft>
-              <a:buNone/>
-            </a:pPr>
-            <a:r>
-              <a:rPr sz="4000" b="1" i="0">
+                <a:spcPts val="5280"/>
+              </a:lnSpc>
+              <a:spcBef>
+                <a:spcPts val="0"/>
+              </a:spcBef>
+              <a:spcAft>
+                <a:spcPts val="0"/>
+              </a:spcAft>
+              <a:buNone/>
+            </a:pPr>
+            <a:r>
+              <a:rPr sz="4400" b="1" i="0">
                 <a:solidFill>
                   <a:srgbClr val="4ADE80"/>
                 </a:solidFill>
@@ -13705,7 +13034,7 @@
         </p:nvSpPr>
         <p:spPr>
           <a:xfrm>
-            <a:off x="6278727" y="5577840"/>
+            <a:off x="6278727" y="5440680"/>
             <a:ext cx="2453563" cy="365760"/>
           </a:xfrm>
           <a:prstGeom prst="rect">
@@ -13721,18 +13050,18 @@
           <a:p>
             <a:pPr algn="ctr">
               <a:lnSpc>
-                <a:spcPts val="1680"/>
-              </a:lnSpc>
-              <a:spcBef>
-                <a:spcPts val="0"/>
-              </a:spcBef>
-              <a:spcAft>
-                <a:spcPts val="0"/>
-              </a:spcAft>
-              <a:buNone/>
-            </a:pPr>
-            <a:r>
-              <a:rPr sz="1400" b="0" i="0">
+                <a:spcPts val="1920"/>
+              </a:lnSpc>
+              <a:spcBef>
+                <a:spcPts val="0"/>
+              </a:spcBef>
+              <a:spcAft>
+                <a:spcPts val="0"/>
+              </a:spcAft>
+              <a:buNone/>
+            </a:pPr>
+            <a:r>
+              <a:rPr sz="1600" b="0" i="0">
                 <a:solidFill>
                   <a:srgbClr val="A6BBE0"/>
                 </a:solidFill>
@@ -13751,8 +13080,8 @@
         </p:nvSpPr>
         <p:spPr>
           <a:xfrm>
-            <a:off x="9098051" y="4846320"/>
-            <a:ext cx="2453563" cy="731520"/>
+            <a:off x="9098051" y="4617720"/>
+            <a:ext cx="2453563" cy="822960"/>
           </a:xfrm>
           <a:prstGeom prst="rect">
             <a:avLst/>
@@ -13767,18 +13096,18 @@
           <a:p>
             <a:pPr algn="ctr">
               <a:lnSpc>
-                <a:spcPts val="4800"/>
-              </a:lnSpc>
-              <a:spcBef>
-                <a:spcPts val="0"/>
-              </a:spcBef>
-              <a:spcAft>
-                <a:spcPts val="0"/>
-              </a:spcAft>
-              <a:buNone/>
-            </a:pPr>
-            <a:r>
-              <a:rPr sz="4000" b="1" i="0">
+                <a:spcPts val="5280"/>
+              </a:lnSpc>
+              <a:spcBef>
+                <a:spcPts val="0"/>
+              </a:spcBef>
+              <a:spcAft>
+                <a:spcPts val="0"/>
+              </a:spcAft>
+              <a:buNone/>
+            </a:pPr>
+            <a:r>
+              <a:rPr sz="4400" b="1" i="0">
                 <a:solidFill>
                   <a:srgbClr val="FFC94D"/>
                 </a:solidFill>
@@ -13797,7 +13126,7 @@
         </p:nvSpPr>
         <p:spPr>
           <a:xfrm>
-            <a:off x="9098051" y="5577840"/>
+            <a:off x="9098051" y="5440680"/>
             <a:ext cx="2453563" cy="365760"/>
           </a:xfrm>
           <a:prstGeom prst="rect">
@@ -13813,18 +13142,18 @@
           <a:p>
             <a:pPr algn="ctr">
               <a:lnSpc>
-                <a:spcPts val="1680"/>
-              </a:lnSpc>
-              <a:spcBef>
-                <a:spcPts val="0"/>
-              </a:spcBef>
-              <a:spcAft>
-                <a:spcPts val="0"/>
-              </a:spcAft>
-              <a:buNone/>
-            </a:pPr>
-            <a:r>
-              <a:rPr sz="1400" b="0" i="0">
+                <a:spcPts val="1920"/>
+              </a:lnSpc>
+              <a:spcBef>
+                <a:spcPts val="0"/>
+              </a:spcBef>
+              <a:spcAft>
+                <a:spcPts val="0"/>
+              </a:spcAft>
+              <a:buNone/>
+            </a:pPr>
+            <a:r>
+              <a:rPr sz="1600" b="0" i="0">
                 <a:solidFill>
                   <a:srgbClr val="A6BBE0"/>
                 </a:solidFill>

--- a/pitch/CareSphere_Congressional_App_Challenge_Deck.pptx
+++ b/pitch/CareSphere_Congressional_App_Challenge_Deck.pptx
@@ -4383,7 +4383,7 @@
               <a:srgbClr val="0F2659"/>
             </a:gs>
           </a:gsLst>
-          <a:lin scaled="0" ang="16200000"/>
+          <a:lin scaled="0" ang="5400000"/>
         </a:gradFill>
         <a:effectLst/>
       </p:bgPr>
@@ -4768,6 +4768,18 @@
   <p:clrMapOvr>
     <a:masterClrMapping/>
   </p:clrMapOvr>
+  <mc:AlternateContent xmlns:mc="http://schemas.openxmlformats.org/markup-compatibility/2006">
+    <mc:Choice xmlns:p14="http://schemas.microsoft.com/office/powerpoint/2010/main" Requires="p14">
+      <p:transition spd="med" p14:dur="600">
+        <p:fade/>
+      </p:transition>
+    </mc:Choice>
+    <mc:Fallback>
+      <p:transition spd="med">
+        <p:fade/>
+      </p:transition>
+    </mc:Fallback>
+  </mc:AlternateContent>
 </p:sld>
 </file>
 
@@ -4785,7 +4797,7 @@
               <a:srgbClr val="0F2659"/>
             </a:gs>
           </a:gsLst>
-          <a:lin scaled="0" ang="16200000"/>
+          <a:lin scaled="0" ang="5400000"/>
         </a:gradFill>
         <a:effectLst/>
       </p:bgPr>
@@ -6008,6 +6020,18 @@
   <p:clrMapOvr>
     <a:masterClrMapping/>
   </p:clrMapOvr>
+  <mc:AlternateContent xmlns:mc="http://schemas.openxmlformats.org/markup-compatibility/2006">
+    <mc:Choice xmlns:p14="http://schemas.microsoft.com/office/powerpoint/2010/main" Requires="p14">
+      <p:transition spd="med" p14:dur="600">
+        <p:fade/>
+      </p:transition>
+    </mc:Choice>
+    <mc:Fallback>
+      <p:transition spd="med">
+        <p:fade/>
+      </p:transition>
+    </mc:Fallback>
+  </mc:AlternateContent>
 </p:sld>
 </file>
 
@@ -6025,7 +6049,7 @@
               <a:srgbClr val="0F2659"/>
             </a:gs>
           </a:gsLst>
-          <a:lin scaled="0" ang="16200000"/>
+          <a:lin scaled="0" ang="5400000"/>
         </a:gradFill>
         <a:effectLst/>
       </p:bgPr>
@@ -7156,6 +7180,18 @@
   <p:clrMapOvr>
     <a:masterClrMapping/>
   </p:clrMapOvr>
+  <mc:AlternateContent xmlns:mc="http://schemas.openxmlformats.org/markup-compatibility/2006">
+    <mc:Choice xmlns:p14="http://schemas.microsoft.com/office/powerpoint/2010/main" Requires="p14">
+      <p:transition spd="med" p14:dur="600">
+        <p:fade/>
+      </p:transition>
+    </mc:Choice>
+    <mc:Fallback>
+      <p:transition spd="med">
+        <p:fade/>
+      </p:transition>
+    </mc:Fallback>
+  </mc:AlternateContent>
 </p:sld>
 </file>
 
@@ -7173,7 +7209,7 @@
               <a:srgbClr val="0F2659"/>
             </a:gs>
           </a:gsLst>
-          <a:lin scaled="0" ang="16200000"/>
+          <a:lin scaled="0" ang="5400000"/>
         </a:gradFill>
         <a:effectLst/>
       </p:bgPr>
@@ -8491,6 +8527,18 @@
   <p:clrMapOvr>
     <a:masterClrMapping/>
   </p:clrMapOvr>
+  <mc:AlternateContent xmlns:mc="http://schemas.openxmlformats.org/markup-compatibility/2006">
+    <mc:Choice xmlns:p14="http://schemas.microsoft.com/office/powerpoint/2010/main" Requires="p14">
+      <p:transition spd="med" p14:dur="600">
+        <p:fade/>
+      </p:transition>
+    </mc:Choice>
+    <mc:Fallback>
+      <p:transition spd="med">
+        <p:fade/>
+      </p:transition>
+    </mc:Fallback>
+  </mc:AlternateContent>
 </p:sld>
 </file>
 
@@ -8508,7 +8556,7 @@
               <a:srgbClr val="0F2659"/>
             </a:gs>
           </a:gsLst>
-          <a:lin scaled="0" ang="16200000"/>
+          <a:lin scaled="0" ang="5400000"/>
         </a:gradFill>
         <a:effectLst/>
       </p:bgPr>
@@ -8973,6 +9021,18 @@
   <p:clrMapOvr>
     <a:masterClrMapping/>
   </p:clrMapOvr>
+  <mc:AlternateContent xmlns:mc="http://schemas.openxmlformats.org/markup-compatibility/2006">
+    <mc:Choice xmlns:p14="http://schemas.microsoft.com/office/powerpoint/2010/main" Requires="p14">
+      <p:transition spd="slow" p14:dur="900">
+        <p:fade thruBlk="1"/>
+      </p:transition>
+    </mc:Choice>
+    <mc:Fallback>
+      <p:transition spd="slow">
+        <p:fade thruBlk="1"/>
+      </p:transition>
+    </mc:Fallback>
+  </mc:AlternateContent>
 </p:sld>
 </file>
 
@@ -8990,7 +9050,7 @@
               <a:srgbClr val="0F2659"/>
             </a:gs>
           </a:gsLst>
-          <a:lin scaled="0" ang="16200000"/>
+          <a:lin scaled="0" ang="5400000"/>
         </a:gradFill>
         <a:effectLst/>
       </p:bgPr>
@@ -9377,6 +9437,18 @@
   <p:clrMapOvr>
     <a:masterClrMapping/>
   </p:clrMapOvr>
+  <mc:AlternateContent xmlns:mc="http://schemas.openxmlformats.org/markup-compatibility/2006">
+    <mc:Choice xmlns:p14="http://schemas.microsoft.com/office/powerpoint/2010/main" Requires="p14">
+      <p:transition spd="med" p14:dur="600">
+        <p:fade/>
+      </p:transition>
+    </mc:Choice>
+    <mc:Fallback>
+      <p:transition spd="med">
+        <p:fade/>
+      </p:transition>
+    </mc:Fallback>
+  </mc:AlternateContent>
 </p:sld>
 </file>
 
@@ -9394,7 +9466,7 @@
               <a:srgbClr val="0F2659"/>
             </a:gs>
           </a:gsLst>
-          <a:lin scaled="0" ang="16200000"/>
+          <a:lin scaled="0" ang="5400000"/>
         </a:gradFill>
         <a:effectLst/>
       </p:bgPr>
@@ -10134,6 +10206,18 @@
   <p:clrMapOvr>
     <a:masterClrMapping/>
   </p:clrMapOvr>
+  <mc:AlternateContent xmlns:mc="http://schemas.openxmlformats.org/markup-compatibility/2006">
+    <mc:Choice xmlns:p14="http://schemas.microsoft.com/office/powerpoint/2010/main" Requires="p14">
+      <p:transition spd="med" p14:dur="600">
+        <p:fade/>
+      </p:transition>
+    </mc:Choice>
+    <mc:Fallback>
+      <p:transition spd="med">
+        <p:fade/>
+      </p:transition>
+    </mc:Fallback>
+  </mc:AlternateContent>
 </p:sld>
 </file>
 
@@ -10151,7 +10235,7 @@
               <a:srgbClr val="0F2659"/>
             </a:gs>
           </a:gsLst>
-          <a:lin scaled="0" ang="16200000"/>
+          <a:lin scaled="0" ang="5400000"/>
         </a:gradFill>
         <a:effectLst/>
       </p:bgPr>
@@ -11348,6 +11432,18 @@
   <p:clrMapOvr>
     <a:masterClrMapping/>
   </p:clrMapOvr>
+  <mc:AlternateContent xmlns:mc="http://schemas.openxmlformats.org/markup-compatibility/2006">
+    <mc:Choice xmlns:p14="http://schemas.microsoft.com/office/powerpoint/2010/main" Requires="p14">
+      <p:transition spd="med" p14:dur="600">
+        <p:fade/>
+      </p:transition>
+    </mc:Choice>
+    <mc:Fallback>
+      <p:transition spd="med">
+        <p:fade/>
+      </p:transition>
+    </mc:Fallback>
+  </mc:AlternateContent>
 </p:sld>
 </file>
 
@@ -11365,7 +11461,7 @@
               <a:srgbClr val="0F2659"/>
             </a:gs>
           </a:gsLst>
-          <a:lin scaled="0" ang="16200000"/>
+          <a:lin scaled="0" ang="5400000"/>
         </a:gradFill>
         <a:effectLst/>
       </p:bgPr>
@@ -11986,6 +12082,18 @@
   <p:clrMapOvr>
     <a:masterClrMapping/>
   </p:clrMapOvr>
+  <mc:AlternateContent xmlns:mc="http://schemas.openxmlformats.org/markup-compatibility/2006">
+    <mc:Choice xmlns:p14="http://schemas.microsoft.com/office/powerpoint/2010/main" Requires="p14">
+      <p:transition spd="med" p14:dur="600">
+        <p:fade/>
+      </p:transition>
+    </mc:Choice>
+    <mc:Fallback>
+      <p:transition spd="med">
+        <p:fade/>
+      </p:transition>
+    </mc:Fallback>
+  </mc:AlternateContent>
 </p:sld>
 </file>
 
@@ -12003,7 +12111,7 @@
               <a:srgbClr val="0F2659"/>
             </a:gs>
           </a:gsLst>
-          <a:lin scaled="0" ang="16200000"/>
+          <a:lin scaled="0" ang="5400000"/>
         </a:gradFill>
         <a:effectLst/>
       </p:bgPr>
@@ -12798,6 +12906,18 @@
   <p:clrMapOvr>
     <a:masterClrMapping/>
   </p:clrMapOvr>
+  <mc:AlternateContent xmlns:mc="http://schemas.openxmlformats.org/markup-compatibility/2006">
+    <mc:Choice xmlns:p14="http://schemas.microsoft.com/office/powerpoint/2010/main" Requires="p14">
+      <p:transition spd="med" p14:dur="650">
+        <p:push dir="l"/>
+      </p:transition>
+    </mc:Choice>
+    <mc:Fallback>
+      <p:transition spd="med">
+        <p:push dir="l"/>
+      </p:transition>
+    </mc:Fallback>
+  </mc:AlternateContent>
 </p:sld>
 </file>
 
@@ -12815,7 +12935,7 @@
               <a:srgbClr val="0F2659"/>
             </a:gs>
           </a:gsLst>
-          <a:lin scaled="0" ang="16200000"/>
+          <a:lin scaled="0" ang="5400000"/>
         </a:gradFill>
         <a:effectLst/>
       </p:bgPr>
@@ -13838,6 +13958,18 @@
   <p:clrMapOvr>
     <a:masterClrMapping/>
   </p:clrMapOvr>
+  <mc:AlternateContent xmlns:mc="http://schemas.openxmlformats.org/markup-compatibility/2006">
+    <mc:Choice xmlns:p14="http://schemas.microsoft.com/office/powerpoint/2010/main" Requires="p14">
+      <p:transition spd="med" p14:dur="600">
+        <p:fade/>
+      </p:transition>
+    </mc:Choice>
+    <mc:Fallback>
+      <p:transition spd="med">
+        <p:fade/>
+      </p:transition>
+    </mc:Fallback>
+  </mc:AlternateContent>
 </p:sld>
 </file>
 
@@ -13855,7 +13987,7 @@
               <a:srgbClr val="0F2659"/>
             </a:gs>
           </a:gsLst>
-          <a:lin scaled="0" ang="16200000"/>
+          <a:lin scaled="0" ang="5400000"/>
         </a:gradFill>
         <a:effectLst/>
       </p:bgPr>
@@ -14630,6 +14762,18 @@
   <p:clrMapOvr>
     <a:masterClrMapping/>
   </p:clrMapOvr>
+  <mc:AlternateContent xmlns:mc="http://schemas.openxmlformats.org/markup-compatibility/2006">
+    <mc:Choice xmlns:p14="http://schemas.microsoft.com/office/powerpoint/2010/main" Requires="p14">
+      <p:transition spd="med" p14:dur="600">
+        <p:fade/>
+      </p:transition>
+    </mc:Choice>
+    <mc:Fallback>
+      <p:transition spd="med">
+        <p:fade/>
+      </p:transition>
+    </mc:Fallback>
+  </mc:AlternateContent>
 </p:sld>
 </file>
 
@@ -14647,7 +14791,7 @@
               <a:srgbClr val="0F2659"/>
             </a:gs>
           </a:gsLst>
-          <a:lin scaled="0" ang="16200000"/>
+          <a:lin scaled="0" ang="5400000"/>
         </a:gradFill>
         <a:effectLst/>
       </p:bgPr>
@@ -15399,6 +15543,18 @@
   <p:clrMapOvr>
     <a:masterClrMapping/>
   </p:clrMapOvr>
+  <mc:AlternateContent xmlns:mc="http://schemas.openxmlformats.org/markup-compatibility/2006">
+    <mc:Choice xmlns:p14="http://schemas.microsoft.com/office/powerpoint/2010/main" Requires="p14">
+      <p:transition spd="med" p14:dur="600">
+        <p:fade/>
+      </p:transition>
+    </mc:Choice>
+    <mc:Fallback>
+      <p:transition spd="med">
+        <p:fade/>
+      </p:transition>
+    </mc:Fallback>
+  </mc:AlternateContent>
 </p:sld>
 </file>
 

--- a/pitch/CareSphere_Congressional_App_Challenge_Deck.pptx
+++ b/pitch/CareSphere_Congressional_App_Challenge_Deck.pptx
@@ -533,7 +533,7 @@
           <a:lstStyle/>
           <a:p>
             <a:r>
-              <a:t>[0:00–0:14] Hi, I'm [NAME], a [GRADE] at [SCHOOL] in [CITY], California. This is CareSphere AI — a private care companion for older adults, autistic people and their families, on iPhone and on the web.</a:t>
+              <a:t>[0:00–0:14] Hi, I'm Arnav Kochar, a [GRADE] at [SCHOOL] in [CITY], California. This is CareSphere AI — a private care companion for older adults, autistic people and their families, on iPhone and on the web.</a:t>
             </a:r>
           </a:p>
         </p:txBody>
@@ -4504,7 +4504,7 @@
                 </a:solidFill>
                 <a:latin typeface="Plus Jakarta Sans"/>
               </a:rPr>
-              <a:t>CONGRESSIONAL APP CHALLENGE 2026  ·  [CA-XX]</a:t>
+              <a:t>CONGRESSIONAL APP CHALLENGE 2026  ·  CA-10</a:t>
             </a:r>
           </a:p>
         </p:txBody>
@@ -4688,7 +4688,7 @@
                 </a:solidFill>
                 <a:latin typeface="Plus Jakarta Sans"/>
               </a:rPr>
-              <a:t>[Student Name]</a:t>
+              <a:t>Arnav Kochar</a:t>
             </a:r>
           </a:p>
         </p:txBody>
@@ -4734,7 +4734,7 @@
                 </a:solidFill>
                 <a:latin typeface="Plus Jakarta Sans"/>
               </a:rPr>
-              <a:t>[School]  ·  [City], California  ·  [email@example.com]</a:t>
+              <a:t>[School]  ·  [City], California  ·  kochar4646@gmail.com</a:t>
             </a:r>
           </a:p>
         </p:txBody>
@@ -7935,7 +7935,7 @@
                 </a:solidFill>
                 <a:latin typeface="Plus Jakarta Sans"/>
               </a:rPr>
-              <a:t>sensor history in the visit brief · encrypted backup · Spanish</a:t>
+              <a:t>sensor history in the visit brief · trends only from real readings</a:t>
             </a:r>
           </a:p>
         </p:txBody>
@@ -8843,7 +8843,7 @@
                 </a:solidFill>
                 <a:latin typeface="Plus Jakarta Sans"/>
               </a:rPr>
-              <a:t>[Student Name]  ·  [email@example.com]  ·  [School], [City], California</a:t>
+              <a:t>Arnav Kochar  ·  kochar4646@gmail.com  ·  [School], [City], California</a:t>
             </a:r>
           </a:p>
         </p:txBody>
@@ -9239,7 +9239,7 @@
                 </a:solidFill>
                 <a:latin typeface="Plus Jakarta Sans Medium"/>
               </a:rPr>
-              <a:t>— [Student Name], [grade], [School]</a:t>
+              <a:t>— Arnav Kochar, [grade], [School]</a:t>
             </a:r>
           </a:p>
         </p:txBody>
